--- a/proyectoguiado/protocoloinvestigacion/18_NunezSanchezAbraham.pptx
+++ b/proyectoguiado/protocoloinvestigacion/18_NunezSanchezAbraham.pptx
@@ -5,10 +5,10 @@
     <p:sldMasterId id="2147483648" r:id="rId1"/>
   </p:sldMasterIdLst>
   <p:notesMasterIdLst>
-    <p:notesMasterId r:id="rId21"/>
+    <p:notesMasterId r:id="rId19"/>
   </p:notesMasterIdLst>
   <p:handoutMasterIdLst>
-    <p:handoutMasterId r:id="rId22"/>
+    <p:handoutMasterId r:id="rId20"/>
   </p:handoutMasterIdLst>
   <p:sldIdLst>
     <p:sldId id="274" r:id="rId2"/>
@@ -18,18 +18,16 @@
     <p:sldId id="286" r:id="rId6"/>
     <p:sldId id="259" r:id="rId7"/>
     <p:sldId id="282" r:id="rId8"/>
-    <p:sldId id="283" r:id="rId9"/>
-    <p:sldId id="277" r:id="rId10"/>
-    <p:sldId id="278" r:id="rId11"/>
-    <p:sldId id="284" r:id="rId12"/>
-    <p:sldId id="261" r:id="rId13"/>
-    <p:sldId id="262" r:id="rId14"/>
-    <p:sldId id="263" r:id="rId15"/>
-    <p:sldId id="264" r:id="rId16"/>
-    <p:sldId id="279" r:id="rId17"/>
-    <p:sldId id="280" r:id="rId18"/>
-    <p:sldId id="266" r:id="rId19"/>
-    <p:sldId id="290" r:id="rId20"/>
+    <p:sldId id="277" r:id="rId9"/>
+    <p:sldId id="278" r:id="rId10"/>
+    <p:sldId id="261" r:id="rId11"/>
+    <p:sldId id="262" r:id="rId12"/>
+    <p:sldId id="263" r:id="rId13"/>
+    <p:sldId id="279" r:id="rId14"/>
+    <p:sldId id="280" r:id="rId15"/>
+    <p:sldId id="266" r:id="rId16"/>
+    <p:sldId id="290" r:id="rId17"/>
+    <p:sldId id="291" r:id="rId18"/>
   </p:sldIdLst>
   <p:sldSz cx="9144000" cy="5143500" type="screen16x9"/>
   <p:notesSz cx="9144000" cy="6858000"/>
@@ -150,6 +148,592 @@
 </p:presentation>
 </file>
 
+<file path=ppt/revisionInfo.xml><?xml version="1.0" encoding="utf-8"?>
+<p1510:revInfo xmlns:a="http://schemas.openxmlformats.org/drawingml/2006/main" xmlns:r="http://schemas.openxmlformats.org/officeDocument/2006/relationships" xmlns:p1510="http://schemas.microsoft.com/office/powerpoint/2015/10/main">
+  <p1510:revLst>
+    <p1510:client id="{161CE8F1-4F14-426A-8BD6-2CB06606BC25}" v="37" dt="2026-09-21T07:21:25.922"/>
+  </p1510:revLst>
+</p1510:revInfo>
+</file>
+
+<file path=ppt/changesInfos/changesInfo1.xml><?xml version="1.0" encoding="utf-8"?>
+<pc:chgInfo xmlns:a="http://schemas.openxmlformats.org/drawingml/2006/main" xmlns:r="http://schemas.openxmlformats.org/officeDocument/2006/relationships" xmlns:ac="http://schemas.microsoft.com/office/drawing/2013/main/command" xmlns:pc="http://schemas.microsoft.com/office/powerpoint/2013/main/command">
+  <pc:docChgLst>
+    <pc:chgData name="abraham nuñez" userId="bd9d5df499596b4b" providerId="LiveId" clId="{A6A091A1-9F13-4D41-9BAE-6C17967FD630}"/>
+    <pc:docChg chg="undo custSel addSld delSld modSld sldOrd">
+      <pc:chgData name="abraham nuñez" userId="bd9d5df499596b4b" providerId="LiveId" clId="{A6A091A1-9F13-4D41-9BAE-6C17967FD630}" dt="2026-09-21T07:25:29.720" v="610" actId="478"/>
+      <pc:docMkLst>
+        <pc:docMk/>
+      </pc:docMkLst>
+      <pc:sldChg chg="addSp delSp modSp mod">
+        <pc:chgData name="abraham nuñez" userId="bd9d5df499596b4b" providerId="LiveId" clId="{A6A091A1-9F13-4D41-9BAE-6C17967FD630}" dt="2026-09-21T07:21:13.364" v="577" actId="20577"/>
+        <pc:sldMkLst>
+          <pc:docMk/>
+          <pc:sldMk cId="0" sldId="259"/>
+        </pc:sldMkLst>
+        <pc:spChg chg="mod">
+          <ac:chgData name="abraham nuñez" userId="bd9d5df499596b4b" providerId="LiveId" clId="{A6A091A1-9F13-4D41-9BAE-6C17967FD630}" dt="2026-09-21T07:21:13.364" v="577" actId="20577"/>
+          <ac:spMkLst>
+            <pc:docMk/>
+            <pc:sldMk cId="0" sldId="259"/>
+            <ac:spMk id="3" creationId="{53AA2D8D-3B18-0AC3-7439-924F2AD9F437}"/>
+          </ac:spMkLst>
+        </pc:spChg>
+        <pc:spChg chg="add del mod">
+          <ac:chgData name="abraham nuñez" userId="bd9d5df499596b4b" providerId="LiveId" clId="{A6A091A1-9F13-4D41-9BAE-6C17967FD630}" dt="2026-09-21T07:21:11.319" v="576"/>
+          <ac:spMkLst>
+            <pc:docMk/>
+            <pc:sldMk cId="0" sldId="259"/>
+            <ac:spMk id="4" creationId="{105620F0-5E7C-8E4C-6FE4-4E9C03AA484C}"/>
+          </ac:spMkLst>
+        </pc:spChg>
+        <pc:spChg chg="mod">
+          <ac:chgData name="abraham nuñez" userId="bd9d5df499596b4b" providerId="LiveId" clId="{A6A091A1-9F13-4D41-9BAE-6C17967FD630}" dt="2026-09-21T01:22:58.504" v="53" actId="1076"/>
+          <ac:spMkLst>
+            <pc:docMk/>
+            <pc:sldMk cId="0" sldId="259"/>
+            <ac:spMk id="79" creationId="{00000000-0000-0000-0000-000000000000}"/>
+          </ac:spMkLst>
+        </pc:spChg>
+        <pc:picChg chg="add mod">
+          <ac:chgData name="abraham nuñez" userId="bd9d5df499596b4b" providerId="LiveId" clId="{A6A091A1-9F13-4D41-9BAE-6C17967FD630}" dt="2026-09-21T01:23:58.986" v="57" actId="1076"/>
+          <ac:picMkLst>
+            <pc:docMk/>
+            <pc:sldMk cId="0" sldId="259"/>
+            <ac:picMk id="2" creationId="{C33CCBA7-FECB-FAC1-3DC7-4564C778E573}"/>
+          </ac:picMkLst>
+        </pc:picChg>
+      </pc:sldChg>
+      <pc:sldChg chg="addSp delSp modSp mod">
+        <pc:chgData name="abraham nuñez" userId="bd9d5df499596b4b" providerId="LiveId" clId="{A6A091A1-9F13-4D41-9BAE-6C17967FD630}" dt="2026-09-21T07:21:44.460" v="588" actId="20577"/>
+        <pc:sldMkLst>
+          <pc:docMk/>
+          <pc:sldMk cId="0" sldId="261"/>
+        </pc:sldMkLst>
+        <pc:spChg chg="add mod">
+          <ac:chgData name="abraham nuñez" userId="bd9d5df499596b4b" providerId="LiveId" clId="{A6A091A1-9F13-4D41-9BAE-6C17967FD630}" dt="2026-09-21T06:45:56.796" v="376"/>
+          <ac:spMkLst>
+            <pc:docMk/>
+            <pc:sldMk cId="0" sldId="261"/>
+            <ac:spMk id="4" creationId="{7B6B0B62-24D4-1BEF-29B4-416C7F869B80}"/>
+          </ac:spMkLst>
+        </pc:spChg>
+        <pc:spChg chg="add mod">
+          <ac:chgData name="abraham nuñez" userId="bd9d5df499596b4b" providerId="LiveId" clId="{A6A091A1-9F13-4D41-9BAE-6C17967FD630}" dt="2026-09-21T06:43:56.189" v="375" actId="1076"/>
+          <ac:spMkLst>
+            <pc:docMk/>
+            <pc:sldMk cId="0" sldId="261"/>
+            <ac:spMk id="7" creationId="{7E66F582-17BB-5EE4-6866-B3A4B30EE6FA}"/>
+          </ac:spMkLst>
+        </pc:spChg>
+        <pc:spChg chg="add del mod">
+          <ac:chgData name="abraham nuñez" userId="bd9d5df499596b4b" providerId="LiveId" clId="{A6A091A1-9F13-4D41-9BAE-6C17967FD630}" dt="2026-09-21T06:41:23.006" v="354"/>
+          <ac:spMkLst>
+            <pc:docMk/>
+            <pc:sldMk cId="0" sldId="261"/>
+            <ac:spMk id="8" creationId="{4173017F-9CF5-59C3-AD3A-933F0DD8CF33}"/>
+          </ac:spMkLst>
+        </pc:spChg>
+        <pc:spChg chg="add del mod">
+          <ac:chgData name="abraham nuñez" userId="bd9d5df499596b4b" providerId="LiveId" clId="{A6A091A1-9F13-4D41-9BAE-6C17967FD630}" dt="2026-09-21T06:41:24.274" v="357"/>
+          <ac:spMkLst>
+            <pc:docMk/>
+            <pc:sldMk cId="0" sldId="261"/>
+            <ac:spMk id="9" creationId="{778B1741-61B3-8031-D773-CE95C8D8B2DE}"/>
+          </ac:spMkLst>
+        </pc:spChg>
+        <pc:spChg chg="add del mod">
+          <ac:chgData name="abraham nuñez" userId="bd9d5df499596b4b" providerId="LiveId" clId="{A6A091A1-9F13-4D41-9BAE-6C17967FD630}" dt="2026-09-21T06:41:25.025" v="360"/>
+          <ac:spMkLst>
+            <pc:docMk/>
+            <pc:sldMk cId="0" sldId="261"/>
+            <ac:spMk id="10" creationId="{7A1068B1-DA84-37F2-2CA6-E6DE74454A6F}"/>
+          </ac:spMkLst>
+        </pc:spChg>
+        <pc:spChg chg="add del mod">
+          <ac:chgData name="abraham nuñez" userId="bd9d5df499596b4b" providerId="LiveId" clId="{A6A091A1-9F13-4D41-9BAE-6C17967FD630}" dt="2026-09-21T06:41:25.524" v="363"/>
+          <ac:spMkLst>
+            <pc:docMk/>
+            <pc:sldMk cId="0" sldId="261"/>
+            <ac:spMk id="11" creationId="{F32860E2-4E0C-4FD4-8836-D2D7E892B734}"/>
+          </ac:spMkLst>
+        </pc:spChg>
+        <pc:spChg chg="add del mod">
+          <ac:chgData name="abraham nuñez" userId="bd9d5df499596b4b" providerId="LiveId" clId="{A6A091A1-9F13-4D41-9BAE-6C17967FD630}" dt="2026-09-21T06:41:27.005" v="366"/>
+          <ac:spMkLst>
+            <pc:docMk/>
+            <pc:sldMk cId="0" sldId="261"/>
+            <ac:spMk id="12" creationId="{B7707471-A44A-0EED-24ED-42576D9881F7}"/>
+          </ac:spMkLst>
+        </pc:spChg>
+        <pc:spChg chg="add del mod">
+          <ac:chgData name="abraham nuñez" userId="bd9d5df499596b4b" providerId="LiveId" clId="{A6A091A1-9F13-4D41-9BAE-6C17967FD630}" dt="2026-09-21T06:41:27.986" v="369"/>
+          <ac:spMkLst>
+            <pc:docMk/>
+            <pc:sldMk cId="0" sldId="261"/>
+            <ac:spMk id="13" creationId="{71C56541-AD77-1CDE-3948-172B815065ED}"/>
+          </ac:spMkLst>
+        </pc:spChg>
+        <pc:spChg chg="add del mod">
+          <ac:chgData name="abraham nuñez" userId="bd9d5df499596b4b" providerId="LiveId" clId="{A6A091A1-9F13-4D41-9BAE-6C17967FD630}" dt="2026-09-21T06:41:30.063" v="372"/>
+          <ac:spMkLst>
+            <pc:docMk/>
+            <pc:sldMk cId="0" sldId="261"/>
+            <ac:spMk id="14" creationId="{934176C7-91D1-1F7D-14DB-200083995528}"/>
+          </ac:spMkLst>
+        </pc:spChg>
+        <pc:spChg chg="mod">
+          <ac:chgData name="abraham nuñez" userId="bd9d5df499596b4b" providerId="LiveId" clId="{A6A091A1-9F13-4D41-9BAE-6C17967FD630}" dt="2026-09-21T07:21:44.460" v="588" actId="20577"/>
+          <ac:spMkLst>
+            <pc:docMk/>
+            <pc:sldMk cId="0" sldId="261"/>
+            <ac:spMk id="15" creationId="{AAA7A88E-A6B4-D326-0667-CA42721358F9}"/>
+          </ac:spMkLst>
+        </pc:spChg>
+        <pc:spChg chg="mod">
+          <ac:chgData name="abraham nuñez" userId="bd9d5df499596b4b" providerId="LiveId" clId="{A6A091A1-9F13-4D41-9BAE-6C17967FD630}" dt="2026-09-21T01:53:01.761" v="283" actId="1076"/>
+          <ac:spMkLst>
+            <pc:docMk/>
+            <pc:sldMk cId="0" sldId="261"/>
+            <ac:spMk id="97" creationId="{00000000-0000-0000-0000-000000000000}"/>
+          </ac:spMkLst>
+        </pc:spChg>
+        <pc:spChg chg="mod">
+          <ac:chgData name="abraham nuñez" userId="bd9d5df499596b4b" providerId="LiveId" clId="{A6A091A1-9F13-4D41-9BAE-6C17967FD630}" dt="2026-09-21T01:33:52.439" v="100" actId="1076"/>
+          <ac:spMkLst>
+            <pc:docMk/>
+            <pc:sldMk cId="0" sldId="261"/>
+            <ac:spMk id="98" creationId="{00000000-0000-0000-0000-000000000000}"/>
+          </ac:spMkLst>
+        </pc:spChg>
+        <pc:picChg chg="mod">
+          <ac:chgData name="abraham nuñez" userId="bd9d5df499596b4b" providerId="LiveId" clId="{A6A091A1-9F13-4D41-9BAE-6C17967FD630}" dt="2026-09-21T01:53:04.084" v="284" actId="14100"/>
+          <ac:picMkLst>
+            <pc:docMk/>
+            <pc:sldMk cId="0" sldId="261"/>
+            <ac:picMk id="2" creationId="{783D423B-2E0C-F5E0-7C0C-65E3AA87B74C}"/>
+          </ac:picMkLst>
+        </pc:picChg>
+      </pc:sldChg>
+      <pc:sldChg chg="modSp mod">
+        <pc:chgData name="abraham nuñez" userId="bd9d5df499596b4b" providerId="LiveId" clId="{A6A091A1-9F13-4D41-9BAE-6C17967FD630}" dt="2026-09-21T07:21:52.784" v="591" actId="20577"/>
+        <pc:sldMkLst>
+          <pc:docMk/>
+          <pc:sldMk cId="0" sldId="262"/>
+        </pc:sldMkLst>
+        <pc:spChg chg="mod">
+          <ac:chgData name="abraham nuñez" userId="bd9d5df499596b4b" providerId="LiveId" clId="{A6A091A1-9F13-4D41-9BAE-6C17967FD630}" dt="2026-09-21T07:21:52.784" v="591" actId="20577"/>
+          <ac:spMkLst>
+            <pc:docMk/>
+            <pc:sldMk cId="0" sldId="262"/>
+            <ac:spMk id="2" creationId="{ABDE6C31-5AE2-2491-732D-A896560F30B4}"/>
+          </ac:spMkLst>
+        </pc:spChg>
+        <pc:spChg chg="mod">
+          <ac:chgData name="abraham nuñez" userId="bd9d5df499596b4b" providerId="LiveId" clId="{A6A091A1-9F13-4D41-9BAE-6C17967FD630}" dt="2026-09-21T06:38:58.189" v="330" actId="114"/>
+          <ac:spMkLst>
+            <pc:docMk/>
+            <pc:sldMk cId="0" sldId="262"/>
+            <ac:spMk id="108" creationId="{00000000-0000-0000-0000-000000000000}"/>
+          </ac:spMkLst>
+        </pc:spChg>
+        <pc:spChg chg="mod">
+          <ac:chgData name="abraham nuñez" userId="bd9d5df499596b4b" providerId="LiveId" clId="{A6A091A1-9F13-4D41-9BAE-6C17967FD630}" dt="2026-09-21T06:04:54.025" v="306" actId="20577"/>
+          <ac:spMkLst>
+            <pc:docMk/>
+            <pc:sldMk cId="0" sldId="262"/>
+            <ac:spMk id="109" creationId="{00000000-0000-0000-0000-000000000000}"/>
+          </ac:spMkLst>
+        </pc:spChg>
+      </pc:sldChg>
+      <pc:sldChg chg="modSp mod">
+        <pc:chgData name="abraham nuñez" userId="bd9d5df499596b4b" providerId="LiveId" clId="{A6A091A1-9F13-4D41-9BAE-6C17967FD630}" dt="2026-09-21T07:22:00.280" v="594" actId="20577"/>
+        <pc:sldMkLst>
+          <pc:docMk/>
+          <pc:sldMk cId="0" sldId="263"/>
+        </pc:sldMkLst>
+        <pc:spChg chg="mod">
+          <ac:chgData name="abraham nuñez" userId="bd9d5df499596b4b" providerId="LiveId" clId="{A6A091A1-9F13-4D41-9BAE-6C17967FD630}" dt="2026-09-21T07:22:00.280" v="594" actId="20577"/>
+          <ac:spMkLst>
+            <pc:docMk/>
+            <pc:sldMk cId="0" sldId="263"/>
+            <ac:spMk id="2" creationId="{58FF16D7-0CA2-328F-7918-CEA7426004C7}"/>
+          </ac:spMkLst>
+        </pc:spChg>
+      </pc:sldChg>
+      <pc:sldChg chg="del">
+        <pc:chgData name="abraham nuñez" userId="bd9d5df499596b4b" providerId="LiveId" clId="{A6A091A1-9F13-4D41-9BAE-6C17967FD630}" dt="2026-09-21T01:16:16.709" v="11" actId="47"/>
+        <pc:sldMkLst>
+          <pc:docMk/>
+          <pc:sldMk cId="0" sldId="264"/>
+        </pc:sldMkLst>
+      </pc:sldChg>
+      <pc:sldChg chg="modSp mod">
+        <pc:chgData name="abraham nuñez" userId="bd9d5df499596b4b" providerId="LiveId" clId="{A6A091A1-9F13-4D41-9BAE-6C17967FD630}" dt="2026-09-21T07:22:23.048" v="604" actId="1076"/>
+        <pc:sldMkLst>
+          <pc:docMk/>
+          <pc:sldMk cId="0" sldId="266"/>
+        </pc:sldMkLst>
+        <pc:spChg chg="mod">
+          <ac:chgData name="abraham nuñez" userId="bd9d5df499596b4b" providerId="LiveId" clId="{A6A091A1-9F13-4D41-9BAE-6C17967FD630}" dt="2026-09-21T07:22:23.048" v="604" actId="1076"/>
+          <ac:spMkLst>
+            <pc:docMk/>
+            <pc:sldMk cId="0" sldId="266"/>
+            <ac:spMk id="2" creationId="{DC9CED28-FF84-29F9-CB33-3245191598F9}"/>
+          </ac:spMkLst>
+        </pc:spChg>
+      </pc:sldChg>
+      <pc:sldChg chg="addSp delSp modSp mod">
+        <pc:chgData name="abraham nuñez" userId="bd9d5df499596b4b" providerId="LiveId" clId="{A6A091A1-9F13-4D41-9BAE-6C17967FD630}" dt="2026-09-21T07:25:29.720" v="610" actId="478"/>
+        <pc:sldMkLst>
+          <pc:docMk/>
+          <pc:sldMk cId="4101506514" sldId="274"/>
+        </pc:sldMkLst>
+        <pc:spChg chg="mod">
+          <ac:chgData name="abraham nuñez" userId="bd9d5df499596b4b" providerId="LiveId" clId="{A6A091A1-9F13-4D41-9BAE-6C17967FD630}" dt="2026-09-21T01:12:53.639" v="10" actId="114"/>
+          <ac:spMkLst>
+            <pc:docMk/>
+            <pc:sldMk cId="4101506514" sldId="274"/>
+            <ac:spMk id="5" creationId="{00000000-0000-0000-0000-000000000000}"/>
+          </ac:spMkLst>
+        </pc:spChg>
+        <pc:picChg chg="add del mod modCrop">
+          <ac:chgData name="abraham nuñez" userId="bd9d5df499596b4b" providerId="LiveId" clId="{A6A091A1-9F13-4D41-9BAE-6C17967FD630}" dt="2026-09-21T07:25:29.720" v="610" actId="478"/>
+          <ac:picMkLst>
+            <pc:docMk/>
+            <pc:sldMk cId="4101506514" sldId="274"/>
+            <ac:picMk id="6" creationId="{E8FB7686-6831-4A0B-5377-CFA178588966}"/>
+          </ac:picMkLst>
+        </pc:picChg>
+      </pc:sldChg>
+      <pc:sldChg chg="addSp modSp mod">
+        <pc:chgData name="abraham nuñez" userId="bd9d5df499596b4b" providerId="LiveId" clId="{A6A091A1-9F13-4D41-9BAE-6C17967FD630}" dt="2026-09-21T07:20:40.079" v="567" actId="20577"/>
+        <pc:sldMkLst>
+          <pc:docMk/>
+          <pc:sldMk cId="1353462178" sldId="275"/>
+        </pc:sldMkLst>
+        <pc:spChg chg="mod">
+          <ac:chgData name="abraham nuñez" userId="bd9d5df499596b4b" providerId="LiveId" clId="{A6A091A1-9F13-4D41-9BAE-6C17967FD630}" dt="2026-09-21T07:12:48.959" v="470" actId="20577"/>
+          <ac:spMkLst>
+            <pc:docMk/>
+            <pc:sldMk cId="1353462178" sldId="275"/>
+            <ac:spMk id="3" creationId="{00000000-0000-0000-0000-000000000000}"/>
+          </ac:spMkLst>
+        </pc:spChg>
+        <pc:spChg chg="add mod">
+          <ac:chgData name="abraham nuñez" userId="bd9d5df499596b4b" providerId="LiveId" clId="{A6A091A1-9F13-4D41-9BAE-6C17967FD630}" dt="2026-09-21T07:11:45.001" v="466" actId="20577"/>
+          <ac:spMkLst>
+            <pc:docMk/>
+            <pc:sldMk cId="1353462178" sldId="275"/>
+            <ac:spMk id="5" creationId="{FF358467-0AA5-1AE0-C097-16C68CEABDDA}"/>
+          </ac:spMkLst>
+        </pc:spChg>
+        <pc:spChg chg="add mod">
+          <ac:chgData name="abraham nuñez" userId="bd9d5df499596b4b" providerId="LiveId" clId="{A6A091A1-9F13-4D41-9BAE-6C17967FD630}" dt="2026-09-21T07:20:40.079" v="567" actId="20577"/>
+          <ac:spMkLst>
+            <pc:docMk/>
+            <pc:sldMk cId="1353462178" sldId="275"/>
+            <ac:spMk id="6" creationId="{D666D0E3-F5A5-F6ED-6400-6E878629992E}"/>
+          </ac:spMkLst>
+        </pc:spChg>
+        <pc:picChg chg="mod">
+          <ac:chgData name="abraham nuñez" userId="bd9d5df499596b4b" providerId="LiveId" clId="{A6A091A1-9F13-4D41-9BAE-6C17967FD630}" dt="2026-09-21T07:10:50.884" v="446" actId="1076"/>
+          <ac:picMkLst>
+            <pc:docMk/>
+            <pc:sldMk cId="1353462178" sldId="275"/>
+            <ac:picMk id="8" creationId="{60842E29-6352-B73E-66EC-5F98AA87C017}"/>
+          </ac:picMkLst>
+        </pc:picChg>
+      </pc:sldChg>
+      <pc:sldChg chg="addSp delSp modSp mod">
+        <pc:chgData name="abraham nuñez" userId="bd9d5df499596b4b" providerId="LiveId" clId="{A6A091A1-9F13-4D41-9BAE-6C17967FD630}" dt="2026-09-21T07:21:30.083" v="584" actId="20577"/>
+        <pc:sldMkLst>
+          <pc:docMk/>
+          <pc:sldMk cId="2211088775" sldId="277"/>
+        </pc:sldMkLst>
+        <pc:spChg chg="mod">
+          <ac:chgData name="abraham nuñez" userId="bd9d5df499596b4b" providerId="LiveId" clId="{A6A091A1-9F13-4D41-9BAE-6C17967FD630}" dt="2026-09-21T01:26:08.575" v="70" actId="1076"/>
+          <ac:spMkLst>
+            <pc:docMk/>
+            <pc:sldMk cId="2211088775" sldId="277"/>
+            <ac:spMk id="2" creationId="{00000000-0000-0000-0000-000000000000}"/>
+          </ac:spMkLst>
+        </pc:spChg>
+        <pc:spChg chg="add mod">
+          <ac:chgData name="abraham nuñez" userId="bd9d5df499596b4b" providerId="LiveId" clId="{A6A091A1-9F13-4D41-9BAE-6C17967FD630}" dt="2026-09-21T07:21:30.083" v="584" actId="20577"/>
+          <ac:spMkLst>
+            <pc:docMk/>
+            <pc:sldMk cId="2211088775" sldId="277"/>
+            <ac:spMk id="4" creationId="{5B8B6F36-B13C-502C-3B62-99065795C128}"/>
+          </ac:spMkLst>
+        </pc:spChg>
+        <pc:spChg chg="mod">
+          <ac:chgData name="abraham nuñez" userId="bd9d5df499596b4b" providerId="LiveId" clId="{A6A091A1-9F13-4D41-9BAE-6C17967FD630}" dt="2026-09-21T01:26:04.776" v="69" actId="1076"/>
+          <ac:spMkLst>
+            <pc:docMk/>
+            <pc:sldMk cId="2211088775" sldId="277"/>
+            <ac:spMk id="5" creationId="{00000000-0000-0000-0000-000000000000}"/>
+          </ac:spMkLst>
+        </pc:spChg>
+        <pc:spChg chg="add del mod">
+          <ac:chgData name="abraham nuñez" userId="bd9d5df499596b4b" providerId="LiveId" clId="{A6A091A1-9F13-4D41-9BAE-6C17967FD630}" dt="2026-09-21T07:21:27.088" v="583"/>
+          <ac:spMkLst>
+            <pc:docMk/>
+            <pc:sldMk cId="2211088775" sldId="277"/>
+            <ac:spMk id="6" creationId="{C5D7AD09-F95D-84B5-6611-ED7B7DCBCF04}"/>
+          </ac:spMkLst>
+        </pc:spChg>
+        <pc:picChg chg="add mod">
+          <ac:chgData name="abraham nuñez" userId="bd9d5df499596b4b" providerId="LiveId" clId="{A6A091A1-9F13-4D41-9BAE-6C17967FD630}" dt="2026-09-21T01:26:00.913" v="68" actId="1076"/>
+          <ac:picMkLst>
+            <pc:docMk/>
+            <pc:sldMk cId="2211088775" sldId="277"/>
+            <ac:picMk id="3" creationId="{B199723B-E06E-0EA8-D558-0D43D5139EBE}"/>
+          </ac:picMkLst>
+        </pc:picChg>
+      </pc:sldChg>
+      <pc:sldChg chg="addSp modSp mod">
+        <pc:chgData name="abraham nuñez" userId="bd9d5df499596b4b" providerId="LiveId" clId="{A6A091A1-9F13-4D41-9BAE-6C17967FD630}" dt="2026-09-21T07:21:36.914" v="586" actId="20577"/>
+        <pc:sldMkLst>
+          <pc:docMk/>
+          <pc:sldMk cId="610408008" sldId="278"/>
+        </pc:sldMkLst>
+        <pc:spChg chg="add mod">
+          <ac:chgData name="abraham nuñez" userId="bd9d5df499596b4b" providerId="LiveId" clId="{A6A091A1-9F13-4D41-9BAE-6C17967FD630}" dt="2026-09-21T07:21:36.914" v="586" actId="20577"/>
+          <ac:spMkLst>
+            <pc:docMk/>
+            <pc:sldMk cId="610408008" sldId="278"/>
+            <ac:spMk id="2" creationId="{99BB89F3-DAA2-E5EF-65B7-7B634887A93C}"/>
+          </ac:spMkLst>
+        </pc:spChg>
+        <pc:spChg chg="mod">
+          <ac:chgData name="abraham nuñez" userId="bd9d5df499596b4b" providerId="LiveId" clId="{A6A091A1-9F13-4D41-9BAE-6C17967FD630}" dt="2026-09-21T01:26:35.281" v="73" actId="27636"/>
+          <ac:spMkLst>
+            <pc:docMk/>
+            <pc:sldMk cId="610408008" sldId="278"/>
+            <ac:spMk id="3" creationId="{588CB29A-C4FE-7078-1DC2-D2E27CB5BECC}"/>
+          </ac:spMkLst>
+        </pc:spChg>
+        <pc:spChg chg="mod">
+          <ac:chgData name="abraham nuñez" userId="bd9d5df499596b4b" providerId="LiveId" clId="{A6A091A1-9F13-4D41-9BAE-6C17967FD630}" dt="2026-09-21T01:22:14.494" v="44" actId="20577"/>
+          <ac:spMkLst>
+            <pc:docMk/>
+            <pc:sldMk cId="610408008" sldId="278"/>
+            <ac:spMk id="4" creationId="{5E16FE36-B834-A692-EE0B-B6D28EC6B825}"/>
+          </ac:spMkLst>
+        </pc:spChg>
+      </pc:sldChg>
+      <pc:sldChg chg="modSp mod">
+        <pc:chgData name="abraham nuñez" userId="bd9d5df499596b4b" providerId="LiveId" clId="{A6A091A1-9F13-4D41-9BAE-6C17967FD630}" dt="2026-09-21T07:22:05.712" v="597" actId="20577"/>
+        <pc:sldMkLst>
+          <pc:docMk/>
+          <pc:sldMk cId="151726750" sldId="279"/>
+        </pc:sldMkLst>
+        <pc:spChg chg="mod">
+          <ac:chgData name="abraham nuñez" userId="bd9d5df499596b4b" providerId="LiveId" clId="{A6A091A1-9F13-4D41-9BAE-6C17967FD630}" dt="2026-09-21T07:22:05.712" v="597" actId="20577"/>
+          <ac:spMkLst>
+            <pc:docMk/>
+            <pc:sldMk cId="151726750" sldId="279"/>
+            <ac:spMk id="2" creationId="{F8036404-E725-CCBA-948A-B3B4F8207D3A}"/>
+          </ac:spMkLst>
+        </pc:spChg>
+        <pc:spChg chg="mod">
+          <ac:chgData name="abraham nuñez" userId="bd9d5df499596b4b" providerId="LiveId" clId="{A6A091A1-9F13-4D41-9BAE-6C17967FD630}" dt="2026-09-21T01:17:17.552" v="25" actId="20577"/>
+          <ac:spMkLst>
+            <pc:docMk/>
+            <pc:sldMk cId="151726750" sldId="279"/>
+            <ac:spMk id="120" creationId="{C022D33D-5B98-BC33-C023-0569B556152B}"/>
+          </ac:spMkLst>
+        </pc:spChg>
+        <pc:picChg chg="mod">
+          <ac:chgData name="abraham nuñez" userId="bd9d5df499596b4b" providerId="LiveId" clId="{A6A091A1-9F13-4D41-9BAE-6C17967FD630}" dt="2026-09-21T01:17:01.772" v="23" actId="1076"/>
+          <ac:picMkLst>
+            <pc:docMk/>
+            <pc:sldMk cId="151726750" sldId="279"/>
+            <ac:picMk id="3" creationId="{B9DC538D-8BF1-E181-7202-76611EC121EC}"/>
+          </ac:picMkLst>
+        </pc:picChg>
+      </pc:sldChg>
+      <pc:sldChg chg="modSp mod">
+        <pc:chgData name="abraham nuñez" userId="bd9d5df499596b4b" providerId="LiveId" clId="{A6A091A1-9F13-4D41-9BAE-6C17967FD630}" dt="2026-09-21T07:22:14.806" v="600" actId="20577"/>
+        <pc:sldMkLst>
+          <pc:docMk/>
+          <pc:sldMk cId="3848494639" sldId="280"/>
+        </pc:sldMkLst>
+        <pc:spChg chg="mod">
+          <ac:chgData name="abraham nuñez" userId="bd9d5df499596b4b" providerId="LiveId" clId="{A6A091A1-9F13-4D41-9BAE-6C17967FD630}" dt="2026-09-21T07:22:14.806" v="600" actId="20577"/>
+          <ac:spMkLst>
+            <pc:docMk/>
+            <pc:sldMk cId="3848494639" sldId="280"/>
+            <ac:spMk id="2" creationId="{1075547A-0F21-EEBC-DFC4-A6B82216B428}"/>
+          </ac:spMkLst>
+        </pc:spChg>
+      </pc:sldChg>
+      <pc:sldChg chg="addSp modSp mod">
+        <pc:chgData name="abraham nuñez" userId="bd9d5df499596b4b" providerId="LiveId" clId="{A6A091A1-9F13-4D41-9BAE-6C17967FD630}" dt="2026-09-21T07:21:19.698" v="579" actId="20577"/>
+        <pc:sldMkLst>
+          <pc:docMk/>
+          <pc:sldMk cId="2309812993" sldId="282"/>
+        </pc:sldMkLst>
+        <pc:spChg chg="add mod">
+          <ac:chgData name="abraham nuñez" userId="bd9d5df499596b4b" providerId="LiveId" clId="{A6A091A1-9F13-4D41-9BAE-6C17967FD630}" dt="2026-09-21T07:21:19.698" v="579" actId="20577"/>
+          <ac:spMkLst>
+            <pc:docMk/>
+            <pc:sldMk cId="2309812993" sldId="282"/>
+            <ac:spMk id="2" creationId="{EEAC64ED-14EF-C2AE-854D-71FACE13C00E}"/>
+          </ac:spMkLst>
+        </pc:spChg>
+        <pc:spChg chg="mod">
+          <ac:chgData name="abraham nuñez" userId="bd9d5df499596b4b" providerId="LiveId" clId="{A6A091A1-9F13-4D41-9BAE-6C17967FD630}" dt="2026-09-21T01:47:01.164" v="165" actId="27636"/>
+          <ac:spMkLst>
+            <pc:docMk/>
+            <pc:sldMk cId="2309812993" sldId="282"/>
+            <ac:spMk id="3" creationId="{6C0E9478-BBF1-2827-226A-8E8F2ABE2464}"/>
+          </ac:spMkLst>
+        </pc:spChg>
+        <pc:spChg chg="mod">
+          <ac:chgData name="abraham nuñez" userId="bd9d5df499596b4b" providerId="LiveId" clId="{A6A091A1-9F13-4D41-9BAE-6C17967FD630}" dt="2026-09-21T01:46:44.592" v="157" actId="1076"/>
+          <ac:spMkLst>
+            <pc:docMk/>
+            <pc:sldMk cId="2309812993" sldId="282"/>
+            <ac:spMk id="4" creationId="{5557F97A-23A3-481A-499B-3E6CB0AA3F96}"/>
+          </ac:spMkLst>
+        </pc:spChg>
+      </pc:sldChg>
+      <pc:sldChg chg="modSp del mod">
+        <pc:chgData name="abraham nuñez" userId="bd9d5df499596b4b" providerId="LiveId" clId="{A6A091A1-9F13-4D41-9BAE-6C17967FD630}" dt="2026-09-21T01:47:05.454" v="166" actId="47"/>
+        <pc:sldMkLst>
+          <pc:docMk/>
+          <pc:sldMk cId="3106519394" sldId="283"/>
+        </pc:sldMkLst>
+        <pc:spChg chg="mod">
+          <ac:chgData name="abraham nuñez" userId="bd9d5df499596b4b" providerId="LiveId" clId="{A6A091A1-9F13-4D41-9BAE-6C17967FD630}" dt="2026-09-21T01:46:13.971" v="139" actId="27636"/>
+          <ac:spMkLst>
+            <pc:docMk/>
+            <pc:sldMk cId="3106519394" sldId="283"/>
+            <ac:spMk id="3" creationId="{4D47E8E9-88AF-B6C0-5243-259089C2CBB6}"/>
+          </ac:spMkLst>
+        </pc:spChg>
+      </pc:sldChg>
+      <pc:sldChg chg="del">
+        <pc:chgData name="abraham nuñez" userId="bd9d5df499596b4b" providerId="LiveId" clId="{A6A091A1-9F13-4D41-9BAE-6C17967FD630}" dt="2026-09-21T01:22:08.873" v="42" actId="47"/>
+        <pc:sldMkLst>
+          <pc:docMk/>
+          <pc:sldMk cId="980608183" sldId="284"/>
+        </pc:sldMkLst>
+      </pc:sldChg>
+      <pc:sldChg chg="addSp modSp mod">
+        <pc:chgData name="abraham nuñez" userId="bd9d5df499596b4b" providerId="LiveId" clId="{A6A091A1-9F13-4D41-9BAE-6C17967FD630}" dt="2026-09-21T07:21:00.427" v="572" actId="1076"/>
+        <pc:sldMkLst>
+          <pc:docMk/>
+          <pc:sldMk cId="3156132340" sldId="285"/>
+        </pc:sldMkLst>
+        <pc:spChg chg="add mod">
+          <ac:chgData name="abraham nuñez" userId="bd9d5df499596b4b" providerId="LiveId" clId="{A6A091A1-9F13-4D41-9BAE-6C17967FD630}" dt="2026-09-21T07:21:00.427" v="572" actId="1076"/>
+          <ac:spMkLst>
+            <pc:docMk/>
+            <pc:sldMk cId="3156132340" sldId="285"/>
+            <ac:spMk id="3" creationId="{95EC3A0D-CB8D-DEC0-F80A-0B3D882AEEDC}"/>
+          </ac:spMkLst>
+        </pc:spChg>
+        <pc:spChg chg="mod">
+          <ac:chgData name="abraham nuñez" userId="bd9d5df499596b4b" providerId="LiveId" clId="{A6A091A1-9F13-4D41-9BAE-6C17967FD630}" dt="2026-09-21T07:14:38.758" v="471" actId="20577"/>
+          <ac:spMkLst>
+            <pc:docMk/>
+            <pc:sldMk cId="3156132340" sldId="285"/>
+            <ac:spMk id="9" creationId="{E36B1EA9-9142-9E4E-124E-18624A39E2A3}"/>
+          </ac:spMkLst>
+        </pc:spChg>
+      </pc:sldChg>
+      <pc:sldChg chg="modSp mod">
+        <pc:chgData name="abraham nuñez" userId="bd9d5df499596b4b" providerId="LiveId" clId="{A6A091A1-9F13-4D41-9BAE-6C17967FD630}" dt="2026-09-21T07:20:55.608" v="571" actId="1076"/>
+        <pc:sldMkLst>
+          <pc:docMk/>
+          <pc:sldMk cId="4293610226" sldId="286"/>
+        </pc:sldMkLst>
+        <pc:spChg chg="mod">
+          <ac:chgData name="abraham nuñez" userId="bd9d5df499596b4b" providerId="LiveId" clId="{A6A091A1-9F13-4D41-9BAE-6C17967FD630}" dt="2026-09-21T07:20:55.608" v="571" actId="1076"/>
+          <ac:spMkLst>
+            <pc:docMk/>
+            <pc:sldMk cId="4293610226" sldId="286"/>
+            <ac:spMk id="2" creationId="{93B3C97C-7D6D-04E0-49AB-7FFA48553F36}"/>
+          </ac:spMkLst>
+        </pc:spChg>
+        <pc:spChg chg="mod">
+          <ac:chgData name="abraham nuñez" userId="bd9d5df499596b4b" providerId="LiveId" clId="{A6A091A1-9F13-4D41-9BAE-6C17967FD630}" dt="2026-09-21T01:57:15.745" v="298" actId="1076"/>
+          <ac:spMkLst>
+            <pc:docMk/>
+            <pc:sldMk cId="4293610226" sldId="286"/>
+            <ac:spMk id="72" creationId="{706EBD6F-8D5F-C43A-4424-E45EAE312955}"/>
+          </ac:spMkLst>
+        </pc:spChg>
+      </pc:sldChg>
+      <pc:sldChg chg="addSp modSp mod">
+        <pc:chgData name="abraham nuñez" userId="bd9d5df499596b4b" providerId="LiveId" clId="{A6A091A1-9F13-4D41-9BAE-6C17967FD630}" dt="2026-09-21T07:20:49.338" v="569" actId="20577"/>
+        <pc:sldMkLst>
+          <pc:docMk/>
+          <pc:sldMk cId="2988819339" sldId="289"/>
+        </pc:sldMkLst>
+        <pc:spChg chg="add mod">
+          <ac:chgData name="abraham nuñez" userId="bd9d5df499596b4b" providerId="LiveId" clId="{A6A091A1-9F13-4D41-9BAE-6C17967FD630}" dt="2026-09-21T07:20:49.338" v="569" actId="20577"/>
+          <ac:spMkLst>
+            <pc:docMk/>
+            <pc:sldMk cId="2988819339" sldId="289"/>
+            <ac:spMk id="3" creationId="{FA5C9D12-2CF0-8EDA-CEA1-634C8C30040D}"/>
+          </ac:spMkLst>
+        </pc:spChg>
+        <pc:graphicFrameChg chg="mod modGraphic">
+          <ac:chgData name="abraham nuñez" userId="bd9d5df499596b4b" providerId="LiveId" clId="{A6A091A1-9F13-4D41-9BAE-6C17967FD630}" dt="2026-09-21T07:04:31.806" v="404"/>
+          <ac:graphicFrameMkLst>
+            <pc:docMk/>
+            <pc:sldMk cId="2988819339" sldId="289"/>
+            <ac:graphicFrameMk id="5" creationId="{CD1C1211-B00E-08B6-BDFD-7BB10122D715}"/>
+          </ac:graphicFrameMkLst>
+        </pc:graphicFrameChg>
+      </pc:sldChg>
+      <pc:sldChg chg="modSp mod">
+        <pc:chgData name="abraham nuñez" userId="bd9d5df499596b4b" providerId="LiveId" clId="{A6A091A1-9F13-4D41-9BAE-6C17967FD630}" dt="2026-09-21T07:22:29.123" v="607" actId="20577"/>
+        <pc:sldMkLst>
+          <pc:docMk/>
+          <pc:sldMk cId="2775609210" sldId="290"/>
+        </pc:sldMkLst>
+        <pc:spChg chg="mod">
+          <ac:chgData name="abraham nuñez" userId="bd9d5df499596b4b" providerId="LiveId" clId="{A6A091A1-9F13-4D41-9BAE-6C17967FD630}" dt="2026-09-21T07:22:29.123" v="607" actId="20577"/>
+          <ac:spMkLst>
+            <pc:docMk/>
+            <pc:sldMk cId="2775609210" sldId="290"/>
+            <ac:spMk id="2" creationId="{678CAE23-794B-99A3-85A2-4283E1A0A800}"/>
+          </ac:spMkLst>
+        </pc:spChg>
+        <pc:spChg chg="mod">
+          <ac:chgData name="abraham nuñez" userId="bd9d5df499596b4b" providerId="LiveId" clId="{A6A091A1-9F13-4D41-9BAE-6C17967FD630}" dt="2026-09-21T07:18:57.496" v="556" actId="14100"/>
+          <ac:spMkLst>
+            <pc:docMk/>
+            <pc:sldMk cId="2775609210" sldId="290"/>
+            <ac:spMk id="123" creationId="{EED723C5-1285-4756-2430-0478250559CA}"/>
+          </ac:spMkLst>
+        </pc:spChg>
+      </pc:sldChg>
+      <pc:sldChg chg="delSp add mod ord">
+        <pc:chgData name="abraham nuñez" userId="bd9d5df499596b4b" providerId="LiveId" clId="{A6A091A1-9F13-4D41-9BAE-6C17967FD630}" dt="2026-09-21T05:18:07.769" v="302" actId="478"/>
+        <pc:sldMkLst>
+          <pc:docMk/>
+          <pc:sldMk cId="2946905072" sldId="291"/>
+        </pc:sldMkLst>
+        <pc:picChg chg="del">
+          <ac:chgData name="abraham nuñez" userId="bd9d5df499596b4b" providerId="LiveId" clId="{A6A091A1-9F13-4D41-9BAE-6C17967FD630}" dt="2026-09-21T05:18:07.769" v="302" actId="478"/>
+          <ac:picMkLst>
+            <pc:docMk/>
+            <pc:sldMk cId="2946905072" sldId="291"/>
+            <ac:picMk id="6" creationId="{9D6FF170-E191-F292-DBA9-5AC58DE4BA86}"/>
+          </ac:picMkLst>
+        </pc:picChg>
+      </pc:sldChg>
+    </pc:docChg>
+  </pc:docChgLst>
+</pc:chgInfo>
+</file>
+
 <file path=ppt/handoutMasters/handoutMaster1.xml><?xml version="1.0" encoding="utf-8"?>
 <p:handoutMaster xmlns:a="http://schemas.openxmlformats.org/drawingml/2006/main" xmlns:r="http://schemas.openxmlformats.org/officeDocument/2006/relationships" xmlns:p="http://schemas.openxmlformats.org/presentationml/2006/main">
   <p:cSld>
@@ -244,7 +828,7 @@
           <a:p>
             <a:fld id="{E97EE0EA-D68F-4DB7-A706-3E86C567C34E}" type="datetimeFigureOut">
               <a:rPr lang="es-MX" smtClean="0"/>
-              <a:t>19/09/2026</a:t>
+              <a:t>21/09/2026</a:t>
             </a:fld>
             <a:endParaRPr lang="es-MX"/>
           </a:p>
@@ -422,7 +1006,7 @@
           <a:p>
             <a:fld id="{1649DCB8-392E-40F3-82B8-A61CDD22F42E}" type="datetimeFigureOut">
               <a:rPr lang="es-MX" smtClean="0"/>
-              <a:t>19/09/2026</a:t>
+              <a:t>21/09/2026</a:t>
             </a:fld>
             <a:endParaRPr lang="es-MX"/>
           </a:p>
@@ -818,133 +1402,6 @@
 </p:notes>
 </file>
 
-<file path=ppt/notesSlides/notesSlide10.xml><?xml version="1.0" encoding="utf-8"?>
-<p:notes xmlns:a="http://schemas.openxmlformats.org/drawingml/2006/main" xmlns:r="http://schemas.openxmlformats.org/officeDocument/2006/relationships" xmlns:p="http://schemas.openxmlformats.org/presentationml/2006/main" showMasterSp="0" showMasterPhAnim="0">
-  <p:cSld>
-    <p:spTree>
-      <p:nvGrpSpPr>
-        <p:cNvPr id="1" name="Shape 116">
-          <a:extLst>
-            <a:ext uri="{FF2B5EF4-FFF2-40B4-BE49-F238E27FC236}">
-              <a16:creationId xmlns:a16="http://schemas.microsoft.com/office/drawing/2014/main" id="{5FE03017-32CC-C0E4-7164-66A3C085C82F}"/>
-            </a:ext>
-          </a:extLst>
-        </p:cNvPr>
-        <p:cNvGrpSpPr/>
-        <p:nvPr/>
-      </p:nvGrpSpPr>
-      <p:grpSpPr>
-        <a:xfrm>
-          <a:off x="0" y="0"/>
-          <a:ext cx="0" cy="0"/>
-          <a:chOff x="0" y="0"/>
-          <a:chExt cx="0" cy="0"/>
-        </a:xfrm>
-      </p:grpSpPr>
-      <p:sp>
-        <p:nvSpPr>
-          <p:cNvPr id="117" name="Google Shape;117;g3fb8bfecde3_0_43:notes">
-            <a:extLst>
-              <a:ext uri="{FF2B5EF4-FFF2-40B4-BE49-F238E27FC236}">
-                <a16:creationId xmlns:a16="http://schemas.microsoft.com/office/drawing/2014/main" id="{DCF336BD-AE1D-D93C-B4F5-39396658D972}"/>
-              </a:ext>
-            </a:extLst>
-          </p:cNvPr>
-          <p:cNvSpPr txBox="1">
-            <a:spLocks noGrp="1"/>
-          </p:cNvSpPr>
-          <p:nvPr>
-            <p:ph type="body" idx="1"/>
-          </p:nvPr>
-        </p:nvSpPr>
-        <p:spPr>
-          <a:xfrm>
-            <a:off x="914400" y="3300413"/>
-            <a:ext cx="7315200" cy="2700300"/>
-          </a:xfrm>
-          <a:prstGeom prst="rect">
-            <a:avLst/>
-          </a:prstGeom>
-        </p:spPr>
-        <p:txBody>
-          <a:bodyPr spcFirstLastPara="1" wrap="square" lIns="91425" tIns="45700" rIns="91425" bIns="45700" anchor="t" anchorCtr="0">
-            <a:noAutofit/>
-          </a:bodyPr>
-          <a:lstStyle/>
-          <a:p>
-            <a:pPr marL="0" lvl="0" indent="0" algn="l" rtl="0">
-              <a:spcBef>
-                <a:spcPts val="0"/>
-              </a:spcBef>
-              <a:spcAft>
-                <a:spcPts val="0"/>
-              </a:spcAft>
-              <a:buNone/>
-            </a:pPr>
-            <a:endParaRPr/>
-          </a:p>
-        </p:txBody>
-      </p:sp>
-      <p:sp>
-        <p:nvSpPr>
-          <p:cNvPr id="118" name="Google Shape;118;g3fb8bfecde3_0_43:notes">
-            <a:extLst>
-              <a:ext uri="{FF2B5EF4-FFF2-40B4-BE49-F238E27FC236}">
-                <a16:creationId xmlns:a16="http://schemas.microsoft.com/office/drawing/2014/main" id="{D89B917E-A971-92E4-8CB7-AC36BF7058CD}"/>
-              </a:ext>
-            </a:extLst>
-          </p:cNvPr>
-          <p:cNvSpPr>
-            <a:spLocks noGrp="1" noRot="1" noChangeAspect="1"/>
-          </p:cNvSpPr>
-          <p:nvPr>
-            <p:ph type="sldImg" idx="2"/>
-          </p:nvPr>
-        </p:nvSpPr>
-        <p:spPr>
-          <a:xfrm>
-            <a:off x="2514600" y="857250"/>
-            <a:ext cx="4114800" cy="2314575"/>
-          </a:xfrm>
-          <a:custGeom>
-            <a:avLst/>
-            <a:gdLst/>
-            <a:ahLst/>
-            <a:cxnLst/>
-            <a:rect l="l" t="t" r="r" b="b"/>
-            <a:pathLst>
-              <a:path w="120000" h="120000" extrusionOk="0">
-                <a:moveTo>
-                  <a:pt x="0" y="0"/>
-                </a:moveTo>
-                <a:lnTo>
-                  <a:pt x="120000" y="0"/>
-                </a:lnTo>
-                <a:lnTo>
-                  <a:pt x="120000" y="120000"/>
-                </a:lnTo>
-                <a:lnTo>
-                  <a:pt x="0" y="120000"/>
-                </a:lnTo>
-                <a:close/>
-              </a:path>
-            </a:pathLst>
-          </a:custGeom>
-        </p:spPr>
-      </p:sp>
-    </p:spTree>
-    <p:extLst>
-      <p:ext uri="{BB962C8B-B14F-4D97-AF65-F5344CB8AC3E}">
-        <p14:creationId xmlns:p14="http://schemas.microsoft.com/office/powerpoint/2010/main" val="1838514293"/>
-      </p:ext>
-    </p:extLst>
-  </p:cSld>
-  <p:clrMapOvr>
-    <a:masterClrMapping/>
-  </p:clrMapOvr>
-</p:notes>
-</file>
-
 <file path=ppt/notesSlides/notesSlide2.xml><?xml version="1.0" encoding="utf-8"?>
 <p:notes xmlns:a="http://schemas.openxmlformats.org/drawingml/2006/main" xmlns:r="http://schemas.openxmlformats.org/officeDocument/2006/relationships" xmlns:p="http://schemas.openxmlformats.org/presentationml/2006/main" showMasterSp="0" showMasterPhAnim="0">
   <p:cSld>
@@ -1366,110 +1823,6 @@
   <p:cSld>
     <p:spTree>
       <p:nvGrpSpPr>
-        <p:cNvPr id="1" name="Shape 116"/>
-        <p:cNvGrpSpPr/>
-        <p:nvPr/>
-      </p:nvGrpSpPr>
-      <p:grpSpPr>
-        <a:xfrm>
-          <a:off x="0" y="0"/>
-          <a:ext cx="0" cy="0"/>
-          <a:chOff x="0" y="0"/>
-          <a:chExt cx="0" cy="0"/>
-        </a:xfrm>
-      </p:grpSpPr>
-      <p:sp>
-        <p:nvSpPr>
-          <p:cNvPr id="117" name="Google Shape;117;g3fb8bfecde3_0_43:notes"/>
-          <p:cNvSpPr txBox="1">
-            <a:spLocks noGrp="1"/>
-          </p:cNvSpPr>
-          <p:nvPr>
-            <p:ph type="body" idx="1"/>
-          </p:nvPr>
-        </p:nvSpPr>
-        <p:spPr>
-          <a:xfrm>
-            <a:off x="914400" y="3300413"/>
-            <a:ext cx="7315200" cy="2700300"/>
-          </a:xfrm>
-          <a:prstGeom prst="rect">
-            <a:avLst/>
-          </a:prstGeom>
-        </p:spPr>
-        <p:txBody>
-          <a:bodyPr spcFirstLastPara="1" wrap="square" lIns="91425" tIns="45700" rIns="91425" bIns="45700" anchor="t" anchorCtr="0">
-            <a:noAutofit/>
-          </a:bodyPr>
-          <a:lstStyle/>
-          <a:p>
-            <a:pPr marL="0" lvl="0" indent="0" algn="l" rtl="0">
-              <a:spcBef>
-                <a:spcPts val="0"/>
-              </a:spcBef>
-              <a:spcAft>
-                <a:spcPts val="0"/>
-              </a:spcAft>
-              <a:buNone/>
-            </a:pPr>
-            <a:endParaRPr/>
-          </a:p>
-        </p:txBody>
-      </p:sp>
-      <p:sp>
-        <p:nvSpPr>
-          <p:cNvPr id="118" name="Google Shape;118;g3fb8bfecde3_0_43:notes"/>
-          <p:cNvSpPr>
-            <a:spLocks noGrp="1" noRot="1" noChangeAspect="1"/>
-          </p:cNvSpPr>
-          <p:nvPr>
-            <p:ph type="sldImg" idx="2"/>
-          </p:nvPr>
-        </p:nvSpPr>
-        <p:spPr>
-          <a:xfrm>
-            <a:off x="2514600" y="857250"/>
-            <a:ext cx="4114800" cy="2314575"/>
-          </a:xfrm>
-          <a:custGeom>
-            <a:avLst/>
-            <a:gdLst/>
-            <a:ahLst/>
-            <a:cxnLst/>
-            <a:rect l="l" t="t" r="r" b="b"/>
-            <a:pathLst>
-              <a:path w="120000" h="120000" extrusionOk="0">
-                <a:moveTo>
-                  <a:pt x="0" y="0"/>
-                </a:moveTo>
-                <a:lnTo>
-                  <a:pt x="120000" y="0"/>
-                </a:lnTo>
-                <a:lnTo>
-                  <a:pt x="120000" y="120000"/>
-                </a:lnTo>
-                <a:lnTo>
-                  <a:pt x="0" y="120000"/>
-                </a:lnTo>
-                <a:close/>
-              </a:path>
-            </a:pathLst>
-          </a:custGeom>
-        </p:spPr>
-      </p:sp>
-    </p:spTree>
-  </p:cSld>
-  <p:clrMapOvr>
-    <a:masterClrMapping/>
-  </p:clrMapOvr>
-</p:notes>
-</file>
-
-<file path=ppt/notesSlides/notesSlide7.xml><?xml version="1.0" encoding="utf-8"?>
-<p:notes xmlns:a="http://schemas.openxmlformats.org/drawingml/2006/main" xmlns:r="http://schemas.openxmlformats.org/officeDocument/2006/relationships" xmlns:p="http://schemas.openxmlformats.org/presentationml/2006/main" showMasterSp="0" showMasterPhAnim="0">
-  <p:cSld>
-    <p:spTree>
-      <p:nvGrpSpPr>
         <p:cNvPr id="1" name="Shape 116">
           <a:extLst>
             <a:ext uri="{FF2B5EF4-FFF2-40B4-BE49-F238E27FC236}">
@@ -1592,7 +1945,7 @@
 </p:notes>
 </file>
 
-<file path=ppt/notesSlides/notesSlide8.xml><?xml version="1.0" encoding="utf-8"?>
+<file path=ppt/notesSlides/notesSlide7.xml><?xml version="1.0" encoding="utf-8"?>
 <p:notes xmlns:a="http://schemas.openxmlformats.org/drawingml/2006/main" xmlns:r="http://schemas.openxmlformats.org/officeDocument/2006/relationships" xmlns:p="http://schemas.openxmlformats.org/presentationml/2006/main" showMasterSp="0" showMasterPhAnim="0">
   <p:cSld>
     <p:spTree>
@@ -1719,7 +2072,7 @@
 </p:notes>
 </file>
 
-<file path=ppt/notesSlides/notesSlide9.xml><?xml version="1.0" encoding="utf-8"?>
+<file path=ppt/notesSlides/notesSlide8.xml><?xml version="1.0" encoding="utf-8"?>
 <p:notes xmlns:a="http://schemas.openxmlformats.org/drawingml/2006/main" xmlns:r="http://schemas.openxmlformats.org/officeDocument/2006/relationships" xmlns:p="http://schemas.openxmlformats.org/presentationml/2006/main" showMasterSp="0" showMasterPhAnim="0">
   <p:cSld>
     <p:spTree>
@@ -1816,6 +2169,133 @@
         </p:spPr>
       </p:sp>
     </p:spTree>
+  </p:cSld>
+  <p:clrMapOvr>
+    <a:masterClrMapping/>
+  </p:clrMapOvr>
+</p:notes>
+</file>
+
+<file path=ppt/notesSlides/notesSlide9.xml><?xml version="1.0" encoding="utf-8"?>
+<p:notes xmlns:a="http://schemas.openxmlformats.org/drawingml/2006/main" xmlns:r="http://schemas.openxmlformats.org/officeDocument/2006/relationships" xmlns:p="http://schemas.openxmlformats.org/presentationml/2006/main" showMasterSp="0" showMasterPhAnim="0">
+  <p:cSld>
+    <p:spTree>
+      <p:nvGrpSpPr>
+        <p:cNvPr id="1" name="Shape 116">
+          <a:extLst>
+            <a:ext uri="{FF2B5EF4-FFF2-40B4-BE49-F238E27FC236}">
+              <a16:creationId xmlns:a16="http://schemas.microsoft.com/office/drawing/2014/main" id="{5FE03017-32CC-C0E4-7164-66A3C085C82F}"/>
+            </a:ext>
+          </a:extLst>
+        </p:cNvPr>
+        <p:cNvGrpSpPr/>
+        <p:nvPr/>
+      </p:nvGrpSpPr>
+      <p:grpSpPr>
+        <a:xfrm>
+          <a:off x="0" y="0"/>
+          <a:ext cx="0" cy="0"/>
+          <a:chOff x="0" y="0"/>
+          <a:chExt cx="0" cy="0"/>
+        </a:xfrm>
+      </p:grpSpPr>
+      <p:sp>
+        <p:nvSpPr>
+          <p:cNvPr id="117" name="Google Shape;117;g3fb8bfecde3_0_43:notes">
+            <a:extLst>
+              <a:ext uri="{FF2B5EF4-FFF2-40B4-BE49-F238E27FC236}">
+                <a16:creationId xmlns:a16="http://schemas.microsoft.com/office/drawing/2014/main" id="{DCF336BD-AE1D-D93C-B4F5-39396658D972}"/>
+              </a:ext>
+            </a:extLst>
+          </p:cNvPr>
+          <p:cNvSpPr txBox="1">
+            <a:spLocks noGrp="1"/>
+          </p:cNvSpPr>
+          <p:nvPr>
+            <p:ph type="body" idx="1"/>
+          </p:nvPr>
+        </p:nvSpPr>
+        <p:spPr>
+          <a:xfrm>
+            <a:off x="914400" y="3300413"/>
+            <a:ext cx="7315200" cy="2700300"/>
+          </a:xfrm>
+          <a:prstGeom prst="rect">
+            <a:avLst/>
+          </a:prstGeom>
+        </p:spPr>
+        <p:txBody>
+          <a:bodyPr spcFirstLastPara="1" wrap="square" lIns="91425" tIns="45700" rIns="91425" bIns="45700" anchor="t" anchorCtr="0">
+            <a:noAutofit/>
+          </a:bodyPr>
+          <a:lstStyle/>
+          <a:p>
+            <a:pPr marL="0" lvl="0" indent="0" algn="l" rtl="0">
+              <a:spcBef>
+                <a:spcPts val="0"/>
+              </a:spcBef>
+              <a:spcAft>
+                <a:spcPts val="0"/>
+              </a:spcAft>
+              <a:buNone/>
+            </a:pPr>
+            <a:endParaRPr/>
+          </a:p>
+        </p:txBody>
+      </p:sp>
+      <p:sp>
+        <p:nvSpPr>
+          <p:cNvPr id="118" name="Google Shape;118;g3fb8bfecde3_0_43:notes">
+            <a:extLst>
+              <a:ext uri="{FF2B5EF4-FFF2-40B4-BE49-F238E27FC236}">
+                <a16:creationId xmlns:a16="http://schemas.microsoft.com/office/drawing/2014/main" id="{D89B917E-A971-92E4-8CB7-AC36BF7058CD}"/>
+              </a:ext>
+            </a:extLst>
+          </p:cNvPr>
+          <p:cNvSpPr>
+            <a:spLocks noGrp="1" noRot="1" noChangeAspect="1"/>
+          </p:cNvSpPr>
+          <p:nvPr>
+            <p:ph type="sldImg" idx="2"/>
+          </p:nvPr>
+        </p:nvSpPr>
+        <p:spPr>
+          <a:xfrm>
+            <a:off x="2514600" y="857250"/>
+            <a:ext cx="4114800" cy="2314575"/>
+          </a:xfrm>
+          <a:custGeom>
+            <a:avLst/>
+            <a:gdLst/>
+            <a:ahLst/>
+            <a:cxnLst/>
+            <a:rect l="l" t="t" r="r" b="b"/>
+            <a:pathLst>
+              <a:path w="120000" h="120000" extrusionOk="0">
+                <a:moveTo>
+                  <a:pt x="0" y="0"/>
+                </a:moveTo>
+                <a:lnTo>
+                  <a:pt x="120000" y="0"/>
+                </a:lnTo>
+                <a:lnTo>
+                  <a:pt x="120000" y="120000"/>
+                </a:lnTo>
+                <a:lnTo>
+                  <a:pt x="0" y="120000"/>
+                </a:lnTo>
+                <a:close/>
+              </a:path>
+            </a:pathLst>
+          </a:custGeom>
+        </p:spPr>
+      </p:sp>
+    </p:spTree>
+    <p:extLst>
+      <p:ext uri="{BB962C8B-B14F-4D97-AF65-F5344CB8AC3E}">
+        <p14:creationId xmlns:p14="http://schemas.microsoft.com/office/powerpoint/2010/main" val="1838514293"/>
+      </p:ext>
+    </p:extLst>
   </p:cSld>
   <p:clrMapOvr>
     <a:masterClrMapping/>
@@ -2447,6 +2927,13 @@
             <a:noFill/>
           </a:ln>
         </p:spPr>
+        <p:txBody>
+          <a:bodyPr/>
+          <a:lstStyle/>
+          <a:p>
+            <a:endParaRPr lang="es-MX"/>
+          </a:p>
+        </p:txBody>
       </p:sp>
       <p:sp>
         <p:nvSpPr>
@@ -5900,562 +6387,6 @@
   <p:cSld>
     <p:spTree>
       <p:nvGrpSpPr>
-        <p:cNvPr id="1" name="">
-          <a:extLst>
-            <a:ext uri="{FF2B5EF4-FFF2-40B4-BE49-F238E27FC236}">
-              <a16:creationId xmlns:a16="http://schemas.microsoft.com/office/drawing/2014/main" id="{E12D506B-01F4-2F26-EC3E-60C4CE7DBE36}"/>
-            </a:ext>
-          </a:extLst>
-        </p:cNvPr>
-        <p:cNvGrpSpPr/>
-        <p:nvPr/>
-      </p:nvGrpSpPr>
-      <p:grpSpPr>
-        <a:xfrm>
-          <a:off x="0" y="0"/>
-          <a:ext cx="0" cy="0"/>
-          <a:chOff x="0" y="0"/>
-          <a:chExt cx="0" cy="0"/>
-        </a:xfrm>
-      </p:grpSpPr>
-      <p:sp>
-        <p:nvSpPr>
-          <p:cNvPr id="3" name="Marcador de contenido 2">
-            <a:extLst>
-              <a:ext uri="{FF2B5EF4-FFF2-40B4-BE49-F238E27FC236}">
-                <a16:creationId xmlns:a16="http://schemas.microsoft.com/office/drawing/2014/main" id="{588CB29A-C4FE-7078-1DC2-D2E27CB5BECC}"/>
-              </a:ext>
-            </a:extLst>
-          </p:cNvPr>
-          <p:cNvSpPr>
-            <a:spLocks noGrp="1"/>
-          </p:cNvSpPr>
-          <p:nvPr>
-            <p:ph sz="quarter" idx="15"/>
-          </p:nvPr>
-        </p:nvSpPr>
-        <p:spPr>
-          <a:xfrm>
-            <a:off x="560238" y="1123721"/>
-            <a:ext cx="8208913" cy="3384375"/>
-          </a:xfrm>
-        </p:spPr>
-        <p:txBody>
-          <a:bodyPr>
-            <a:normAutofit fontScale="85000" lnSpcReduction="20000"/>
-          </a:bodyPr>
-          <a:lstStyle/>
-          <a:p>
-            <a:pPr marL="342900" indent="-342900" algn="just">
-              <a:lnSpc>
-                <a:spcPct val="200000"/>
-              </a:lnSpc>
-              <a:buFont typeface="Arial" panose="020B0604020202020204" pitchFamily="34" charset="0"/>
-              <a:buChar char="•"/>
-            </a:pPr>
-            <a:r>
-              <a:rPr lang="es-MX" sz="1600" noProof="0" dirty="0">
-                <a:solidFill>
-                  <a:schemeClr val="tx1"/>
-                </a:solidFill>
-              </a:rPr>
-              <a:t>OE-01: Identificar los ataques de inyección de </a:t>
-            </a:r>
-            <a:r>
-              <a:rPr lang="es-MX" sz="1600" i="1" noProof="0" dirty="0" err="1">
-                <a:solidFill>
-                  <a:schemeClr val="tx1"/>
-                </a:solidFill>
-              </a:rPr>
-              <a:t>prompt</a:t>
-            </a:r>
-            <a:r>
-              <a:rPr lang="es-MX" sz="1600" noProof="0" dirty="0">
-                <a:solidFill>
-                  <a:schemeClr val="tx1"/>
-                </a:solidFill>
-              </a:rPr>
-              <a:t> que pueden ser mitigados desde el lado de la aplicación.</a:t>
-            </a:r>
-          </a:p>
-          <a:p>
-            <a:pPr algn="just">
-              <a:lnSpc>
-                <a:spcPct val="200000"/>
-              </a:lnSpc>
-            </a:pPr>
-            <a:endParaRPr lang="es-MX" sz="1600" noProof="0" dirty="0">
-              <a:solidFill>
-                <a:schemeClr val="tx1"/>
-              </a:solidFill>
-            </a:endParaRPr>
-          </a:p>
-          <a:p>
-            <a:pPr marL="342900" indent="-342900" algn="just">
-              <a:lnSpc>
-                <a:spcPct val="200000"/>
-              </a:lnSpc>
-              <a:buFont typeface="Arial" panose="020B0604020202020204" pitchFamily="34" charset="0"/>
-              <a:buChar char="•"/>
-            </a:pPr>
-            <a:r>
-              <a:rPr lang="es-MX" sz="1600" noProof="0" dirty="0">
-                <a:solidFill>
-                  <a:schemeClr val="tx1"/>
-                </a:solidFill>
-              </a:rPr>
-              <a:t>OE-02: Analizar las medidas de seguridad a nivel de aplicación propuestas en la literatura reciente para mitigar los ataques de inyección de </a:t>
-            </a:r>
-            <a:r>
-              <a:rPr lang="es-MX" sz="1600" i="1" noProof="0" dirty="0" err="1">
-                <a:solidFill>
-                  <a:schemeClr val="tx1"/>
-                </a:solidFill>
-              </a:rPr>
-              <a:t>prompt</a:t>
-            </a:r>
-            <a:r>
-              <a:rPr lang="es-MX" sz="1600" noProof="0" dirty="0">
-                <a:solidFill>
-                  <a:schemeClr val="tx1"/>
-                </a:solidFill>
-              </a:rPr>
-              <a:t> en sistemas basados en LLM.</a:t>
-            </a:r>
-          </a:p>
-          <a:p>
-            <a:pPr algn="just">
-              <a:lnSpc>
-                <a:spcPct val="200000"/>
-              </a:lnSpc>
-            </a:pPr>
-            <a:endParaRPr lang="es-MX" sz="1600" noProof="0" dirty="0">
-              <a:solidFill>
-                <a:schemeClr val="tx1"/>
-              </a:solidFill>
-            </a:endParaRPr>
-          </a:p>
-          <a:p>
-            <a:pPr marL="342900" indent="-342900" algn="just">
-              <a:lnSpc>
-                <a:spcPct val="200000"/>
-              </a:lnSpc>
-              <a:buFont typeface="Arial" panose="020B0604020202020204" pitchFamily="34" charset="0"/>
-              <a:buChar char="•"/>
-            </a:pPr>
-            <a:r>
-              <a:rPr lang="es-MX" sz="1600" noProof="0" dirty="0">
-                <a:solidFill>
-                  <a:schemeClr val="tx1"/>
-                </a:solidFill>
-              </a:rPr>
-              <a:t>OE-03: Clasificar las medidas de seguridad identificadas de acuerdo con el punto de intervención dentro del sistema.</a:t>
-            </a:r>
-          </a:p>
-        </p:txBody>
-      </p:sp>
-      <p:sp>
-        <p:nvSpPr>
-          <p:cNvPr id="4" name="Marcador de texto 3">
-            <a:extLst>
-              <a:ext uri="{FF2B5EF4-FFF2-40B4-BE49-F238E27FC236}">
-                <a16:creationId xmlns:a16="http://schemas.microsoft.com/office/drawing/2014/main" id="{5E16FE36-B834-A692-EE0B-B6D28EC6B825}"/>
-              </a:ext>
-            </a:extLst>
-          </p:cNvPr>
-          <p:cNvSpPr>
-            <a:spLocks noGrp="1"/>
-          </p:cNvSpPr>
-          <p:nvPr>
-            <p:ph type="body" sz="quarter" idx="16"/>
-          </p:nvPr>
-        </p:nvSpPr>
-        <p:spPr>
-          <a:xfrm>
-            <a:off x="574593" y="580087"/>
-            <a:ext cx="7994811" cy="407488"/>
-          </a:xfrm>
-        </p:spPr>
-        <p:txBody>
-          <a:bodyPr/>
-          <a:lstStyle/>
-          <a:p>
-            <a:r>
-              <a:rPr lang="es-MX" b="1" dirty="0"/>
-              <a:t>Objetivos (2/3) - </a:t>
-            </a:r>
-            <a:r>
-              <a:rPr lang="es-MX" b="1" noProof="0" dirty="0"/>
-              <a:t>Objetivos específicos</a:t>
-            </a:r>
-          </a:p>
-        </p:txBody>
-      </p:sp>
-      <p:sp>
-        <p:nvSpPr>
-          <p:cNvPr id="7" name="Google Shape;106;p14">
-            <a:extLst>
-              <a:ext uri="{FF2B5EF4-FFF2-40B4-BE49-F238E27FC236}">
-                <a16:creationId xmlns:a16="http://schemas.microsoft.com/office/drawing/2014/main" id="{0CF51A61-BD70-06C9-75A3-CB358F9D1EE2}"/>
-              </a:ext>
-            </a:extLst>
-          </p:cNvPr>
-          <p:cNvSpPr txBox="1">
-            <a:spLocks/>
-          </p:cNvSpPr>
-          <p:nvPr/>
-        </p:nvSpPr>
-        <p:spPr>
-          <a:xfrm>
-            <a:off x="179512" y="4876006"/>
-            <a:ext cx="7200800" cy="144016"/>
-          </a:xfrm>
-          <a:prstGeom prst="rect">
-            <a:avLst/>
-          </a:prstGeom>
-          <a:noFill/>
-          <a:ln>
-            <a:noFill/>
-          </a:ln>
-        </p:spPr>
-        <p:txBody>
-          <a:bodyPr spcFirstLastPara="1" vert="horz" wrap="square" lIns="36000" tIns="0" rIns="91425" bIns="45700" rtlCol="0" anchor="t" anchorCtr="0">
-            <a:noAutofit/>
-          </a:bodyPr>
-          <a:lstStyle>
-            <a:lvl1pPr algn="l" defTabSz="298227" rtl="0" eaLnBrk="1" latinLnBrk="0" hangingPunct="1">
-              <a:lnSpc>
-                <a:spcPts val="2600"/>
-              </a:lnSpc>
-              <a:spcBef>
-                <a:spcPct val="0"/>
-              </a:spcBef>
-              <a:buNone/>
-              <a:defRPr sz="2200" kern="1200">
-                <a:solidFill>
-                  <a:schemeClr val="tx1"/>
-                </a:solidFill>
-                <a:latin typeface="Gill Sans MT" panose="020B0502020104020203" pitchFamily="34" charset="0"/>
-                <a:ea typeface="+mj-ea"/>
-                <a:cs typeface="+mj-cs"/>
-              </a:defRPr>
-            </a:lvl1pPr>
-          </a:lstStyle>
-          <a:p>
-            <a:pPr>
-              <a:lnSpc>
-                <a:spcPct val="116666"/>
-              </a:lnSpc>
-              <a:spcBef>
-                <a:spcPts val="0"/>
-              </a:spcBef>
-              <a:buClr>
-                <a:schemeClr val="dk1"/>
-              </a:buClr>
-            </a:pPr>
-            <a:r>
-              <a:rPr lang="es-MX" sz="800" dirty="0"/>
-              <a:t>​​Monografía: Estado del arte de las medidas de seguridad a nivel de aplicación en el contexto de ataques de inyección de </a:t>
-            </a:r>
-            <a:r>
-              <a:rPr lang="es-MX" sz="800" i="1" dirty="0" err="1"/>
-              <a:t>prompt</a:t>
-            </a:r>
-            <a:r>
-              <a:rPr lang="es-MX" sz="800" dirty="0"/>
-              <a:t> dirigidos a sistemas basados en LLM​</a:t>
-            </a:r>
-          </a:p>
-        </p:txBody>
-      </p:sp>
-    </p:spTree>
-    <p:extLst>
-      <p:ext uri="{BB962C8B-B14F-4D97-AF65-F5344CB8AC3E}">
-        <p14:creationId xmlns:p14="http://schemas.microsoft.com/office/powerpoint/2010/main" val="610408008"/>
-      </p:ext>
-    </p:extLst>
-  </p:cSld>
-  <p:clrMapOvr>
-    <a:masterClrMapping/>
-  </p:clrMapOvr>
-</p:sld>
-</file>
-
-<file path=ppt/slides/slide11.xml><?xml version="1.0" encoding="utf-8"?>
-<p:sld xmlns:a="http://schemas.openxmlformats.org/drawingml/2006/main" xmlns:r="http://schemas.openxmlformats.org/officeDocument/2006/relationships" xmlns:p="http://schemas.openxmlformats.org/presentationml/2006/main">
-  <p:cSld>
-    <p:spTree>
-      <p:nvGrpSpPr>
-        <p:cNvPr id="1" name="">
-          <a:extLst>
-            <a:ext uri="{FF2B5EF4-FFF2-40B4-BE49-F238E27FC236}">
-              <a16:creationId xmlns:a16="http://schemas.microsoft.com/office/drawing/2014/main" id="{97DF5CC7-80ED-60E7-851A-E9BEE8455397}"/>
-            </a:ext>
-          </a:extLst>
-        </p:cNvPr>
-        <p:cNvGrpSpPr/>
-        <p:nvPr/>
-      </p:nvGrpSpPr>
-      <p:grpSpPr>
-        <a:xfrm>
-          <a:off x="0" y="0"/>
-          <a:ext cx="0" cy="0"/>
-          <a:chOff x="0" y="0"/>
-          <a:chExt cx="0" cy="0"/>
-        </a:xfrm>
-      </p:grpSpPr>
-      <p:sp>
-        <p:nvSpPr>
-          <p:cNvPr id="3" name="Marcador de contenido 2">
-            <a:extLst>
-              <a:ext uri="{FF2B5EF4-FFF2-40B4-BE49-F238E27FC236}">
-                <a16:creationId xmlns:a16="http://schemas.microsoft.com/office/drawing/2014/main" id="{770AA596-17F4-9492-0DFC-1EF3E1B4FE34}"/>
-              </a:ext>
-            </a:extLst>
-          </p:cNvPr>
-          <p:cNvSpPr>
-            <a:spLocks noGrp="1"/>
-          </p:cNvSpPr>
-          <p:nvPr>
-            <p:ph sz="quarter" idx="15"/>
-          </p:nvPr>
-        </p:nvSpPr>
-        <p:spPr>
-          <a:xfrm>
-            <a:off x="574593" y="1171912"/>
-            <a:ext cx="8101860" cy="3248701"/>
-          </a:xfrm>
-        </p:spPr>
-        <p:txBody>
-          <a:bodyPr>
-            <a:normAutofit/>
-          </a:bodyPr>
-          <a:lstStyle/>
-          <a:p>
-            <a:pPr marL="342900" indent="-342900" algn="just">
-              <a:lnSpc>
-                <a:spcPct val="170000"/>
-              </a:lnSpc>
-              <a:buFont typeface="Arial" panose="020B0604020202020204" pitchFamily="34" charset="0"/>
-              <a:buChar char="•"/>
-            </a:pPr>
-            <a:r>
-              <a:rPr lang="es-MX" sz="1400" dirty="0">
-                <a:solidFill>
-                  <a:schemeClr val="tx1"/>
-                </a:solidFill>
-              </a:rPr>
-              <a:t>OE-04: Identificar las taxonomías existentes para clasificar las mitigaciones de ataques de inyección de </a:t>
-            </a:r>
-            <a:r>
-              <a:rPr lang="es-MX" sz="1400" i="1" dirty="0" err="1">
-                <a:solidFill>
-                  <a:schemeClr val="tx1"/>
-                </a:solidFill>
-              </a:rPr>
-              <a:t>prompt</a:t>
-            </a:r>
-            <a:r>
-              <a:rPr lang="es-MX" sz="1400" dirty="0">
-                <a:solidFill>
-                  <a:schemeClr val="tx1"/>
-                </a:solidFill>
-              </a:rPr>
-              <a:t> a nivel de aplicación.</a:t>
-            </a:r>
-          </a:p>
-          <a:p>
-            <a:pPr algn="just">
-              <a:lnSpc>
-                <a:spcPct val="170000"/>
-              </a:lnSpc>
-            </a:pPr>
-            <a:endParaRPr lang="es-MX" sz="1400" dirty="0">
-              <a:solidFill>
-                <a:schemeClr val="tx1"/>
-              </a:solidFill>
-            </a:endParaRPr>
-          </a:p>
-          <a:p>
-            <a:pPr marL="342900" indent="-342900" algn="just">
-              <a:lnSpc>
-                <a:spcPct val="170000"/>
-              </a:lnSpc>
-              <a:buFont typeface="Arial" panose="020B0604020202020204" pitchFamily="34" charset="0"/>
-              <a:buChar char="•"/>
-            </a:pPr>
-            <a:r>
-              <a:rPr lang="es-MX" sz="1400" dirty="0">
-                <a:solidFill>
-                  <a:schemeClr val="tx1"/>
-                </a:solidFill>
-              </a:rPr>
-              <a:t>OE-05: Analizar las formas en las que se evalúan las medidas de seguridad reportadas en la literatura considerando los tipos de ataques abordados, contextos de aplicación, criterios de evaluación, efectividad, impacto sobre la utilidad y limitaciones.</a:t>
-            </a:r>
-          </a:p>
-          <a:p>
-            <a:pPr algn="just">
-              <a:lnSpc>
-                <a:spcPct val="170000"/>
-              </a:lnSpc>
-            </a:pPr>
-            <a:endParaRPr lang="es-MX" sz="1400" dirty="0">
-              <a:solidFill>
-                <a:schemeClr val="tx1"/>
-              </a:solidFill>
-            </a:endParaRPr>
-          </a:p>
-          <a:p>
-            <a:pPr marL="342900" indent="-342900" algn="just">
-              <a:lnSpc>
-                <a:spcPct val="170000"/>
-              </a:lnSpc>
-              <a:buFont typeface="Arial" panose="020B0604020202020204" pitchFamily="34" charset="0"/>
-              <a:buChar char="•"/>
-            </a:pPr>
-            <a:r>
-              <a:rPr lang="es-MX" sz="1400" dirty="0">
-                <a:solidFill>
-                  <a:schemeClr val="tx1"/>
-                </a:solidFill>
-              </a:rPr>
-              <a:t>OE-06: Discutir los alcances y limitaciones que permanezcan abiertos para futuras investigaciones.</a:t>
-            </a:r>
-          </a:p>
-        </p:txBody>
-      </p:sp>
-      <p:sp>
-        <p:nvSpPr>
-          <p:cNvPr id="4" name="Marcador de texto 3">
-            <a:extLst>
-              <a:ext uri="{FF2B5EF4-FFF2-40B4-BE49-F238E27FC236}">
-                <a16:creationId xmlns:a16="http://schemas.microsoft.com/office/drawing/2014/main" id="{B9D1D9AD-1178-DBA4-1676-FFA4DDFCFF07}"/>
-              </a:ext>
-            </a:extLst>
-          </p:cNvPr>
-          <p:cNvSpPr>
-            <a:spLocks noGrp="1"/>
-          </p:cNvSpPr>
-          <p:nvPr>
-            <p:ph type="body" sz="quarter" idx="16"/>
-          </p:nvPr>
-        </p:nvSpPr>
-        <p:spPr>
-          <a:xfrm>
-            <a:off x="574593" y="580087"/>
-            <a:ext cx="7994811" cy="407488"/>
-          </a:xfrm>
-        </p:spPr>
-        <p:txBody>
-          <a:bodyPr/>
-          <a:lstStyle/>
-          <a:p>
-            <a:r>
-              <a:rPr lang="es-MX" b="1" dirty="0"/>
-              <a:t>Objetivos (3/3) - </a:t>
-            </a:r>
-            <a:r>
-              <a:rPr lang="es-MX" b="1" noProof="0" dirty="0"/>
-              <a:t>Objetivos específicos</a:t>
-            </a:r>
-          </a:p>
-        </p:txBody>
-      </p:sp>
-      <p:sp>
-        <p:nvSpPr>
-          <p:cNvPr id="7" name="Google Shape;106;p14">
-            <a:extLst>
-              <a:ext uri="{FF2B5EF4-FFF2-40B4-BE49-F238E27FC236}">
-                <a16:creationId xmlns:a16="http://schemas.microsoft.com/office/drawing/2014/main" id="{CDD2F7DF-BA3D-7763-C40B-39DB4E7A932B}"/>
-              </a:ext>
-            </a:extLst>
-          </p:cNvPr>
-          <p:cNvSpPr txBox="1">
-            <a:spLocks/>
-          </p:cNvSpPr>
-          <p:nvPr/>
-        </p:nvSpPr>
-        <p:spPr>
-          <a:xfrm>
-            <a:off x="179512" y="4876006"/>
-            <a:ext cx="7200800" cy="144016"/>
-          </a:xfrm>
-          <a:prstGeom prst="rect">
-            <a:avLst/>
-          </a:prstGeom>
-          <a:noFill/>
-          <a:ln>
-            <a:noFill/>
-          </a:ln>
-        </p:spPr>
-        <p:txBody>
-          <a:bodyPr spcFirstLastPara="1" vert="horz" wrap="square" lIns="36000" tIns="0" rIns="91425" bIns="45700" rtlCol="0" anchor="t" anchorCtr="0">
-            <a:noAutofit/>
-          </a:bodyPr>
-          <a:lstStyle>
-            <a:lvl1pPr algn="l" defTabSz="298227" rtl="0" eaLnBrk="1" latinLnBrk="0" hangingPunct="1">
-              <a:lnSpc>
-                <a:spcPts val="2600"/>
-              </a:lnSpc>
-              <a:spcBef>
-                <a:spcPct val="0"/>
-              </a:spcBef>
-              <a:buNone/>
-              <a:defRPr sz="2200" kern="1200">
-                <a:solidFill>
-                  <a:schemeClr val="tx1"/>
-                </a:solidFill>
-                <a:latin typeface="Gill Sans MT" panose="020B0502020104020203" pitchFamily="34" charset="0"/>
-                <a:ea typeface="+mj-ea"/>
-                <a:cs typeface="+mj-cs"/>
-              </a:defRPr>
-            </a:lvl1pPr>
-          </a:lstStyle>
-          <a:p>
-            <a:pPr>
-              <a:lnSpc>
-                <a:spcPct val="116666"/>
-              </a:lnSpc>
-              <a:spcBef>
-                <a:spcPts val="0"/>
-              </a:spcBef>
-              <a:buClr>
-                <a:schemeClr val="dk1"/>
-              </a:buClr>
-            </a:pPr>
-            <a:r>
-              <a:rPr lang="es-MX" sz="800" dirty="0"/>
-              <a:t>​​Monografía: Estado del arte de las medidas de seguridad a nivel de aplicación en el contexto de ataques de inyección de </a:t>
-            </a:r>
-            <a:r>
-              <a:rPr lang="es-MX" sz="800" i="1" dirty="0" err="1"/>
-              <a:t>prompt</a:t>
-            </a:r>
-            <a:r>
-              <a:rPr lang="es-MX" sz="800" dirty="0"/>
-              <a:t> dirigidos a sistemas basados en LLM​</a:t>
-            </a:r>
-          </a:p>
-        </p:txBody>
-      </p:sp>
-    </p:spTree>
-    <p:extLst>
-      <p:ext uri="{BB962C8B-B14F-4D97-AF65-F5344CB8AC3E}">
-        <p14:creationId xmlns:p14="http://schemas.microsoft.com/office/powerpoint/2010/main" val="980608183"/>
-      </p:ext>
-    </p:extLst>
-  </p:cSld>
-  <p:clrMapOvr>
-    <a:masterClrMapping/>
-  </p:clrMapOvr>
-</p:sld>
-</file>
-
-<file path=ppt/slides/slide12.xml><?xml version="1.0" encoding="utf-8"?>
-<p:sld xmlns:a="http://schemas.openxmlformats.org/drawingml/2006/main" xmlns:r="http://schemas.openxmlformats.org/officeDocument/2006/relationships" xmlns:p="http://schemas.openxmlformats.org/presentationml/2006/main">
-  <p:cSld>
-    <p:spTree>
-      <p:nvGrpSpPr>
         <p:cNvPr id="1" name="Shape 96"/>
         <p:cNvGrpSpPr/>
         <p:nvPr/>
@@ -6480,8 +6411,8 @@
         </p:nvSpPr>
         <p:spPr>
           <a:xfrm>
-            <a:off x="515250" y="1203598"/>
-            <a:ext cx="8113500" cy="3528392"/>
+            <a:off x="515250" y="710803"/>
+            <a:ext cx="8113500" cy="1180101"/>
           </a:xfrm>
           <a:prstGeom prst="rect">
             <a:avLst/>
@@ -6493,30 +6424,28 @@
         </p:spPr>
         <p:txBody>
           <a:bodyPr spcFirstLastPara="1" wrap="square" lIns="91425" tIns="45700" rIns="91425" bIns="45700" anchor="t" anchorCtr="0">
-            <a:normAutofit fontScale="85000" lnSpcReduction="10000"/>
+            <a:noAutofit/>
           </a:bodyPr>
           <a:lstStyle/>
           <a:p>
-            <a:pPr marL="342900" lvl="0" indent="-342900" algn="just">
+            <a:pPr marL="0" lvl="0" indent="0" algn="just">
               <a:lnSpc>
                 <a:spcPct val="150000"/>
               </a:lnSpc>
               <a:spcBef>
                 <a:spcPts val="0"/>
               </a:spcBef>
-              <a:buFont typeface="Arial" panose="020B0604020202020204" pitchFamily="34" charset="0"/>
-              <a:buChar char="•"/>
             </a:pPr>
             <a:r>
-              <a:rPr lang="es-MX" sz="1600" dirty="0">
-                <a:solidFill>
-                  <a:schemeClr val="tx1"/>
-                </a:solidFill>
-              </a:rPr>
-              <a:t>Autores como Kumar et al. (2024) que presentan un marco que clasifica diversos ataques de inyección de </a:t>
-            </a:r>
-            <a:r>
-              <a:rPr lang="es-MX" sz="1600" i="1" dirty="0" err="1">
+              <a:rPr lang="es-MX" sz="1400" dirty="0">
+                <a:solidFill>
+                  <a:schemeClr val="tx1"/>
+                </a:solidFill>
+              </a:rPr>
+              <a:t>Kumar et al. (2024) presentan un marco que clasifica diversos ataques de inyección de </a:t>
+            </a:r>
+            <a:r>
+              <a:rPr lang="es-MX" sz="1400" i="1" dirty="0" err="1">
                 <a:solidFill>
                   <a:schemeClr val="tx1"/>
                 </a:solidFill>
@@ -6524,130 +6453,12 @@
               <a:t>prompt</a:t>
             </a:r>
             <a:r>
-              <a:rPr lang="es-MX" sz="1600" dirty="0">
-                <a:solidFill>
-                  <a:schemeClr val="tx1"/>
-                </a:solidFill>
-              </a:rPr>
-              <a:t> en base a diversas características como el </a:t>
-            </a:r>
-            <a:r>
-              <a:rPr lang="es-MX" sz="1600" i="1" dirty="0" err="1">
-                <a:solidFill>
-                  <a:schemeClr val="tx1"/>
-                </a:solidFill>
-              </a:rPr>
-              <a:t>prompt</a:t>
-            </a:r>
-            <a:r>
-              <a:rPr lang="es-MX" sz="1600" dirty="0">
-                <a:solidFill>
-                  <a:schemeClr val="tx1"/>
-                </a:solidFill>
-              </a:rPr>
-              <a:t> utilizado, el tipo de confianza que violaron y el nivel de experiencia requerido reafirma que estos ataques pueden presentarse en diferentes escenarios. </a:t>
-            </a:r>
-          </a:p>
-          <a:p>
-            <a:pPr marL="342900" lvl="0" indent="-342900" algn="just" rtl="0">
-              <a:lnSpc>
-                <a:spcPct val="150000"/>
-              </a:lnSpc>
-              <a:spcBef>
-                <a:spcPts val="0"/>
-              </a:spcBef>
-              <a:spcAft>
-                <a:spcPts val="0"/>
-              </a:spcAft>
-              <a:buClr>
-                <a:srgbClr val="7F7F7F"/>
-              </a:buClr>
-              <a:buSzPts val="1900"/>
-              <a:buFont typeface="Arial" panose="020B0604020202020204" pitchFamily="34" charset="0"/>
-              <a:buChar char="•"/>
-            </a:pPr>
-            <a:endParaRPr lang="es-MX" sz="1600" dirty="0">
-              <a:solidFill>
-                <a:schemeClr val="tx1"/>
-              </a:solidFill>
-            </a:endParaRPr>
-          </a:p>
-          <a:p>
-            <a:pPr marL="342900" lvl="0" indent="-342900" algn="just" rtl="0">
-              <a:lnSpc>
-                <a:spcPct val="150000"/>
-              </a:lnSpc>
-              <a:spcBef>
-                <a:spcPts val="0"/>
-              </a:spcBef>
-              <a:spcAft>
-                <a:spcPts val="0"/>
-              </a:spcAft>
-              <a:buClr>
-                <a:srgbClr val="7F7F7F"/>
-              </a:buClr>
-              <a:buSzPts val="1900"/>
-              <a:buFont typeface="Arial" panose="020B0604020202020204" pitchFamily="34" charset="0"/>
-              <a:buChar char="•"/>
-            </a:pPr>
-            <a:r>
-              <a:rPr lang="es-MX" sz="1600" dirty="0">
-                <a:solidFill>
-                  <a:schemeClr val="tx1"/>
-                </a:solidFill>
-              </a:rPr>
-              <a:t>Existe una diversidad de medidas de seguridad propuestas que presentan diferentes alcances, limitaciones y criterios de evaluación.</a:t>
-            </a:r>
-          </a:p>
-          <a:p>
-            <a:pPr marL="342900" lvl="0" indent="-342900" algn="just" rtl="0">
-              <a:lnSpc>
-                <a:spcPct val="150000"/>
-              </a:lnSpc>
-              <a:spcBef>
-                <a:spcPts val="0"/>
-              </a:spcBef>
-              <a:spcAft>
-                <a:spcPts val="0"/>
-              </a:spcAft>
-              <a:buClr>
-                <a:srgbClr val="7F7F7F"/>
-              </a:buClr>
-              <a:buSzPts val="1900"/>
-              <a:buFont typeface="Arial" panose="020B0604020202020204" pitchFamily="34" charset="0"/>
-              <a:buChar char="•"/>
-            </a:pPr>
-            <a:endParaRPr lang="es-MX" sz="1600" dirty="0">
-              <a:solidFill>
-                <a:schemeClr val="tx1"/>
-              </a:solidFill>
-            </a:endParaRPr>
-          </a:p>
-          <a:p>
-            <a:pPr marL="342900" lvl="0" indent="-342900" algn="just" rtl="0">
-              <a:lnSpc>
-                <a:spcPct val="150000"/>
-              </a:lnSpc>
-              <a:spcBef>
-                <a:spcPts val="0"/>
-              </a:spcBef>
-              <a:spcAft>
-                <a:spcPts val="0"/>
-              </a:spcAft>
-              <a:buClr>
-                <a:srgbClr val="7F7F7F"/>
-              </a:buClr>
-              <a:buSzPts val="1900"/>
-              <a:buFont typeface="Arial" panose="020B0604020202020204" pitchFamily="34" charset="0"/>
-              <a:buChar char="•"/>
-            </a:pPr>
-            <a:r>
-              <a:rPr lang="es-MX" sz="1600" b="1" dirty="0">
-                <a:solidFill>
-                  <a:schemeClr val="tx1"/>
-                </a:solidFill>
-              </a:rPr>
-              <a:t>Las revisiones existentes abordan el fenómeno de manera amplia o desde distintos niveles de intervención. Este trabajo se delimita a medidas de seguridad a nivel de aplicación, con énfasis en sus características, contexto de aplicación, evaluación y limitaciones.</a:t>
+              <a:rPr lang="es-MX" sz="1400" dirty="0">
+                <a:solidFill>
+                  <a:schemeClr val="tx1"/>
+                </a:solidFill>
+              </a:rPr>
+              <a:t> según características para llevarlos a cabo, evidenciando la diversidad de estos ataques y la necesidad de identificarlos y clasificarlos.</a:t>
             </a:r>
           </a:p>
         </p:txBody>
@@ -6664,8 +6475,8 @@
         </p:nvSpPr>
         <p:spPr>
           <a:xfrm>
-            <a:off x="515250" y="601494"/>
-            <a:ext cx="6425400" cy="571500"/>
+            <a:off x="515250" y="118677"/>
+            <a:ext cx="1608478" cy="360040"/>
           </a:xfrm>
           <a:prstGeom prst="rect">
             <a:avLst/>
@@ -6677,7 +6488,7 @@
         </p:spPr>
         <p:txBody>
           <a:bodyPr spcFirstLastPara="1" wrap="square" lIns="91425" tIns="45700" rIns="91425" bIns="45700" anchor="t" anchorCtr="0">
-            <a:normAutofit/>
+            <a:normAutofit fontScale="92500" lnSpcReduction="20000"/>
           </a:bodyPr>
           <a:lstStyle/>
           <a:p>
@@ -6698,10 +6509,10 @@
               <a:buNone/>
             </a:pPr>
             <a:r>
-              <a:rPr lang="es-ES" b="1" dirty="0"/>
+              <a:rPr lang="es-ES" sz="1800" b="1" dirty="0"/>
               <a:t>Justificación</a:t>
             </a:r>
-            <a:endParaRPr b="1" dirty="0"/>
+            <a:endParaRPr sz="1800" b="1" dirty="0"/>
           </a:p>
         </p:txBody>
       </p:sp>
@@ -6782,6 +6593,206 @@
           </a:p>
         </p:txBody>
       </p:sp>
+      <p:pic>
+        <p:nvPicPr>
+          <p:cNvPr id="2" name="Imagen 1" descr="Vector light bulb icon set light bulb vector illustration ideal for ideas">
+            <a:extLst>
+              <a:ext uri="{FF2B5EF4-FFF2-40B4-BE49-F238E27FC236}">
+                <a16:creationId xmlns:a16="http://schemas.microsoft.com/office/drawing/2014/main" id="{783D423B-2E0C-F5E0-7C0C-65E3AA87B74C}"/>
+              </a:ext>
+            </a:extLst>
+          </p:cNvPr>
+          <p:cNvPicPr>
+            <a:picLocks noChangeAspect="1"/>
+          </p:cNvPicPr>
+          <p:nvPr/>
+        </p:nvPicPr>
+        <p:blipFill>
+          <a:blip r:embed="rId3"/>
+          <a:stretch>
+            <a:fillRect/>
+          </a:stretch>
+        </p:blipFill>
+        <p:spPr>
+          <a:xfrm>
+            <a:off x="6291181" y="2042622"/>
+            <a:ext cx="2601298" cy="2601298"/>
+          </a:xfrm>
+          <a:prstGeom prst="rect">
+            <a:avLst/>
+          </a:prstGeom>
+        </p:spPr>
+      </p:pic>
+      <p:sp>
+        <p:nvSpPr>
+          <p:cNvPr id="4" name="CuadroTexto 3">
+            <a:extLst>
+              <a:ext uri="{FF2B5EF4-FFF2-40B4-BE49-F238E27FC236}">
+                <a16:creationId xmlns:a16="http://schemas.microsoft.com/office/drawing/2014/main" id="{7B6B0B62-24D4-1BEF-29B4-416C7F869B80}"/>
+              </a:ext>
+            </a:extLst>
+          </p:cNvPr>
+          <p:cNvSpPr txBox="1"/>
+          <p:nvPr/>
+        </p:nvSpPr>
+        <p:spPr>
+          <a:xfrm>
+            <a:off x="511579" y="3045676"/>
+            <a:ext cx="5496910" cy="1674754"/>
+          </a:xfrm>
+          <a:prstGeom prst="rect">
+            <a:avLst/>
+          </a:prstGeom>
+          <a:noFill/>
+        </p:spPr>
+        <p:txBody>
+          <a:bodyPr wrap="square">
+            <a:spAutoFit/>
+          </a:bodyPr>
+          <a:lstStyle/>
+          <a:p>
+            <a:pPr lvl="0" algn="just" rtl="0">
+              <a:lnSpc>
+                <a:spcPct val="150000"/>
+              </a:lnSpc>
+              <a:spcBef>
+                <a:spcPts val="0"/>
+              </a:spcBef>
+              <a:spcAft>
+                <a:spcPts val="0"/>
+              </a:spcAft>
+              <a:buClr>
+                <a:srgbClr val="7F7F7F"/>
+              </a:buClr>
+              <a:buSzPts val="1900"/>
+            </a:pPr>
+            <a:r>
+              <a:rPr lang="es-MX" sz="1400" b="1" dirty="0"/>
+              <a:t>La </a:t>
+            </a:r>
+            <a:r>
+              <a:rPr lang="es-MX" sz="1400" b="1" dirty="0">
+                <a:solidFill>
+                  <a:schemeClr val="tx1"/>
+                </a:solidFill>
+              </a:rPr>
+              <a:t>investigación delimita el análisis a las medidas de seguridad implementadas a nivel de aplicación en sistemas basados en LLM, con el propósito de identificar sus características, puntos de intervención, contextos de aplicación, métodos de evaluación, limitaciones y qué</a:t>
+            </a:r>
+          </a:p>
+          <a:p>
+            <a:pPr lvl="0" algn="just" rtl="0">
+              <a:lnSpc>
+                <a:spcPct val="150000"/>
+              </a:lnSpc>
+              <a:spcBef>
+                <a:spcPts val="0"/>
+              </a:spcBef>
+              <a:spcAft>
+                <a:spcPts val="0"/>
+              </a:spcAft>
+              <a:buClr>
+                <a:srgbClr val="7F7F7F"/>
+              </a:buClr>
+              <a:buSzPts val="1900"/>
+            </a:pPr>
+            <a:r>
+              <a:rPr lang="es-MX" sz="1400" b="1" dirty="0">
+                <a:solidFill>
+                  <a:schemeClr val="tx1"/>
+                </a:solidFill>
+              </a:rPr>
+              <a:t>compromisos presentan entre seguridad y utilidad.</a:t>
+            </a:r>
+          </a:p>
+        </p:txBody>
+      </p:sp>
+      <p:sp>
+        <p:nvSpPr>
+          <p:cNvPr id="7" name="CuadroTexto 6">
+            <a:extLst>
+              <a:ext uri="{FF2B5EF4-FFF2-40B4-BE49-F238E27FC236}">
+                <a16:creationId xmlns:a16="http://schemas.microsoft.com/office/drawing/2014/main" id="{7E66F582-17BB-5EE4-6866-B3A4B30EE6FA}"/>
+              </a:ext>
+            </a:extLst>
+          </p:cNvPr>
+          <p:cNvSpPr txBox="1"/>
+          <p:nvPr/>
+        </p:nvSpPr>
+        <p:spPr>
+          <a:xfrm>
+            <a:off x="511579" y="1873240"/>
+            <a:ext cx="5496909" cy="1028423"/>
+          </a:xfrm>
+          <a:prstGeom prst="rect">
+            <a:avLst/>
+          </a:prstGeom>
+          <a:noFill/>
+        </p:spPr>
+        <p:txBody>
+          <a:bodyPr wrap="square">
+            <a:spAutoFit/>
+          </a:bodyPr>
+          <a:lstStyle/>
+          <a:p>
+            <a:pPr algn="just">
+              <a:lnSpc>
+                <a:spcPct val="150000"/>
+              </a:lnSpc>
+              <a:spcBef>
+                <a:spcPts val="0"/>
+              </a:spcBef>
+            </a:pPr>
+            <a:r>
+              <a:rPr lang="es-MX" sz="1400" dirty="0">
+                <a:latin typeface="Gill Sans MT" panose="020B0502020104020203" pitchFamily="34" charset="0"/>
+              </a:rPr>
+              <a:t>Los trabajos previos permiten comprender qué ataques existen y qué estrategias de defensa han sido propuestas. Sin embargo, dichas revisiones abordan las defensas desde perspectivas amplias. </a:t>
+            </a:r>
+          </a:p>
+        </p:txBody>
+      </p:sp>
+      <p:sp>
+        <p:nvSpPr>
+          <p:cNvPr id="15" name="Marcador de número de diapositiva 14">
+            <a:extLst>
+              <a:ext uri="{FF2B5EF4-FFF2-40B4-BE49-F238E27FC236}">
+                <a16:creationId xmlns:a16="http://schemas.microsoft.com/office/drawing/2014/main" id="{AAA7A88E-A6B4-D326-0667-CA42721358F9}"/>
+              </a:ext>
+            </a:extLst>
+          </p:cNvPr>
+          <p:cNvSpPr>
+            <a:spLocks noGrp="1"/>
+          </p:cNvSpPr>
+          <p:nvPr>
+            <p:ph type="sldNum" idx="12"/>
+          </p:nvPr>
+        </p:nvSpPr>
+        <p:spPr>
+          <a:xfrm>
+            <a:off x="8460432" y="4643920"/>
+            <a:ext cx="548700" cy="393600"/>
+          </a:xfrm>
+        </p:spPr>
+        <p:txBody>
+          <a:bodyPr/>
+          <a:lstStyle/>
+          <a:p>
+            <a:pPr marL="0" lvl="0" indent="0" algn="r" rtl="0">
+              <a:spcBef>
+                <a:spcPts val="0"/>
+              </a:spcBef>
+              <a:spcAft>
+                <a:spcPts val="0"/>
+              </a:spcAft>
+              <a:buNone/>
+            </a:pPr>
+            <a:r>
+              <a:rPr lang="es-ES" dirty="0"/>
+              <a:t>9</a:t>
+            </a:r>
+          </a:p>
+        </p:txBody>
+      </p:sp>
     </p:spTree>
   </p:cSld>
   <p:clrMapOvr>
@@ -6790,7 +6801,7 @@
 </p:sld>
 </file>
 
-<file path=ppt/slides/slide13.xml><?xml version="1.0" encoding="utf-8"?>
+<file path=ppt/slides/slide11.xml><?xml version="1.0" encoding="utf-8"?>
 <p:sld xmlns:a="http://schemas.openxmlformats.org/drawingml/2006/main" xmlns:r="http://schemas.openxmlformats.org/officeDocument/2006/relationships" xmlns:p="http://schemas.openxmlformats.org/presentationml/2006/main">
   <p:cSld>
     <p:spTree>
@@ -6873,8 +6884,8 @@
         </p:nvSpPr>
         <p:spPr>
           <a:xfrm>
-            <a:off x="349904" y="1131591"/>
-            <a:ext cx="4131600" cy="3326690"/>
+            <a:off x="349904" y="1131590"/>
+            <a:ext cx="4131600" cy="3600399"/>
           </a:xfrm>
           <a:prstGeom prst="rect">
             <a:avLst/>
@@ -6886,7 +6897,7 @@
         </p:spPr>
         <p:txBody>
           <a:bodyPr spcFirstLastPara="1" wrap="square" lIns="91425" tIns="45700" rIns="91425" bIns="45700" anchor="t" anchorCtr="0">
-            <a:normAutofit fontScale="85000" lnSpcReduction="20000"/>
+            <a:normAutofit fontScale="70000" lnSpcReduction="20000"/>
           </a:bodyPr>
           <a:lstStyle/>
           <a:p>
@@ -6927,7 +6938,7 @@
               <a:buChar char="•"/>
             </a:pPr>
             <a:r>
-              <a:rPr lang="es-ES" sz="1600" dirty="0">
+              <a:rPr lang="es-ES" sz="2000" dirty="0">
                 <a:solidFill>
                   <a:schemeClr val="tx1"/>
                 </a:solidFill>
@@ -6951,7 +6962,7 @@
               <a:buChar char="•"/>
             </a:pPr>
             <a:r>
-              <a:rPr lang="es-ES" sz="1600" dirty="0">
+              <a:rPr lang="es-ES" sz="2000" dirty="0">
                 <a:solidFill>
                   <a:schemeClr val="tx1"/>
                 </a:solidFill>
@@ -6975,23 +6986,31 @@
               <a:buChar char="•"/>
             </a:pPr>
             <a:r>
-              <a:rPr lang="es-ES" sz="1600" dirty="0">
-                <a:solidFill>
-                  <a:schemeClr val="tx1"/>
-                </a:solidFill>
-              </a:rPr>
-              <a:t>Literatura que sea accesible mediante motores de búsqueda con acceso institucional como ACM, </a:t>
-            </a:r>
-            <a:r>
-              <a:rPr lang="es-ES" sz="1600" i="1" dirty="0">
-                <a:solidFill>
-                  <a:schemeClr val="tx1"/>
-                </a:solidFill>
-              </a:rPr>
-              <a:t>Springer</a:t>
-            </a:r>
-            <a:r>
-              <a:rPr lang="es-ES" sz="1600" dirty="0">
+              <a:rPr lang="es-MX" sz="2000" dirty="0">
+                <a:solidFill>
+                  <a:schemeClr val="tx1"/>
+                </a:solidFill>
+              </a:rPr>
+              <a:t>Literatura científica recuperable mediante plataformas académicas con acceso institucional, como </a:t>
+            </a:r>
+            <a:r>
+              <a:rPr lang="es-MX" sz="2000" i="1" dirty="0">
+                <a:solidFill>
+                  <a:schemeClr val="tx1"/>
+                </a:solidFill>
+              </a:rPr>
+              <a:t>ACM Digital Library, </a:t>
+            </a:r>
+            <a:r>
+              <a:rPr lang="es-MX" sz="2000" i="1" dirty="0" err="1">
+                <a:solidFill>
+                  <a:schemeClr val="tx1"/>
+                </a:solidFill>
+              </a:rPr>
+              <a:t>SpringerLink</a:t>
+            </a:r>
+            <a:r>
+              <a:rPr lang="es-MX" sz="2000" i="1" dirty="0">
                 <a:solidFill>
                   <a:schemeClr val="tx1"/>
                 </a:solidFill>
@@ -6999,7 +7018,7 @@
               <a:t>, </a:t>
             </a:r>
             <a:r>
-              <a:rPr lang="es-ES" sz="1600" i="1" dirty="0" err="1">
+              <a:rPr lang="es-MX" sz="2000" i="1" dirty="0" err="1">
                 <a:solidFill>
                   <a:schemeClr val="tx1"/>
                 </a:solidFill>
@@ -7007,12 +7026,44 @@
               <a:t>ScienceDirect</a:t>
             </a:r>
             <a:r>
-              <a:rPr lang="es-ES" sz="1600" dirty="0">
-                <a:solidFill>
-                  <a:schemeClr val="tx1"/>
-                </a:solidFill>
-              </a:rPr>
-              <a:t> e IEEE.</a:t>
+              <a:rPr lang="es-MX" sz="2000" i="1" dirty="0">
+                <a:solidFill>
+                  <a:schemeClr val="tx1"/>
+                </a:solidFill>
+              </a:rPr>
+              <a:t> </a:t>
+            </a:r>
+            <a:r>
+              <a:rPr lang="es-MX" sz="2000" dirty="0">
+                <a:solidFill>
+                  <a:schemeClr val="tx1"/>
+                </a:solidFill>
+              </a:rPr>
+              <a:t>e</a:t>
+            </a:r>
+            <a:r>
+              <a:rPr lang="es-MX" sz="2000" i="1" dirty="0">
+                <a:solidFill>
+                  <a:schemeClr val="tx1"/>
+                </a:solidFill>
+              </a:rPr>
+              <a:t> IEEE </a:t>
+            </a:r>
+            <a:r>
+              <a:rPr lang="es-MX" sz="2000" i="1" dirty="0" err="1">
+                <a:solidFill>
+                  <a:schemeClr val="tx1"/>
+                </a:solidFill>
+              </a:rPr>
+              <a:t>Xplore</a:t>
+            </a:r>
+            <a:r>
+              <a:rPr lang="es-ES" sz="2000" dirty="0">
+                <a:solidFill>
+                  <a:schemeClr val="tx1"/>
+                </a:solidFill>
+              </a:rPr>
+              <a:t>.</a:t>
             </a:r>
           </a:p>
           <a:p>
@@ -7031,7 +7082,7 @@
               <a:buChar char="•"/>
             </a:pPr>
             <a:r>
-              <a:rPr lang="es-ES" sz="1600" dirty="0">
+              <a:rPr lang="es-ES" sz="2000" dirty="0">
                 <a:solidFill>
                   <a:schemeClr val="tx1"/>
                 </a:solidFill>
@@ -7055,7 +7106,7 @@
               <a:buChar char="•"/>
             </a:pPr>
             <a:r>
-              <a:rPr lang="es-ES" sz="1600" dirty="0">
+              <a:rPr lang="es-ES" sz="2000" dirty="0">
                 <a:solidFill>
                   <a:schemeClr val="tx1"/>
                 </a:solidFill>
@@ -7160,7 +7211,7 @@
                   <a:schemeClr val="tx1"/>
                 </a:solidFill>
               </a:rPr>
-              <a:t>Artículos o revisiones que no hayan sido publicados o revisados oficialmente.</a:t>
+              <a:t>Se excluirán trabajos no publicados formalmente o que no hayan pasado por un proceso de revisión.</a:t>
             </a:r>
           </a:p>
           <a:p>
@@ -7266,6 +7317,48 @@
           </a:p>
         </p:txBody>
       </p:sp>
+      <p:sp>
+        <p:nvSpPr>
+          <p:cNvPr id="2" name="Marcador de número de diapositiva 1">
+            <a:extLst>
+              <a:ext uri="{FF2B5EF4-FFF2-40B4-BE49-F238E27FC236}">
+                <a16:creationId xmlns:a16="http://schemas.microsoft.com/office/drawing/2014/main" id="{ABDE6C31-5AE2-2491-732D-A896560F30B4}"/>
+              </a:ext>
+            </a:extLst>
+          </p:cNvPr>
+          <p:cNvSpPr>
+            <a:spLocks noGrp="1"/>
+          </p:cNvSpPr>
+          <p:nvPr>
+            <p:ph type="sldNum" idx="12"/>
+          </p:nvPr>
+        </p:nvSpPr>
+        <p:spPr>
+          <a:xfrm>
+            <a:off x="8519746" y="4626422"/>
+            <a:ext cx="548700" cy="393600"/>
+          </a:xfrm>
+        </p:spPr>
+        <p:txBody>
+          <a:bodyPr/>
+          <a:lstStyle/>
+          <a:p>
+            <a:pPr marL="0" lvl="0" indent="0" algn="r" rtl="0">
+              <a:spcBef>
+                <a:spcPts val="0"/>
+              </a:spcBef>
+              <a:spcAft>
+                <a:spcPts val="0"/>
+              </a:spcAft>
+              <a:buNone/>
+            </a:pPr>
+            <a:r>
+              <a:rPr lang="es-ES" dirty="0"/>
+              <a:t>10</a:t>
+            </a:r>
+          </a:p>
+        </p:txBody>
+      </p:sp>
     </p:spTree>
   </p:cSld>
   <p:clrMapOvr>
@@ -7274,7 +7367,7 @@
 </p:sld>
 </file>
 
-<file path=ppt/slides/slide14.xml><?xml version="1.0" encoding="utf-8"?>
+<file path=ppt/slides/slide12.xml><?xml version="1.0" encoding="utf-8"?>
 <p:sld xmlns:a="http://schemas.openxmlformats.org/drawingml/2006/main" xmlns:r="http://schemas.openxmlformats.org/officeDocument/2006/relationships" xmlns:p="http://schemas.openxmlformats.org/presentationml/2006/main">
   <p:cSld>
     <p:spTree>
@@ -7564,344 +7657,44 @@
           </a:p>
         </p:txBody>
       </p:sp>
-    </p:spTree>
-  </p:cSld>
-  <p:clrMapOvr>
-    <a:masterClrMapping/>
-  </p:clrMapOvr>
-</p:sld>
-</file>
-
-<file path=ppt/slides/slide15.xml><?xml version="1.0" encoding="utf-8"?>
-<p:sld xmlns:a="http://schemas.openxmlformats.org/drawingml/2006/main" xmlns:r="http://schemas.openxmlformats.org/officeDocument/2006/relationships" xmlns:p="http://schemas.openxmlformats.org/presentationml/2006/main">
-  <p:cSld>
-    <p:spTree>
-      <p:nvGrpSpPr>
-        <p:cNvPr id="1" name="Shape 119"/>
-        <p:cNvGrpSpPr/>
-        <p:nvPr/>
-      </p:nvGrpSpPr>
-      <p:grpSpPr>
-        <a:xfrm>
-          <a:off x="0" y="0"/>
-          <a:ext cx="0" cy="0"/>
-          <a:chOff x="0" y="0"/>
-          <a:chExt cx="0" cy="0"/>
-        </a:xfrm>
-      </p:grpSpPr>
       <p:sp>
         <p:nvSpPr>
-          <p:cNvPr id="120" name="Google Shape;120;p16"/>
-          <p:cNvSpPr txBox="1">
+          <p:cNvPr id="2" name="Marcador de número de diapositiva 1">
+            <a:extLst>
+              <a:ext uri="{FF2B5EF4-FFF2-40B4-BE49-F238E27FC236}">
+                <a16:creationId xmlns:a16="http://schemas.microsoft.com/office/drawing/2014/main" id="{58FF16D7-0CA2-328F-7918-CEA7426004C7}"/>
+              </a:ext>
+            </a:extLst>
+          </p:cNvPr>
+          <p:cNvSpPr>
             <a:spLocks noGrp="1"/>
           </p:cNvSpPr>
           <p:nvPr>
-            <p:ph type="title"/>
+            <p:ph type="sldNum" idx="12"/>
           </p:nvPr>
         </p:nvSpPr>
         <p:spPr>
           <a:xfrm>
-            <a:off x="457202" y="685219"/>
-            <a:ext cx="8229600" cy="342300"/>
+            <a:off x="8460432" y="4595236"/>
+            <a:ext cx="548700" cy="393600"/>
           </a:xfrm>
-          <a:prstGeom prst="rect">
-            <a:avLst/>
-          </a:prstGeom>
-          <a:noFill/>
-          <a:ln>
-            <a:noFill/>
-          </a:ln>
         </p:spPr>
         <p:txBody>
-          <a:bodyPr spcFirstLastPara="1" wrap="square" lIns="91425" tIns="45700" rIns="91425" bIns="45700" anchor="ctr" anchorCtr="0">
-            <a:noAutofit/>
-          </a:bodyPr>
+          <a:bodyPr/>
           <a:lstStyle/>
           <a:p>
-            <a:pPr marL="0" lvl="0" indent="0" algn="l" rtl="0">
-              <a:lnSpc>
-                <a:spcPct val="118181"/>
-              </a:lnSpc>
-              <a:spcBef>
-                <a:spcPts val="0"/>
-              </a:spcBef>
-              <a:spcAft>
-                <a:spcPts val="0"/>
-              </a:spcAft>
-              <a:buClr>
-                <a:schemeClr val="dk1"/>
-              </a:buClr>
-              <a:buSzPts val="2200"/>
-              <a:buFont typeface="Gill Sans"/>
+            <a:pPr marL="0" lvl="0" indent="0" algn="r" rtl="0">
+              <a:spcBef>
+                <a:spcPts val="0"/>
+              </a:spcBef>
+              <a:spcAft>
+                <a:spcPts val="0"/>
+              </a:spcAft>
               <a:buNone/>
             </a:pPr>
             <a:r>
-              <a:rPr lang="es-ES" b="1" dirty="0"/>
-              <a:t>Método de investigación - Kitchenham</a:t>
-            </a:r>
-            <a:endParaRPr b="1" dirty="0"/>
-          </a:p>
-        </p:txBody>
-      </p:sp>
-      <p:sp>
-        <p:nvSpPr>
-          <p:cNvPr id="123" name="Google Shape;123;p16"/>
-          <p:cNvSpPr txBox="1">
-            <a:spLocks noGrp="1"/>
-          </p:cNvSpPr>
-          <p:nvPr>
-            <p:ph type="body" idx="4294967295"/>
-          </p:nvPr>
-        </p:nvSpPr>
-        <p:spPr>
-          <a:xfrm>
-            <a:off x="389397" y="1203598"/>
-            <a:ext cx="8365200" cy="3384376"/>
-          </a:xfrm>
-          <a:prstGeom prst="rect">
-            <a:avLst/>
-          </a:prstGeom>
-          <a:noFill/>
-          <a:ln>
-            <a:noFill/>
-          </a:ln>
-        </p:spPr>
-        <p:txBody>
-          <a:bodyPr spcFirstLastPara="1" wrap="square" lIns="91425" tIns="45700" rIns="91425" bIns="45700" anchor="t" anchorCtr="0">
-            <a:normAutofit/>
-          </a:bodyPr>
-          <a:lstStyle/>
-          <a:p>
-            <a:pPr marL="457200" lvl="0" indent="-349250" algn="l" rtl="0">
-              <a:lnSpc>
-                <a:spcPct val="150000"/>
-              </a:lnSpc>
-              <a:spcBef>
-                <a:spcPts val="0"/>
-              </a:spcBef>
-              <a:spcAft>
-                <a:spcPts val="0"/>
-              </a:spcAft>
-              <a:buSzPts val="1900"/>
-              <a:buChar char="-"/>
-            </a:pPr>
-            <a:r>
-              <a:rPr lang="es-MX" sz="1400" dirty="0">
-                <a:solidFill>
-                  <a:schemeClr val="tx1"/>
-                </a:solidFill>
-              </a:rPr>
-              <a:t>Es un marco para realizar revisiones sistemáticas de literatura especializado en la ingeniería de software</a:t>
-            </a:r>
-          </a:p>
-          <a:p>
-            <a:pPr marL="457200" lvl="0" indent="-349250" algn="l" rtl="0">
-              <a:lnSpc>
-                <a:spcPct val="150000"/>
-              </a:lnSpc>
-              <a:spcBef>
-                <a:spcPts val="0"/>
-              </a:spcBef>
-              <a:spcAft>
-                <a:spcPts val="0"/>
-              </a:spcAft>
-              <a:buSzPts val="1900"/>
-              <a:buChar char="-"/>
-            </a:pPr>
-            <a:endParaRPr lang="es-MX" sz="1400" dirty="0">
-              <a:solidFill>
-                <a:schemeClr val="tx1"/>
-              </a:solidFill>
-            </a:endParaRPr>
-          </a:p>
-          <a:p>
-            <a:pPr marL="457200" lvl="0" indent="-349250" algn="l" rtl="0">
-              <a:lnSpc>
-                <a:spcPct val="150000"/>
-              </a:lnSpc>
-              <a:spcBef>
-                <a:spcPts val="0"/>
-              </a:spcBef>
-              <a:spcAft>
-                <a:spcPts val="0"/>
-              </a:spcAft>
-              <a:buSzPts val="1900"/>
-              <a:buChar char="-"/>
-            </a:pPr>
-            <a:r>
-              <a:rPr lang="es-MX" sz="1400" dirty="0">
-                <a:solidFill>
-                  <a:schemeClr val="tx1"/>
-                </a:solidFill>
-              </a:rPr>
-              <a:t>Busca minimizar el sesgo mediante protocolo definidos, estrategias de búsqueda auditables y criterios estrictos de inclusión de estudios.</a:t>
-            </a:r>
-          </a:p>
-          <a:p>
-            <a:pPr marL="107950" lvl="0" algn="l" rtl="0">
-              <a:lnSpc>
-                <a:spcPct val="150000"/>
-              </a:lnSpc>
-              <a:spcBef>
-                <a:spcPts val="0"/>
-              </a:spcBef>
-              <a:spcAft>
-                <a:spcPts val="0"/>
-              </a:spcAft>
-              <a:buSzPts val="1900"/>
-            </a:pPr>
-            <a:endParaRPr lang="es-MX" sz="1400" dirty="0">
-              <a:solidFill>
-                <a:schemeClr val="tx1"/>
-              </a:solidFill>
-            </a:endParaRPr>
-          </a:p>
-          <a:p>
-            <a:pPr marL="457200" lvl="0" indent="-349250" algn="l" rtl="0">
-              <a:lnSpc>
-                <a:spcPct val="150000"/>
-              </a:lnSpc>
-              <a:spcBef>
-                <a:spcPts val="0"/>
-              </a:spcBef>
-              <a:spcAft>
-                <a:spcPts val="0"/>
-              </a:spcAft>
-              <a:buSzPts val="1900"/>
-              <a:buChar char="-"/>
-            </a:pPr>
-            <a:r>
-              <a:rPr lang="es-MX" sz="1400" dirty="0">
-                <a:solidFill>
-                  <a:schemeClr val="tx1"/>
-                </a:solidFill>
-              </a:rPr>
-              <a:t>Kitchenham define la revisión sistemática de literatura como una forma de identificar, evaluar e interpretar la mayor cantidad de información disponible y relevante sobre un tema.</a:t>
-            </a:r>
-          </a:p>
-          <a:p>
-            <a:pPr marL="457200" lvl="0" indent="-349250" algn="l" rtl="0">
-              <a:lnSpc>
-                <a:spcPct val="150000"/>
-              </a:lnSpc>
-              <a:spcBef>
-                <a:spcPts val="0"/>
-              </a:spcBef>
-              <a:spcAft>
-                <a:spcPts val="0"/>
-              </a:spcAft>
-              <a:buSzPts val="1900"/>
-              <a:buChar char="-"/>
-            </a:pPr>
-            <a:endParaRPr lang="es-MX" sz="1400" dirty="0">
-              <a:solidFill>
-                <a:schemeClr val="tx1"/>
-              </a:solidFill>
-            </a:endParaRPr>
-          </a:p>
-          <a:p>
-            <a:pPr marL="457200" lvl="0" indent="-349250" algn="l" rtl="0">
-              <a:lnSpc>
-                <a:spcPct val="150000"/>
-              </a:lnSpc>
-              <a:spcBef>
-                <a:spcPts val="0"/>
-              </a:spcBef>
-              <a:spcAft>
-                <a:spcPts val="0"/>
-              </a:spcAft>
-              <a:buSzPts val="1900"/>
-              <a:buChar char="-"/>
-            </a:pPr>
-            <a:r>
-              <a:rPr lang="es-MX" sz="1400" dirty="0">
-                <a:solidFill>
-                  <a:schemeClr val="tx1"/>
-                </a:solidFill>
-              </a:rPr>
-              <a:t>Una revisión sistemática es un estudio secundario mientras que los estudios individuales que contribuyen a la revisión son estudios primarios.</a:t>
-            </a:r>
-            <a:endParaRPr sz="1400" dirty="0">
-              <a:solidFill>
-                <a:schemeClr val="tx1"/>
-              </a:solidFill>
-            </a:endParaRPr>
-          </a:p>
-        </p:txBody>
-      </p:sp>
-      <p:sp>
-        <p:nvSpPr>
-          <p:cNvPr id="8" name="Google Shape;106;p14">
-            <a:extLst>
-              <a:ext uri="{FF2B5EF4-FFF2-40B4-BE49-F238E27FC236}">
-                <a16:creationId xmlns:a16="http://schemas.microsoft.com/office/drawing/2014/main" id="{C45A48D4-5A23-B920-CF07-F3E232D3FBA2}"/>
-              </a:ext>
-            </a:extLst>
-          </p:cNvPr>
-          <p:cNvSpPr txBox="1">
-            <a:spLocks/>
-          </p:cNvSpPr>
-          <p:nvPr/>
-        </p:nvSpPr>
-        <p:spPr>
-          <a:xfrm>
-            <a:off x="179512" y="4876006"/>
-            <a:ext cx="7200800" cy="144016"/>
-          </a:xfrm>
-          <a:prstGeom prst="rect">
-            <a:avLst/>
-          </a:prstGeom>
-          <a:noFill/>
-          <a:ln>
-            <a:noFill/>
-          </a:ln>
-        </p:spPr>
-        <p:txBody>
-          <a:bodyPr spcFirstLastPara="1" vert="horz" wrap="square" lIns="36000" tIns="0" rIns="91425" bIns="45700" rtlCol="0" anchor="t" anchorCtr="0">
-            <a:noAutofit/>
-          </a:bodyPr>
-          <a:lstStyle>
-            <a:lvl1pPr algn="l" defTabSz="298227" rtl="0" eaLnBrk="1" latinLnBrk="0" hangingPunct="1">
-              <a:lnSpc>
-                <a:spcPts val="2600"/>
-              </a:lnSpc>
-              <a:spcBef>
-                <a:spcPct val="0"/>
-              </a:spcBef>
-              <a:buNone/>
-              <a:defRPr sz="2200" kern="1200">
-                <a:solidFill>
-                  <a:schemeClr val="tx1"/>
-                </a:solidFill>
-                <a:latin typeface="Gill Sans MT" panose="020B0502020104020203" pitchFamily="34" charset="0"/>
-                <a:ea typeface="+mj-ea"/>
-                <a:cs typeface="+mj-cs"/>
-              </a:defRPr>
-            </a:lvl1pPr>
-          </a:lstStyle>
-          <a:p>
-            <a:pPr>
-              <a:lnSpc>
-                <a:spcPct val="116666"/>
-              </a:lnSpc>
-              <a:spcBef>
-                <a:spcPts val="0"/>
-              </a:spcBef>
-              <a:buClr>
-                <a:schemeClr val="dk1"/>
-              </a:buClr>
-            </a:pPr>
-            <a:r>
-              <a:rPr lang="es-MX" sz="800" dirty="0"/>
-              <a:t>​​Monografía: Estado del arte de las medidas de seguridad a nivel de aplicación en el contexto de ataques de inyección de </a:t>
-            </a:r>
-            <a:r>
-              <a:rPr lang="es-MX" sz="800" i="1" dirty="0" err="1"/>
-              <a:t>prompt</a:t>
-            </a:r>
-            <a:r>
-              <a:rPr lang="es-MX" sz="800" dirty="0"/>
-              <a:t> dirigidos a sistemas basados en LLM​</a:t>
+              <a:rPr lang="es-ES" dirty="0"/>
+              <a:t>11</a:t>
             </a:r>
           </a:p>
         </p:txBody>
@@ -7914,7 +7707,7 @@
 </p:sld>
 </file>
 
-<file path=ppt/slides/slide16.xml><?xml version="1.0" encoding="utf-8"?>
+<file path=ppt/slides/slide13.xml><?xml version="1.0" encoding="utf-8"?>
 <p:sld xmlns:a="http://schemas.openxmlformats.org/drawingml/2006/main" xmlns:r="http://schemas.openxmlformats.org/officeDocument/2006/relationships" xmlns:p="http://schemas.openxmlformats.org/presentationml/2006/main">
   <p:cSld>
     <p:spTree>
@@ -7955,8 +7748,8 @@
         </p:nvSpPr>
         <p:spPr>
           <a:xfrm>
-            <a:off x="457197" y="555526"/>
-            <a:ext cx="8229600" cy="342300"/>
+            <a:off x="395536" y="106279"/>
+            <a:ext cx="6480720" cy="342300"/>
           </a:xfrm>
           <a:prstGeom prst="rect">
             <a:avLst/>
@@ -7990,10 +7783,10 @@
               <a:buNone/>
             </a:pPr>
             <a:r>
-              <a:rPr lang="es-ES" b="1" dirty="0"/>
-              <a:t>Método de investigación – Etapas del método Kitchenham</a:t>
-            </a:r>
-            <a:endParaRPr b="1" dirty="0"/>
+              <a:rPr lang="es-ES" sz="1800" b="1" dirty="0"/>
+              <a:t>Método de investigación – Kitchenham</a:t>
+            </a:r>
+            <a:endParaRPr sz="1800" b="1" dirty="0"/>
           </a:p>
         </p:txBody>
       </p:sp>
@@ -8026,8 +7819,8 @@
         </p:blipFill>
         <p:spPr>
           <a:xfrm>
-            <a:off x="1907705" y="944377"/>
-            <a:ext cx="5328589" cy="3797778"/>
+            <a:off x="1590758" y="537509"/>
+            <a:ext cx="5962483" cy="4249566"/>
           </a:xfrm>
           <a:prstGeom prst="rect">
             <a:avLst/>
@@ -8111,6 +7904,48 @@
           </a:p>
         </p:txBody>
       </p:sp>
+      <p:sp>
+        <p:nvSpPr>
+          <p:cNvPr id="2" name="Marcador de número de diapositiva 1">
+            <a:extLst>
+              <a:ext uri="{FF2B5EF4-FFF2-40B4-BE49-F238E27FC236}">
+                <a16:creationId xmlns:a16="http://schemas.microsoft.com/office/drawing/2014/main" id="{F8036404-E725-CCBA-948A-B3B4F8207D3A}"/>
+              </a:ext>
+            </a:extLst>
+          </p:cNvPr>
+          <p:cNvSpPr>
+            <a:spLocks noGrp="1"/>
+          </p:cNvSpPr>
+          <p:nvPr>
+            <p:ph type="sldNum" idx="12"/>
+          </p:nvPr>
+        </p:nvSpPr>
+        <p:spPr>
+          <a:xfrm>
+            <a:off x="8460432" y="4590275"/>
+            <a:ext cx="548700" cy="393600"/>
+          </a:xfrm>
+        </p:spPr>
+        <p:txBody>
+          <a:bodyPr/>
+          <a:lstStyle/>
+          <a:p>
+            <a:pPr marL="0" lvl="0" indent="0" algn="r" rtl="0">
+              <a:spcBef>
+                <a:spcPts val="0"/>
+              </a:spcBef>
+              <a:spcAft>
+                <a:spcPts val="0"/>
+              </a:spcAft>
+              <a:buNone/>
+            </a:pPr>
+            <a:r>
+              <a:rPr lang="es-ES" dirty="0"/>
+              <a:t>12</a:t>
+            </a:r>
+          </a:p>
+        </p:txBody>
+      </p:sp>
     </p:spTree>
     <p:extLst>
       <p:ext uri="{BB962C8B-B14F-4D97-AF65-F5344CB8AC3E}">
@@ -8124,7 +7959,7 @@
 </p:sld>
 </file>
 
-<file path=ppt/slides/slide17.xml><?xml version="1.0" encoding="utf-8"?>
+<file path=ppt/slides/slide14.xml><?xml version="1.0" encoding="utf-8"?>
 <p:sld xmlns:a="http://schemas.openxmlformats.org/drawingml/2006/main" xmlns:r="http://schemas.openxmlformats.org/officeDocument/2006/relationships" xmlns:p="http://schemas.openxmlformats.org/presentationml/2006/main">
   <p:cSld>
     <p:spTree>
@@ -8362,6 +8197,48 @@
           </a:p>
         </p:txBody>
       </p:sp>
+      <p:sp>
+        <p:nvSpPr>
+          <p:cNvPr id="2" name="Marcador de número de diapositiva 1">
+            <a:extLst>
+              <a:ext uri="{FF2B5EF4-FFF2-40B4-BE49-F238E27FC236}">
+                <a16:creationId xmlns:a16="http://schemas.microsoft.com/office/drawing/2014/main" id="{1075547A-0F21-EEBC-DFC4-A6B82216B428}"/>
+              </a:ext>
+            </a:extLst>
+          </p:cNvPr>
+          <p:cNvSpPr>
+            <a:spLocks noGrp="1"/>
+          </p:cNvSpPr>
+          <p:nvPr>
+            <p:ph type="sldNum" idx="12"/>
+          </p:nvPr>
+        </p:nvSpPr>
+        <p:spPr>
+          <a:xfrm>
+            <a:off x="8532440" y="4679206"/>
+            <a:ext cx="548700" cy="393600"/>
+          </a:xfrm>
+        </p:spPr>
+        <p:txBody>
+          <a:bodyPr/>
+          <a:lstStyle/>
+          <a:p>
+            <a:pPr marL="0" lvl="0" indent="0" algn="r" rtl="0">
+              <a:spcBef>
+                <a:spcPts val="0"/>
+              </a:spcBef>
+              <a:spcAft>
+                <a:spcPts val="0"/>
+              </a:spcAft>
+              <a:buNone/>
+            </a:pPr>
+            <a:r>
+              <a:rPr lang="es-ES" dirty="0"/>
+              <a:t>13</a:t>
+            </a:r>
+          </a:p>
+        </p:txBody>
+      </p:sp>
     </p:spTree>
     <p:extLst>
       <p:ext uri="{BB962C8B-B14F-4D97-AF65-F5344CB8AC3E}">
@@ -8375,7 +8252,7 @@
 </p:sld>
 </file>
 
-<file path=ppt/slides/slide18.xml><?xml version="1.0" encoding="utf-8"?>
+<file path=ppt/slides/slide15.xml><?xml version="1.0" encoding="utf-8"?>
 <p:sld xmlns:a="http://schemas.openxmlformats.org/drawingml/2006/main" xmlns:r="http://schemas.openxmlformats.org/officeDocument/2006/relationships" xmlns:p="http://schemas.openxmlformats.org/presentationml/2006/main">
   <p:cSld>
     <p:spTree>
@@ -8553,6 +8430,48 @@
           </a:p>
         </p:txBody>
       </p:sp>
+      <p:sp>
+        <p:nvSpPr>
+          <p:cNvPr id="2" name="Marcador de número de diapositiva 1">
+            <a:extLst>
+              <a:ext uri="{FF2B5EF4-FFF2-40B4-BE49-F238E27FC236}">
+                <a16:creationId xmlns:a16="http://schemas.microsoft.com/office/drawing/2014/main" id="{DC9CED28-FF84-29F9-CB33-3245191598F9}"/>
+              </a:ext>
+            </a:extLst>
+          </p:cNvPr>
+          <p:cNvSpPr>
+            <a:spLocks noGrp="1"/>
+          </p:cNvSpPr>
+          <p:nvPr>
+            <p:ph type="sldNum" idx="12"/>
+          </p:nvPr>
+        </p:nvSpPr>
+        <p:spPr>
+          <a:xfrm>
+            <a:off x="8512580" y="4637032"/>
+            <a:ext cx="548700" cy="393600"/>
+          </a:xfrm>
+        </p:spPr>
+        <p:txBody>
+          <a:bodyPr/>
+          <a:lstStyle/>
+          <a:p>
+            <a:pPr marL="0" lvl="0" indent="0" algn="r" rtl="0">
+              <a:spcBef>
+                <a:spcPts val="0"/>
+              </a:spcBef>
+              <a:spcAft>
+                <a:spcPts val="0"/>
+              </a:spcAft>
+              <a:buNone/>
+            </a:pPr>
+            <a:r>
+              <a:rPr lang="es-ES" dirty="0"/>
+              <a:t>14</a:t>
+            </a:r>
+          </a:p>
+        </p:txBody>
+      </p:sp>
     </p:spTree>
   </p:cSld>
   <p:clrMapOvr>
@@ -8561,7 +8480,7 @@
 </p:sld>
 </file>
 
-<file path=ppt/slides/slide19.xml><?xml version="1.0" encoding="utf-8"?>
+<file path=ppt/slides/slide16.xml><?xml version="1.0" encoding="utf-8"?>
 <p:sld xmlns:a="http://schemas.openxmlformats.org/drawingml/2006/main" xmlns:r="http://schemas.openxmlformats.org/officeDocument/2006/relationships" xmlns:p="http://schemas.openxmlformats.org/presentationml/2006/main">
   <p:cSld>
     <p:spTree>
@@ -8663,7 +8582,7 @@
         <p:spPr>
           <a:xfrm>
             <a:off x="389400" y="1131590"/>
-            <a:ext cx="8365200" cy="3600400"/>
+            <a:ext cx="8365200" cy="3456384"/>
           </a:xfrm>
           <a:prstGeom prst="rect">
             <a:avLst/>
@@ -8675,7 +8594,7 @@
         </p:spPr>
         <p:txBody>
           <a:bodyPr spcFirstLastPara="1" wrap="square" lIns="91425" tIns="45700" rIns="91425" bIns="45700" anchor="t" anchorCtr="0">
-            <a:normAutofit fontScale="92500"/>
+            <a:noAutofit/>
           </a:bodyPr>
           <a:lstStyle/>
           <a:p>
@@ -8687,28 +8606,243 @@
               <a:buChar char="•"/>
             </a:pPr>
             <a:r>
-              <a:rPr lang="es-MX" sz="1200" dirty="0">
-                <a:solidFill>
-                  <a:schemeClr val="tx1"/>
-                </a:solidFill>
-              </a:rPr>
-              <a:t>¿Qué es la ciberseguridad? Tipos, amenazas y mejores prácticas | Fortinet. </a:t>
-            </a:r>
-            <a:r>
-              <a:rPr lang="en-US" sz="1200" dirty="0">
-                <a:solidFill>
-                  <a:schemeClr val="tx1"/>
-                </a:solidFill>
-              </a:rPr>
-              <a:t>(n.d.). Fortinet. </a:t>
-            </a:r>
-            <a:r>
-              <a:rPr lang="en-US" sz="1200" u="sng" dirty="0">
+              <a:rPr lang="es-MX" sz="1100" dirty="0" err="1">
+                <a:solidFill>
+                  <a:schemeClr val="tx1"/>
+                </a:solidFill>
+              </a:rPr>
+              <a:t>Damacena</a:t>
+            </a:r>
+            <a:r>
+              <a:rPr lang="es-MX" sz="1100" dirty="0">
+                <a:solidFill>
+                  <a:schemeClr val="tx1"/>
+                </a:solidFill>
+              </a:rPr>
+              <a:t> Duarte, J., Cândido, G. D., de Britto Filho, J. R. A., Souza Neto, J., da Costa, E. J., da Costa, J. P. J., &amp; </a:t>
+            </a:r>
+            <a:r>
+              <a:rPr lang="es-MX" sz="1100" dirty="0" err="1">
+                <a:solidFill>
+                  <a:schemeClr val="tx1"/>
+                </a:solidFill>
+              </a:rPr>
+              <a:t>Peotta</a:t>
+            </a:r>
+            <a:r>
+              <a:rPr lang="es-MX" sz="1100" dirty="0">
+                <a:solidFill>
+                  <a:schemeClr val="tx1"/>
+                </a:solidFill>
+              </a:rPr>
+              <a:t> De Melo, L. (2026). A </a:t>
+            </a:r>
+            <a:r>
+              <a:rPr lang="es-MX" sz="1100" dirty="0" err="1">
+                <a:solidFill>
+                  <a:schemeClr val="tx1"/>
+                </a:solidFill>
+              </a:rPr>
+              <a:t>Systematic</a:t>
+            </a:r>
+            <a:r>
+              <a:rPr lang="es-MX" sz="1100" dirty="0">
+                <a:solidFill>
+                  <a:schemeClr val="tx1"/>
+                </a:solidFill>
+              </a:rPr>
+              <a:t> </a:t>
+            </a:r>
+            <a:r>
+              <a:rPr lang="es-MX" sz="1100" dirty="0" err="1">
+                <a:solidFill>
+                  <a:schemeClr val="tx1"/>
+                </a:solidFill>
+              </a:rPr>
+              <a:t>Review</a:t>
+            </a:r>
+            <a:r>
+              <a:rPr lang="es-MX" sz="1100" dirty="0">
+                <a:solidFill>
+                  <a:schemeClr val="tx1"/>
+                </a:solidFill>
+              </a:rPr>
+              <a:t> </a:t>
+            </a:r>
+            <a:r>
+              <a:rPr lang="es-MX" sz="1100" dirty="0" err="1">
+                <a:solidFill>
+                  <a:schemeClr val="tx1"/>
+                </a:solidFill>
+              </a:rPr>
+              <a:t>of</a:t>
+            </a:r>
+            <a:r>
+              <a:rPr lang="es-MX" sz="1100" dirty="0">
+                <a:solidFill>
+                  <a:schemeClr val="tx1"/>
+                </a:solidFill>
+              </a:rPr>
+              <a:t> </a:t>
+            </a:r>
+            <a:r>
+              <a:rPr lang="es-MX" sz="1100" dirty="0" err="1">
+                <a:solidFill>
+                  <a:schemeClr val="tx1"/>
+                </a:solidFill>
+              </a:rPr>
+              <a:t>Prompt</a:t>
+            </a:r>
+            <a:r>
+              <a:rPr lang="es-MX" sz="1100" dirty="0">
+                <a:solidFill>
+                  <a:schemeClr val="tx1"/>
+                </a:solidFill>
+              </a:rPr>
+              <a:t> </a:t>
+            </a:r>
+            <a:r>
+              <a:rPr lang="es-MX" sz="1100" dirty="0" err="1">
+                <a:solidFill>
+                  <a:schemeClr val="tx1"/>
+                </a:solidFill>
+              </a:rPr>
+              <a:t>Injection</a:t>
+            </a:r>
+            <a:r>
+              <a:rPr lang="es-MX" sz="1100" dirty="0">
+                <a:solidFill>
+                  <a:schemeClr val="tx1"/>
+                </a:solidFill>
+              </a:rPr>
+              <a:t> </a:t>
+            </a:r>
+            <a:r>
+              <a:rPr lang="es-MX" sz="1100" dirty="0" err="1">
+                <a:solidFill>
+                  <a:schemeClr val="tx1"/>
+                </a:solidFill>
+              </a:rPr>
+              <a:t>Attacks</a:t>
+            </a:r>
+            <a:r>
+              <a:rPr lang="es-MX" sz="1100" dirty="0">
+                <a:solidFill>
+                  <a:schemeClr val="tx1"/>
+                </a:solidFill>
+              </a:rPr>
+              <a:t> on Large </a:t>
+            </a:r>
+            <a:r>
+              <a:rPr lang="es-MX" sz="1100" dirty="0" err="1">
+                <a:solidFill>
+                  <a:schemeClr val="tx1"/>
+                </a:solidFill>
+              </a:rPr>
+              <a:t>Language</a:t>
+            </a:r>
+            <a:r>
+              <a:rPr lang="es-MX" sz="1100" dirty="0">
+                <a:solidFill>
+                  <a:schemeClr val="tx1"/>
+                </a:solidFill>
+              </a:rPr>
+              <a:t> </a:t>
+            </a:r>
+            <a:r>
+              <a:rPr lang="es-MX" sz="1100" dirty="0" err="1">
+                <a:solidFill>
+                  <a:schemeClr val="tx1"/>
+                </a:solidFill>
+              </a:rPr>
+              <a:t>Models</a:t>
+            </a:r>
+            <a:r>
+              <a:rPr lang="es-MX" sz="1100" dirty="0">
+                <a:solidFill>
+                  <a:schemeClr val="tx1"/>
+                </a:solidFill>
+              </a:rPr>
+              <a:t>: </a:t>
+            </a:r>
+            <a:r>
+              <a:rPr lang="es-MX" sz="1100" dirty="0" err="1">
+                <a:solidFill>
+                  <a:schemeClr val="tx1"/>
+                </a:solidFill>
+              </a:rPr>
+              <a:t>Trends</a:t>
+            </a:r>
+            <a:r>
+              <a:rPr lang="es-MX" sz="1100" dirty="0">
+                <a:solidFill>
+                  <a:schemeClr val="tx1"/>
+                </a:solidFill>
+              </a:rPr>
+              <a:t>, </a:t>
+            </a:r>
+            <a:r>
+              <a:rPr lang="es-MX" sz="1100" dirty="0" err="1">
+                <a:solidFill>
+                  <a:schemeClr val="tx1"/>
+                </a:solidFill>
+              </a:rPr>
+              <a:t>Taxonomy</a:t>
+            </a:r>
+            <a:r>
+              <a:rPr lang="es-MX" sz="1100" dirty="0">
+                <a:solidFill>
+                  <a:schemeClr val="tx1"/>
+                </a:solidFill>
+              </a:rPr>
+              <a:t>, </a:t>
+            </a:r>
+            <a:r>
+              <a:rPr lang="es-MX" sz="1100" dirty="0" err="1">
+                <a:solidFill>
+                  <a:schemeClr val="tx1"/>
+                </a:solidFill>
+              </a:rPr>
+              <a:t>Evaluation</a:t>
+            </a:r>
+            <a:r>
+              <a:rPr lang="es-MX" sz="1100" dirty="0">
+                <a:solidFill>
+                  <a:schemeClr val="tx1"/>
+                </a:solidFill>
+              </a:rPr>
+              <a:t>, Defenses, and </a:t>
+            </a:r>
+            <a:r>
+              <a:rPr lang="es-MX" sz="1100" dirty="0" err="1">
+                <a:solidFill>
+                  <a:schemeClr val="tx1"/>
+                </a:solidFill>
+              </a:rPr>
+              <a:t>Opportunities</a:t>
+            </a:r>
+            <a:r>
+              <a:rPr lang="es-MX" sz="1100" dirty="0">
+                <a:solidFill>
+                  <a:schemeClr val="tx1"/>
+                </a:solidFill>
+              </a:rPr>
+              <a:t>. IEEE Access, 14, 12875–12899. </a:t>
+            </a:r>
+            <a:r>
+              <a:rPr lang="es-MX" sz="1100" dirty="0">
+                <a:solidFill>
+                  <a:schemeClr val="tx1"/>
+                </a:solidFill>
                 <a:hlinkClick r:id="rId3"/>
               </a:rPr>
-              <a:t>https://www.fortinet.com/lat/resources/cyberglossary/what-is-cybersecurity</a:t>
-            </a:r>
-            <a:endParaRPr lang="en-US" sz="1200" u="sng" dirty="0"/>
+              <a:t>https://doi.org/10.1109/ACCESS.2026.3656849</a:t>
+            </a:r>
+            <a:endParaRPr lang="es-MX" sz="1100" dirty="0">
+              <a:solidFill>
+                <a:schemeClr val="tx1"/>
+              </a:solidFill>
+            </a:endParaRPr>
           </a:p>
           <a:p>
             <a:pPr marL="171450" lvl="0" indent="-171450">
@@ -8719,20 +8853,235 @@
               <a:buChar char="•"/>
             </a:pPr>
             <a:r>
-              <a:rPr lang="es-MX" sz="1200" dirty="0">
-                <a:solidFill>
-                  <a:schemeClr val="tx1"/>
-                </a:solidFill>
-              </a:rPr>
-              <a:t>¿Qué son los LLM? | IBM. (2026, August 16). </a:t>
-            </a:r>
-            <a:r>
-              <a:rPr lang="es-MX" sz="1200" dirty="0">
+              <a:rPr lang="es-MX" sz="1100" dirty="0">
+                <a:solidFill>
+                  <a:schemeClr val="tx1"/>
+                </a:solidFill>
+              </a:rPr>
+              <a:t>Geng, T., </a:t>
+            </a:r>
+            <a:r>
+              <a:rPr lang="es-MX" sz="1100" dirty="0" err="1">
+                <a:solidFill>
+                  <a:schemeClr val="tx1"/>
+                </a:solidFill>
+              </a:rPr>
+              <a:t>Xu</a:t>
+            </a:r>
+            <a:r>
+              <a:rPr lang="es-MX" sz="1100" dirty="0">
+                <a:solidFill>
+                  <a:schemeClr val="tx1"/>
+                </a:solidFill>
+              </a:rPr>
+              <a:t>, Z., Qu, Y., &amp; Wong, W. E. (2026). </a:t>
+            </a:r>
+            <a:r>
+              <a:rPr lang="es-MX" sz="1100" dirty="0" err="1">
+                <a:solidFill>
+                  <a:schemeClr val="tx1"/>
+                </a:solidFill>
+              </a:rPr>
+              <a:t>Prompt</a:t>
+            </a:r>
+            <a:r>
+              <a:rPr lang="es-MX" sz="1100" dirty="0">
+                <a:solidFill>
+                  <a:schemeClr val="tx1"/>
+                </a:solidFill>
+              </a:rPr>
+              <a:t> </a:t>
+            </a:r>
+            <a:r>
+              <a:rPr lang="es-MX" sz="1100" dirty="0" err="1">
+                <a:solidFill>
+                  <a:schemeClr val="tx1"/>
+                </a:solidFill>
+              </a:rPr>
+              <a:t>Injection</a:t>
+            </a:r>
+            <a:r>
+              <a:rPr lang="es-MX" sz="1100" dirty="0">
+                <a:solidFill>
+                  <a:schemeClr val="tx1"/>
+                </a:solidFill>
+              </a:rPr>
+              <a:t> </a:t>
+            </a:r>
+            <a:r>
+              <a:rPr lang="es-MX" sz="1100" dirty="0" err="1">
+                <a:solidFill>
+                  <a:schemeClr val="tx1"/>
+                </a:solidFill>
+              </a:rPr>
+              <a:t>Attacks</a:t>
+            </a:r>
+            <a:r>
+              <a:rPr lang="es-MX" sz="1100" dirty="0">
+                <a:solidFill>
+                  <a:schemeClr val="tx1"/>
+                </a:solidFill>
+              </a:rPr>
+              <a:t> on Large </a:t>
+            </a:r>
+            <a:r>
+              <a:rPr lang="es-MX" sz="1100" dirty="0" err="1">
+                <a:solidFill>
+                  <a:schemeClr val="tx1"/>
+                </a:solidFill>
+              </a:rPr>
+              <a:t>Language</a:t>
+            </a:r>
+            <a:r>
+              <a:rPr lang="es-MX" sz="1100" dirty="0">
+                <a:solidFill>
+                  <a:schemeClr val="tx1"/>
+                </a:solidFill>
+              </a:rPr>
+              <a:t> </a:t>
+            </a:r>
+            <a:r>
+              <a:rPr lang="es-MX" sz="1100" dirty="0" err="1">
+                <a:solidFill>
+                  <a:schemeClr val="tx1"/>
+                </a:solidFill>
+              </a:rPr>
+              <a:t>Models</a:t>
+            </a:r>
+            <a:r>
+              <a:rPr lang="es-MX" sz="1100" dirty="0">
+                <a:solidFill>
+                  <a:schemeClr val="tx1"/>
+                </a:solidFill>
+              </a:rPr>
+              <a:t>: A </a:t>
+            </a:r>
+            <a:r>
+              <a:rPr lang="es-MX" sz="1100" dirty="0" err="1">
+                <a:solidFill>
+                  <a:schemeClr val="tx1"/>
+                </a:solidFill>
+              </a:rPr>
+              <a:t>Survey</a:t>
+            </a:r>
+            <a:r>
+              <a:rPr lang="es-MX" sz="1100" dirty="0">
+                <a:solidFill>
+                  <a:schemeClr val="tx1"/>
+                </a:solidFill>
+              </a:rPr>
+              <a:t> </a:t>
+            </a:r>
+            <a:r>
+              <a:rPr lang="es-MX" sz="1100" dirty="0" err="1">
+                <a:solidFill>
+                  <a:schemeClr val="tx1"/>
+                </a:solidFill>
+              </a:rPr>
+              <a:t>of</a:t>
+            </a:r>
+            <a:r>
+              <a:rPr lang="es-MX" sz="1100" dirty="0">
+                <a:solidFill>
+                  <a:schemeClr val="tx1"/>
+                </a:solidFill>
+              </a:rPr>
+              <a:t> </a:t>
+            </a:r>
+            <a:r>
+              <a:rPr lang="es-MX" sz="1100" dirty="0" err="1">
+                <a:solidFill>
+                  <a:schemeClr val="tx1"/>
+                </a:solidFill>
+              </a:rPr>
+              <a:t>Attack</a:t>
+            </a:r>
+            <a:r>
+              <a:rPr lang="es-MX" sz="1100" dirty="0">
+                <a:solidFill>
+                  <a:schemeClr val="tx1"/>
+                </a:solidFill>
+              </a:rPr>
+              <a:t> </a:t>
+            </a:r>
+            <a:r>
+              <a:rPr lang="es-MX" sz="1100" dirty="0" err="1">
+                <a:solidFill>
+                  <a:schemeClr val="tx1"/>
+                </a:solidFill>
+              </a:rPr>
+              <a:t>Methods</a:t>
+            </a:r>
+            <a:r>
+              <a:rPr lang="es-MX" sz="1100" dirty="0">
+                <a:solidFill>
+                  <a:schemeClr val="tx1"/>
+                </a:solidFill>
+              </a:rPr>
+              <a:t>, Root Causes, and Defense </a:t>
+            </a:r>
+            <a:r>
+              <a:rPr lang="es-MX" sz="1100" dirty="0" err="1">
+                <a:solidFill>
+                  <a:schemeClr val="tx1"/>
+                </a:solidFill>
+              </a:rPr>
+              <a:t>Strategies</a:t>
+            </a:r>
+            <a:r>
+              <a:rPr lang="es-MX" sz="1100" dirty="0">
+                <a:solidFill>
+                  <a:schemeClr val="tx1"/>
+                </a:solidFill>
+              </a:rPr>
+              <a:t>. </a:t>
+            </a:r>
+            <a:r>
+              <a:rPr lang="es-MX" sz="1100" dirty="0" err="1">
+                <a:solidFill>
+                  <a:schemeClr val="tx1"/>
+                </a:solidFill>
+              </a:rPr>
+              <a:t>Computers</a:t>
+            </a:r>
+            <a:r>
+              <a:rPr lang="es-MX" sz="1100" dirty="0">
+                <a:solidFill>
+                  <a:schemeClr val="tx1"/>
+                </a:solidFill>
+              </a:rPr>
+              <a:t>, </a:t>
+            </a:r>
+            <a:r>
+              <a:rPr lang="es-MX" sz="1100" dirty="0" err="1">
+                <a:solidFill>
+                  <a:schemeClr val="tx1"/>
+                </a:solidFill>
+              </a:rPr>
+              <a:t>Materials</a:t>
+            </a:r>
+            <a:r>
+              <a:rPr lang="es-MX" sz="1100" dirty="0">
+                <a:solidFill>
+                  <a:schemeClr val="tx1"/>
+                </a:solidFill>
+              </a:rPr>
+              <a:t> and Continua, 87(1). </a:t>
+            </a:r>
+            <a:r>
+              <a:rPr lang="es-MX" sz="1100" dirty="0">
+                <a:solidFill>
+                  <a:schemeClr val="tx1"/>
+                </a:solidFill>
                 <a:hlinkClick r:id="rId4"/>
               </a:rPr>
-              <a:t>https://www.ibm.com/mx-es/think/topics/large-language-models</a:t>
-            </a:r>
-            <a:endParaRPr lang="es-MX" sz="1200" dirty="0"/>
+              <a:t>https://doi.org/10.32604/cmc.2025.074081</a:t>
+            </a:r>
+            <a:endParaRPr lang="es-MX" sz="1100" dirty="0">
+              <a:solidFill>
+                <a:schemeClr val="tx1"/>
+              </a:solidFill>
+            </a:endParaRPr>
           </a:p>
           <a:p>
             <a:pPr marL="171450" lvl="0" indent="-171450">
@@ -8743,20 +9092,123 @@
               <a:buChar char="•"/>
             </a:pPr>
             <a:r>
-              <a:rPr lang="en-US" sz="1200" dirty="0">
-                <a:solidFill>
-                  <a:schemeClr val="tx1"/>
-                </a:solidFill>
-              </a:rPr>
-              <a:t>Vassilev, A. (2025). Adversarial Machine Learning: </a:t>
-            </a:r>
-            <a:r>
-              <a:rPr lang="en-US" sz="1200" dirty="0">
+              <a:rPr lang="es-MX" sz="1100" dirty="0">
+                <a:solidFill>
+                  <a:schemeClr val="tx1"/>
+                </a:solidFill>
+              </a:rPr>
+              <a:t>Kitchenham, B. (2007). </a:t>
+            </a:r>
+            <a:r>
+              <a:rPr lang="es-MX" sz="1100" dirty="0" err="1">
+                <a:solidFill>
+                  <a:schemeClr val="tx1"/>
+                </a:solidFill>
+              </a:rPr>
+              <a:t>Guidelines</a:t>
+            </a:r>
+            <a:r>
+              <a:rPr lang="es-MX" sz="1100" dirty="0">
+                <a:solidFill>
+                  <a:schemeClr val="tx1"/>
+                </a:solidFill>
+              </a:rPr>
+              <a:t> for </a:t>
+            </a:r>
+            <a:r>
+              <a:rPr lang="es-MX" sz="1100" dirty="0" err="1">
+                <a:solidFill>
+                  <a:schemeClr val="tx1"/>
+                </a:solidFill>
+              </a:rPr>
+              <a:t>performing</a:t>
+            </a:r>
+            <a:r>
+              <a:rPr lang="es-MX" sz="1100" dirty="0">
+                <a:solidFill>
+                  <a:schemeClr val="tx1"/>
+                </a:solidFill>
+              </a:rPr>
+              <a:t> </a:t>
+            </a:r>
+            <a:r>
+              <a:rPr lang="es-MX" sz="1100" dirty="0" err="1">
+                <a:solidFill>
+                  <a:schemeClr val="tx1"/>
+                </a:solidFill>
+              </a:rPr>
+              <a:t>Systematic</a:t>
+            </a:r>
+            <a:r>
+              <a:rPr lang="es-MX" sz="1100" dirty="0">
+                <a:solidFill>
+                  <a:schemeClr val="tx1"/>
+                </a:solidFill>
+              </a:rPr>
+              <a:t> </a:t>
+            </a:r>
+            <a:r>
+              <a:rPr lang="es-MX" sz="1100" dirty="0" err="1">
+                <a:solidFill>
+                  <a:schemeClr val="tx1"/>
+                </a:solidFill>
+              </a:rPr>
+              <a:t>Literature</a:t>
+            </a:r>
+            <a:r>
+              <a:rPr lang="es-MX" sz="1100" dirty="0">
+                <a:solidFill>
+                  <a:schemeClr val="tx1"/>
+                </a:solidFill>
+              </a:rPr>
+              <a:t> </a:t>
+            </a:r>
+            <a:r>
+              <a:rPr lang="es-MX" sz="1100" dirty="0" err="1">
+                <a:solidFill>
+                  <a:schemeClr val="tx1"/>
+                </a:solidFill>
+              </a:rPr>
+              <a:t>Reviews</a:t>
+            </a:r>
+            <a:r>
+              <a:rPr lang="es-MX" sz="1100" dirty="0">
+                <a:solidFill>
+                  <a:schemeClr val="tx1"/>
+                </a:solidFill>
+              </a:rPr>
+              <a:t> in Software </a:t>
+            </a:r>
+            <a:r>
+              <a:rPr lang="es-MX" sz="1100" dirty="0" err="1">
+                <a:solidFill>
+                  <a:schemeClr val="tx1"/>
+                </a:solidFill>
+              </a:rPr>
+              <a:t>Engineering</a:t>
+            </a:r>
+            <a:r>
+              <a:rPr lang="es-MX" sz="1100" dirty="0">
+                <a:solidFill>
+                  <a:schemeClr val="tx1"/>
+                </a:solidFill>
+              </a:rPr>
+              <a:t>. </a:t>
+            </a:r>
+            <a:r>
+              <a:rPr lang="es-MX" sz="1100" dirty="0">
+                <a:solidFill>
+                  <a:schemeClr val="tx1"/>
+                </a:solidFill>
                 <a:hlinkClick r:id="rId5"/>
               </a:rPr>
-              <a:t>https://doi.org/10.6028/NIST.AI.100-2e2025</a:t>
-            </a:r>
-            <a:endParaRPr lang="en-US" sz="1200" dirty="0"/>
+              <a:t>https://www.researchgate.net/publication/302924724</a:t>
+            </a:r>
+            <a:endParaRPr lang="es-MX" sz="1100" dirty="0">
+              <a:solidFill>
+                <a:schemeClr val="tx1"/>
+              </a:solidFill>
+            </a:endParaRPr>
           </a:p>
           <a:p>
             <a:pPr marL="171450" lvl="0" indent="-171450">
@@ -8767,20 +9219,171 @@
               <a:buChar char="•"/>
             </a:pPr>
             <a:r>
-              <a:rPr lang="en-US" sz="1200" dirty="0">
-                <a:solidFill>
-                  <a:schemeClr val="tx1"/>
-                </a:solidFill>
-              </a:rPr>
-              <a:t>What is a prompt injection attack? [Examples &amp; Prevention]. (n.d.). Palo Alto Networks. </a:t>
-            </a:r>
-            <a:r>
-              <a:rPr lang="en-US" sz="1200" dirty="0">
+              <a:rPr lang="es-MX" sz="1100" dirty="0">
+                <a:solidFill>
+                  <a:schemeClr val="tx1"/>
+                </a:solidFill>
+              </a:rPr>
+              <a:t>Kumar, S. S., Cummings, M. L., &amp; Stimpson, A. (2024). </a:t>
+            </a:r>
+            <a:r>
+              <a:rPr lang="es-MX" sz="1100" dirty="0" err="1">
+                <a:solidFill>
+                  <a:schemeClr val="tx1"/>
+                </a:solidFill>
+              </a:rPr>
+              <a:t>Strengthening</a:t>
+            </a:r>
+            <a:r>
+              <a:rPr lang="es-MX" sz="1100" dirty="0">
+                <a:solidFill>
+                  <a:schemeClr val="tx1"/>
+                </a:solidFill>
+              </a:rPr>
+              <a:t> LLM Trust </a:t>
+            </a:r>
+            <a:r>
+              <a:rPr lang="es-MX" sz="1100" dirty="0" err="1">
+                <a:solidFill>
+                  <a:schemeClr val="tx1"/>
+                </a:solidFill>
+              </a:rPr>
+              <a:t>Boundaries</a:t>
+            </a:r>
+            <a:r>
+              <a:rPr lang="es-MX" sz="1100" dirty="0">
+                <a:solidFill>
+                  <a:schemeClr val="tx1"/>
+                </a:solidFill>
+              </a:rPr>
+              <a:t>: A </a:t>
+            </a:r>
+            <a:r>
+              <a:rPr lang="es-MX" sz="1100" dirty="0" err="1">
+                <a:solidFill>
+                  <a:schemeClr val="tx1"/>
+                </a:solidFill>
+              </a:rPr>
+              <a:t>Survey</a:t>
+            </a:r>
+            <a:r>
+              <a:rPr lang="es-MX" sz="1100" dirty="0">
+                <a:solidFill>
+                  <a:schemeClr val="tx1"/>
+                </a:solidFill>
+              </a:rPr>
+              <a:t> </a:t>
+            </a:r>
+            <a:r>
+              <a:rPr lang="es-MX" sz="1100" dirty="0" err="1">
+                <a:solidFill>
+                  <a:schemeClr val="tx1"/>
+                </a:solidFill>
+              </a:rPr>
+              <a:t>of</a:t>
+            </a:r>
+            <a:r>
+              <a:rPr lang="es-MX" sz="1100" dirty="0">
+                <a:solidFill>
+                  <a:schemeClr val="tx1"/>
+                </a:solidFill>
+              </a:rPr>
+              <a:t> </a:t>
+            </a:r>
+            <a:r>
+              <a:rPr lang="es-MX" sz="1100" dirty="0" err="1">
+                <a:solidFill>
+                  <a:schemeClr val="tx1"/>
+                </a:solidFill>
+              </a:rPr>
+              <a:t>Prompt</a:t>
+            </a:r>
+            <a:r>
+              <a:rPr lang="es-MX" sz="1100" dirty="0">
+                <a:solidFill>
+                  <a:schemeClr val="tx1"/>
+                </a:solidFill>
+              </a:rPr>
+              <a:t> </a:t>
+            </a:r>
+            <a:r>
+              <a:rPr lang="es-MX" sz="1100" dirty="0" err="1">
+                <a:solidFill>
+                  <a:schemeClr val="tx1"/>
+                </a:solidFill>
+              </a:rPr>
+              <a:t>Injection</a:t>
+            </a:r>
+            <a:r>
+              <a:rPr lang="es-MX" sz="1100" dirty="0">
+                <a:solidFill>
+                  <a:schemeClr val="tx1"/>
+                </a:solidFill>
+              </a:rPr>
+              <a:t> </a:t>
+            </a:r>
+            <a:r>
+              <a:rPr lang="es-MX" sz="1100" dirty="0" err="1">
+                <a:solidFill>
+                  <a:schemeClr val="tx1"/>
+                </a:solidFill>
+              </a:rPr>
+              <a:t>Attacks</a:t>
+            </a:r>
+            <a:r>
+              <a:rPr lang="es-MX" sz="1100" dirty="0">
+                <a:solidFill>
+                  <a:schemeClr val="tx1"/>
+                </a:solidFill>
+              </a:rPr>
+              <a:t>. 2024 IEEE 4th International </a:t>
+            </a:r>
+            <a:r>
+              <a:rPr lang="es-MX" sz="1100" dirty="0" err="1">
+                <a:solidFill>
+                  <a:schemeClr val="tx1"/>
+                </a:solidFill>
+              </a:rPr>
+              <a:t>Conference</a:t>
+            </a:r>
+            <a:r>
+              <a:rPr lang="es-MX" sz="1100" dirty="0">
+                <a:solidFill>
+                  <a:schemeClr val="tx1"/>
+                </a:solidFill>
+              </a:rPr>
+              <a:t> on Human-Machine </a:t>
+            </a:r>
+            <a:r>
+              <a:rPr lang="es-MX" sz="1100" dirty="0" err="1">
+                <a:solidFill>
+                  <a:schemeClr val="tx1"/>
+                </a:solidFill>
+              </a:rPr>
+              <a:t>Systems</a:t>
+            </a:r>
+            <a:r>
+              <a:rPr lang="es-MX" sz="1100" dirty="0">
+                <a:solidFill>
+                  <a:schemeClr val="tx1"/>
+                </a:solidFill>
+              </a:rPr>
+              <a:t> (ICHMS). </a:t>
+            </a:r>
+            <a:r>
+              <a:rPr lang="es-MX" sz="1100" dirty="0">
+                <a:solidFill>
+                  <a:schemeClr val="tx1"/>
+                </a:solidFill>
                 <a:hlinkClick r:id="rId6"/>
               </a:rPr>
-              <a:t>https://www.paloaltonetworks.com/cyberpedia/what-is-a-prompt-injection-attack</a:t>
-            </a:r>
-            <a:endParaRPr lang="en-US" sz="1200" dirty="0"/>
+              <a:t>https://doi.org/10.1109/ICHMS59971.2024.10555871</a:t>
+            </a:r>
+            <a:endParaRPr lang="es-MX" sz="1100" dirty="0">
+              <a:solidFill>
+                <a:schemeClr val="tx1"/>
+              </a:solidFill>
+            </a:endParaRPr>
           </a:p>
           <a:p>
             <a:pPr marL="171450" lvl="0" indent="-171450">
@@ -8791,47 +9394,27 @@
               <a:buChar char="•"/>
             </a:pPr>
             <a:r>
-              <a:rPr lang="en-US" sz="1200" dirty="0" err="1">
-                <a:solidFill>
-                  <a:schemeClr val="tx1"/>
-                </a:solidFill>
-              </a:rPr>
-              <a:t>Damacena</a:t>
-            </a:r>
-            <a:r>
-              <a:rPr lang="en-US" sz="1200" dirty="0">
-                <a:solidFill>
-                  <a:schemeClr val="tx1"/>
-                </a:solidFill>
-              </a:rPr>
-              <a:t> Duarte, J., Cândido, G. D., de Britto Filho, J. R. A., Souza Neto, J., da Costa, E. J., da Costa, J. P. J., &amp; </a:t>
-            </a:r>
-            <a:r>
-              <a:rPr lang="en-US" sz="1200" dirty="0" err="1">
-                <a:solidFill>
-                  <a:schemeClr val="tx1"/>
-                </a:solidFill>
-              </a:rPr>
-              <a:t>Peotta</a:t>
-            </a:r>
-            <a:r>
-              <a:rPr lang="en-US" sz="1200" dirty="0">
-                <a:solidFill>
-                  <a:schemeClr val="tx1"/>
-                </a:solidFill>
-              </a:rPr>
-              <a:t> De Melo, L. (2026). A Systematic Review of Prompt Injection Attacks on Large Language Models: Trends, Taxonomy, Evaluation, Defenses, and Opportunities. In IEEE Access (Vol. 14, pp. 12875–12899). Institute of Electrical and Electronics Engineers Inc. </a:t>
-            </a:r>
-            <a:r>
-              <a:rPr lang="en-US" sz="1200" dirty="0">
+              <a:rPr lang="es-MX" sz="1100" dirty="0">
+                <a:solidFill>
+                  <a:schemeClr val="tx1"/>
+                </a:solidFill>
+              </a:rPr>
+              <a:t>¿Qué es la ciberseguridad? Tipos, amenazas y mejores prácticas | Fortinet. (s.f.). Fortinet. </a:t>
+            </a:r>
+            <a:r>
+              <a:rPr lang="es-MX" sz="1100" dirty="0">
+                <a:solidFill>
+                  <a:schemeClr val="tx1"/>
+                </a:solidFill>
                 <a:hlinkClick r:id="rId7"/>
               </a:rPr>
-              <a:t>https://doi.org/10.1109/ACCESS.2026.3656849</a:t>
-            </a:r>
-            <a:r>
-              <a:rPr lang="en-US" sz="1200" dirty="0"/>
-              <a:t> </a:t>
-            </a:r>
+              <a:t>https://www.fortinet.com/lat/resources/cyberglossary/what-is-cybersecurity</a:t>
+            </a:r>
+            <a:endParaRPr lang="es-MX" sz="1100" dirty="0">
+              <a:solidFill>
+                <a:schemeClr val="tx1"/>
+              </a:solidFill>
+            </a:endParaRPr>
           </a:p>
           <a:p>
             <a:pPr marL="171450" lvl="0" indent="-171450">
@@ -8842,23 +9425,27 @@
               <a:buChar char="•"/>
             </a:pPr>
             <a:r>
-              <a:rPr lang="en-US" sz="1200" dirty="0">
-                <a:solidFill>
-                  <a:schemeClr val="tx1"/>
-                </a:solidFill>
-              </a:rPr>
-              <a:t>Geng, T., Xu, Z., Qu, Y., &amp; Wong, W. E. (2026). Prompt Injection Attacks on Large Language Models: A Survey of Attack Methods, Root Causes, and Defense Strategies. In Computers, Materials and Continua (Vol. 87, Issue 1). Tech Science Press. </a:t>
-            </a:r>
-            <a:r>
-              <a:rPr lang="en-US" sz="1200" dirty="0">
+              <a:rPr lang="es-MX" sz="1100" dirty="0">
+                <a:solidFill>
+                  <a:schemeClr val="tx1"/>
+                </a:solidFill>
+              </a:rPr>
+              <a:t>¿Qué son los LLM? | IBM. (s.f.). Recuperado el 20 de septiembre de 2026, de </a:t>
+            </a:r>
+            <a:r>
+              <a:rPr lang="es-MX" sz="1100" dirty="0">
+                <a:solidFill>
+                  <a:schemeClr val="tx1"/>
+                </a:solidFill>
                 <a:hlinkClick r:id="rId8"/>
               </a:rPr>
-              <a:t>https://doi.org/10.32604/cmc.2025.074081</a:t>
-            </a:r>
-            <a:r>
-              <a:rPr lang="en-US" sz="1200" dirty="0"/>
-              <a:t> </a:t>
-            </a:r>
+              <a:t>https://www.ibm.com/mx-es/think/topics/large-language-models</a:t>
+            </a:r>
+            <a:endParaRPr lang="es-MX" sz="1100" dirty="0">
+              <a:solidFill>
+                <a:schemeClr val="tx1"/>
+              </a:solidFill>
+            </a:endParaRPr>
           </a:p>
           <a:p>
             <a:pPr marL="171450" lvl="0" indent="-171450">
@@ -8869,103 +9456,23 @@
               <a:buChar char="•"/>
             </a:pPr>
             <a:r>
-              <a:rPr lang="es-MX" sz="1200" dirty="0">
-                <a:solidFill>
-                  <a:schemeClr val="tx1"/>
-                </a:solidFill>
-              </a:rPr>
-              <a:t>Wang, P., Li, X., Xiang, C., Zhang, J., Li, Y., Zhang, L., Wang, X., &amp; Tian, Y. (2026). The Landscape </a:t>
-            </a:r>
-            <a:r>
-              <a:rPr lang="es-MX" sz="1200" dirty="0" err="1">
-                <a:solidFill>
-                  <a:schemeClr val="tx1"/>
-                </a:solidFill>
-              </a:rPr>
-              <a:t>of</a:t>
-            </a:r>
-            <a:r>
-              <a:rPr lang="es-MX" sz="1200" dirty="0">
-                <a:solidFill>
-                  <a:schemeClr val="tx1"/>
-                </a:solidFill>
-              </a:rPr>
-              <a:t> </a:t>
-            </a:r>
-            <a:r>
-              <a:rPr lang="es-MX" sz="1200" dirty="0" err="1">
-                <a:solidFill>
-                  <a:schemeClr val="tx1"/>
-                </a:solidFill>
-              </a:rPr>
-              <a:t>Prompt</a:t>
-            </a:r>
-            <a:r>
-              <a:rPr lang="es-MX" sz="1200" dirty="0">
-                <a:solidFill>
-                  <a:schemeClr val="tx1"/>
-                </a:solidFill>
-              </a:rPr>
-              <a:t> </a:t>
-            </a:r>
-            <a:r>
-              <a:rPr lang="es-MX" sz="1200" dirty="0" err="1">
-                <a:solidFill>
-                  <a:schemeClr val="tx1"/>
-                </a:solidFill>
-              </a:rPr>
-              <a:t>Injection</a:t>
-            </a:r>
-            <a:r>
-              <a:rPr lang="es-MX" sz="1200" dirty="0">
-                <a:solidFill>
-                  <a:schemeClr val="tx1"/>
-                </a:solidFill>
-              </a:rPr>
-              <a:t> Threats in LLM </a:t>
-            </a:r>
-            <a:r>
-              <a:rPr lang="es-MX" sz="1200" dirty="0" err="1">
-                <a:solidFill>
-                  <a:schemeClr val="tx1"/>
-                </a:solidFill>
-              </a:rPr>
-              <a:t>Agents</a:t>
-            </a:r>
-            <a:r>
-              <a:rPr lang="es-MX" sz="1200" dirty="0">
-                <a:solidFill>
-                  <a:schemeClr val="tx1"/>
-                </a:solidFill>
-              </a:rPr>
-              <a:t>: From </a:t>
-            </a:r>
-            <a:r>
-              <a:rPr lang="es-MX" sz="1200" dirty="0" err="1">
-                <a:solidFill>
-                  <a:schemeClr val="tx1"/>
-                </a:solidFill>
-              </a:rPr>
-              <a:t>Taxonomy</a:t>
-            </a:r>
-            <a:r>
-              <a:rPr lang="es-MX" sz="1200" dirty="0">
-                <a:solidFill>
-                  <a:schemeClr val="tx1"/>
-                </a:solidFill>
-              </a:rPr>
-              <a:t> to </a:t>
-            </a:r>
-            <a:r>
-              <a:rPr lang="es-MX" sz="1200" dirty="0" err="1">
-                <a:solidFill>
-                  <a:schemeClr val="tx1"/>
-                </a:solidFill>
-              </a:rPr>
-              <a:t>Analysis</a:t>
-            </a:r>
-            <a:r>
-              <a:rPr lang="es-MX" sz="1200" dirty="0">
+              <a:rPr lang="es-MX" sz="1100" dirty="0">
+                <a:solidFill>
+                  <a:schemeClr val="tx1"/>
+                </a:solidFill>
+              </a:rPr>
+              <a:t>Vassilev, A., Oprea, A., Fordyce, A., Anderson, H., Davies, X., &amp; Hamin, M. (2025). Adversarial Machine </a:t>
+            </a:r>
+            <a:r>
+              <a:rPr lang="es-MX" sz="1100" dirty="0" err="1">
+                <a:solidFill>
+                  <a:schemeClr val="tx1"/>
+                </a:solidFill>
+              </a:rPr>
+              <a:t>Learning</a:t>
+            </a:r>
+            <a:r>
+              <a:rPr lang="es-MX" sz="1100" dirty="0">
                 <a:solidFill>
                   <a:schemeClr val="tx1"/>
                 </a:solidFill>
@@ -8973,12 +9480,19 @@
               <a:t>. </a:t>
             </a:r>
             <a:r>
-              <a:rPr lang="es-MX" sz="1200" dirty="0">
+              <a:rPr lang="es-MX" sz="1100" dirty="0">
+                <a:solidFill>
+                  <a:schemeClr val="tx1"/>
+                </a:solidFill>
                 <a:hlinkClick r:id="rId9"/>
               </a:rPr>
-              <a:t>http://arxiv.org/abs/2602.10453</a:t>
-            </a:r>
-            <a:endParaRPr lang="es-MX" sz="1200" dirty="0"/>
+              <a:t>https://doi.org/10.6028/NIST.AI.100-2e2025</a:t>
+            </a:r>
+            <a:endParaRPr lang="es-MX" sz="1100" dirty="0">
+              <a:solidFill>
+                <a:schemeClr val="tx1"/>
+              </a:solidFill>
+            </a:endParaRPr>
           </a:p>
           <a:p>
             <a:pPr marL="171450" lvl="0" indent="-171450">
@@ -8989,20 +9503,107 @@
               <a:buChar char="•"/>
             </a:pPr>
             <a:r>
-              <a:rPr lang="en-US" sz="1200" dirty="0">
-                <a:solidFill>
-                  <a:schemeClr val="tx1"/>
-                </a:solidFill>
-              </a:rPr>
-              <a:t>Kumar, S. S., Cummings, M. L., &amp; Stimpson, A. (2024). Strengthening LLM Trust Boundaries: A Survey of Prompt Injection Attacks Surender Suresh Kumar Dr. M.L. Cummings Dr. Alexander Stimpson. 2024 IEEE 4th International Conference on Human-Machine Systems, ICHMS 2024. </a:t>
-            </a:r>
-            <a:r>
-              <a:rPr lang="en-US" sz="1200" dirty="0">
+              <a:rPr lang="es-MX" sz="1100" dirty="0">
+                <a:solidFill>
+                  <a:schemeClr val="tx1"/>
+                </a:solidFill>
+              </a:rPr>
+              <a:t>What is a </a:t>
+            </a:r>
+            <a:r>
+              <a:rPr lang="es-MX" sz="1100" dirty="0" err="1">
+                <a:solidFill>
+                  <a:schemeClr val="tx1"/>
+                </a:solidFill>
+              </a:rPr>
+              <a:t>prompt</a:t>
+            </a:r>
+            <a:r>
+              <a:rPr lang="es-MX" sz="1100" dirty="0">
+                <a:solidFill>
+                  <a:schemeClr val="tx1"/>
+                </a:solidFill>
+              </a:rPr>
+              <a:t> </a:t>
+            </a:r>
+            <a:r>
+              <a:rPr lang="es-MX" sz="1100" dirty="0" err="1">
+                <a:solidFill>
+                  <a:schemeClr val="tx1"/>
+                </a:solidFill>
+              </a:rPr>
+              <a:t>injection</a:t>
+            </a:r>
+            <a:r>
+              <a:rPr lang="es-MX" sz="1100" dirty="0">
+                <a:solidFill>
+                  <a:schemeClr val="tx1"/>
+                </a:solidFill>
+              </a:rPr>
+              <a:t> </a:t>
+            </a:r>
+            <a:r>
+              <a:rPr lang="es-MX" sz="1100" dirty="0" err="1">
+                <a:solidFill>
+                  <a:schemeClr val="tx1"/>
+                </a:solidFill>
+              </a:rPr>
+              <a:t>attack</a:t>
+            </a:r>
+            <a:r>
+              <a:rPr lang="es-MX" sz="1100" dirty="0">
+                <a:solidFill>
+                  <a:schemeClr val="tx1"/>
+                </a:solidFill>
+              </a:rPr>
+              <a:t>? [</a:t>
+            </a:r>
+            <a:r>
+              <a:rPr lang="es-MX" sz="1100" dirty="0" err="1">
+                <a:solidFill>
+                  <a:schemeClr val="tx1"/>
+                </a:solidFill>
+              </a:rPr>
+              <a:t>Examples</a:t>
+            </a:r>
+            <a:r>
+              <a:rPr lang="es-MX" sz="1100" dirty="0">
+                <a:solidFill>
+                  <a:schemeClr val="tx1"/>
+                </a:solidFill>
+              </a:rPr>
+              <a:t> &amp; </a:t>
+            </a:r>
+            <a:r>
+              <a:rPr lang="es-MX" sz="1100" dirty="0" err="1">
+                <a:solidFill>
+                  <a:schemeClr val="tx1"/>
+                </a:solidFill>
+              </a:rPr>
+              <a:t>Prevention</a:t>
+            </a:r>
+            <a:r>
+              <a:rPr lang="es-MX" sz="1100" dirty="0">
+                <a:solidFill>
+                  <a:schemeClr val="tx1"/>
+                </a:solidFill>
+              </a:rPr>
+              <a:t>]. (s.f.). Palo Alto Networks. </a:t>
+            </a:r>
+            <a:r>
+              <a:rPr lang="es-MX" sz="1100" dirty="0">
+                <a:solidFill>
+                  <a:schemeClr val="tx1"/>
+                </a:solidFill>
                 <a:hlinkClick r:id="rId10"/>
               </a:rPr>
-              <a:t>https://doi.org/10.1109/ICHMS59971.2024.10555871</a:t>
-            </a:r>
-            <a:endParaRPr lang="en-US" sz="1200" dirty="0"/>
+              <a:t>https://www.paloaltonetworks.com/cyberpedia/what-is-a-prompt-injection-attack</a:t>
+            </a:r>
+            <a:endParaRPr lang="es-MX" sz="1100" dirty="0">
+              <a:solidFill>
+                <a:schemeClr val="tx1"/>
+              </a:solidFill>
+            </a:endParaRPr>
           </a:p>
           <a:p>
             <a:pPr marL="171450" lvl="0" indent="-171450">
@@ -9013,40 +9614,183 @@
               <a:buChar char="•"/>
             </a:pPr>
             <a:r>
-              <a:rPr lang="en-US" sz="1200" dirty="0">
-                <a:solidFill>
-                  <a:schemeClr val="tx1"/>
-                </a:solidFill>
-              </a:rPr>
-              <a:t>Kitchenham, B. (2007). Guidelines for performing Systematic Literature Reviews in Software Engineering. </a:t>
-            </a:r>
-            <a:r>
-              <a:rPr lang="en-US" sz="1200" dirty="0">
+              <a:rPr lang="es-MX" sz="1100" dirty="0" err="1">
+                <a:solidFill>
+                  <a:schemeClr val="tx1"/>
+                </a:solidFill>
+              </a:rPr>
+              <a:t>Woesle</a:t>
+            </a:r>
+            <a:r>
+              <a:rPr lang="es-MX" sz="1100" dirty="0">
+                <a:solidFill>
+                  <a:schemeClr val="tx1"/>
+                </a:solidFill>
+              </a:rPr>
+              <a:t>, C., &amp; Buettner, R. (2026). A </a:t>
+            </a:r>
+            <a:r>
+              <a:rPr lang="es-MX" sz="1100" dirty="0" err="1">
+                <a:solidFill>
+                  <a:schemeClr val="tx1"/>
+                </a:solidFill>
+              </a:rPr>
+              <a:t>Systematic</a:t>
+            </a:r>
+            <a:r>
+              <a:rPr lang="es-MX" sz="1100" dirty="0">
+                <a:solidFill>
+                  <a:schemeClr val="tx1"/>
+                </a:solidFill>
+              </a:rPr>
+              <a:t> </a:t>
+            </a:r>
+            <a:r>
+              <a:rPr lang="es-MX" sz="1100" dirty="0" err="1">
+                <a:solidFill>
+                  <a:schemeClr val="tx1"/>
+                </a:solidFill>
+              </a:rPr>
+              <a:t>Literature</a:t>
+            </a:r>
+            <a:r>
+              <a:rPr lang="es-MX" sz="1100" dirty="0">
+                <a:solidFill>
+                  <a:schemeClr val="tx1"/>
+                </a:solidFill>
+              </a:rPr>
+              <a:t> </a:t>
+            </a:r>
+            <a:r>
+              <a:rPr lang="es-MX" sz="1100" dirty="0" err="1">
+                <a:solidFill>
+                  <a:schemeClr val="tx1"/>
+                </a:solidFill>
+              </a:rPr>
+              <a:t>Review</a:t>
+            </a:r>
+            <a:r>
+              <a:rPr lang="es-MX" sz="1100" dirty="0">
+                <a:solidFill>
+                  <a:schemeClr val="tx1"/>
+                </a:solidFill>
+              </a:rPr>
+              <a:t> </a:t>
+            </a:r>
+            <a:r>
+              <a:rPr lang="es-MX" sz="1100" dirty="0" err="1">
+                <a:solidFill>
+                  <a:schemeClr val="tx1"/>
+                </a:solidFill>
+              </a:rPr>
+              <a:t>of</a:t>
+            </a:r>
+            <a:r>
+              <a:rPr lang="es-MX" sz="1100" dirty="0">
+                <a:solidFill>
+                  <a:schemeClr val="tx1"/>
+                </a:solidFill>
+              </a:rPr>
+              <a:t> </a:t>
+            </a:r>
+            <a:r>
+              <a:rPr lang="es-MX" sz="1100" dirty="0" err="1">
+                <a:solidFill>
+                  <a:schemeClr val="tx1"/>
+                </a:solidFill>
+              </a:rPr>
+              <a:t>Prompt</a:t>
+            </a:r>
+            <a:r>
+              <a:rPr lang="es-MX" sz="1100" dirty="0">
+                <a:solidFill>
+                  <a:schemeClr val="tx1"/>
+                </a:solidFill>
+              </a:rPr>
+              <a:t> </a:t>
+            </a:r>
+            <a:r>
+              <a:rPr lang="es-MX" sz="1100" dirty="0" err="1">
+                <a:solidFill>
+                  <a:schemeClr val="tx1"/>
+                </a:solidFill>
+              </a:rPr>
+              <a:t>Injection</a:t>
+            </a:r>
+            <a:r>
+              <a:rPr lang="es-MX" sz="1100" dirty="0">
+                <a:solidFill>
+                  <a:schemeClr val="tx1"/>
+                </a:solidFill>
+              </a:rPr>
+              <a:t> </a:t>
+            </a:r>
+            <a:r>
+              <a:rPr lang="es-MX" sz="1100" dirty="0" err="1">
+                <a:solidFill>
+                  <a:schemeClr val="tx1"/>
+                </a:solidFill>
+              </a:rPr>
+              <a:t>Attacks</a:t>
+            </a:r>
+            <a:r>
+              <a:rPr lang="es-MX" sz="1100" dirty="0">
+                <a:solidFill>
+                  <a:schemeClr val="tx1"/>
+                </a:solidFill>
+              </a:rPr>
+              <a:t> in LLM-</a:t>
+            </a:r>
+            <a:r>
+              <a:rPr lang="es-MX" sz="1100" dirty="0" err="1">
+                <a:solidFill>
+                  <a:schemeClr val="tx1"/>
+                </a:solidFill>
+              </a:rPr>
+              <a:t>Integrated</a:t>
+            </a:r>
+            <a:r>
+              <a:rPr lang="es-MX" sz="1100" dirty="0">
+                <a:solidFill>
+                  <a:schemeClr val="tx1"/>
+                </a:solidFill>
+              </a:rPr>
+              <a:t> </a:t>
+            </a:r>
+            <a:r>
+              <a:rPr lang="es-MX" sz="1100" dirty="0" err="1">
+                <a:solidFill>
+                  <a:schemeClr val="tx1"/>
+                </a:solidFill>
+              </a:rPr>
+              <a:t>Systems</a:t>
+            </a:r>
+            <a:r>
+              <a:rPr lang="es-MX" sz="1100" dirty="0">
+                <a:solidFill>
+                  <a:schemeClr val="tx1"/>
+                </a:solidFill>
+              </a:rPr>
+              <a:t>. IEEE Access, 14, 86797–86818. </a:t>
+            </a:r>
+            <a:r>
+              <a:rPr lang="es-MX" sz="1100" dirty="0">
+                <a:solidFill>
+                  <a:schemeClr val="tx1"/>
+                </a:solidFill>
                 <a:hlinkClick r:id="rId11"/>
               </a:rPr>
-              <a:t>https://www.researchgate.net/publication/302924724</a:t>
-            </a:r>
-            <a:r>
-              <a:rPr lang="en-US" sz="1200" dirty="0"/>
+              <a:t>https://doi.org/10.1109/ACCESS.2026.3700492</a:t>
+            </a:r>
+            <a:r>
+              <a:rPr lang="es-MX" sz="1100" dirty="0">
+                <a:solidFill>
+                  <a:schemeClr val="tx1"/>
+                </a:solidFill>
+              </a:rPr>
               <a:t> </a:t>
             </a:r>
-          </a:p>
-          <a:p>
-            <a:pPr marL="171450" lvl="0" indent="-171450">
-              <a:lnSpc>
-                <a:spcPct val="100000"/>
-              </a:lnSpc>
-              <a:buFont typeface="Arial" panose="020B0604020202020204" pitchFamily="34" charset="0"/>
-              <a:buChar char="•"/>
-            </a:pPr>
-            <a:endParaRPr lang="en-US" sz="1200" dirty="0"/>
-          </a:p>
-          <a:p>
-            <a:pPr marL="171450" lvl="0" indent="-171450">
-              <a:buFont typeface="Arial" panose="020B0604020202020204" pitchFamily="34" charset="0"/>
-              <a:buChar char="•"/>
-            </a:pPr>
-            <a:endParaRPr lang="es-MX" sz="1400" dirty="0"/>
+            <a:endParaRPr lang="en-US" sz="1100" dirty="0"/>
           </a:p>
         </p:txBody>
       </p:sp>
@@ -9127,10 +9871,376 @@
           </a:p>
         </p:txBody>
       </p:sp>
+      <p:sp>
+        <p:nvSpPr>
+          <p:cNvPr id="2" name="Marcador de número de diapositiva 1">
+            <a:extLst>
+              <a:ext uri="{FF2B5EF4-FFF2-40B4-BE49-F238E27FC236}">
+                <a16:creationId xmlns:a16="http://schemas.microsoft.com/office/drawing/2014/main" id="{678CAE23-794B-99A3-85A2-4283E1A0A800}"/>
+              </a:ext>
+            </a:extLst>
+          </p:cNvPr>
+          <p:cNvSpPr>
+            <a:spLocks noGrp="1"/>
+          </p:cNvSpPr>
+          <p:nvPr>
+            <p:ph type="sldNum" idx="12"/>
+          </p:nvPr>
+        </p:nvSpPr>
+        <p:spPr>
+          <a:xfrm>
+            <a:off x="8100392" y="4594963"/>
+            <a:ext cx="933084" cy="451406"/>
+          </a:xfrm>
+        </p:spPr>
+        <p:txBody>
+          <a:bodyPr/>
+          <a:lstStyle/>
+          <a:p>
+            <a:pPr marL="0" lvl="0" indent="0" algn="r" rtl="0">
+              <a:spcBef>
+                <a:spcPts val="0"/>
+              </a:spcBef>
+              <a:spcAft>
+                <a:spcPts val="0"/>
+              </a:spcAft>
+              <a:buNone/>
+            </a:pPr>
+            <a:r>
+              <a:rPr lang="es-ES" dirty="0"/>
+              <a:t>15</a:t>
+            </a:r>
+          </a:p>
+        </p:txBody>
+      </p:sp>
     </p:spTree>
     <p:extLst>
       <p:ext uri="{BB962C8B-B14F-4D97-AF65-F5344CB8AC3E}">
         <p14:creationId xmlns:p14="http://schemas.microsoft.com/office/powerpoint/2010/main" val="2775609210"/>
+      </p:ext>
+    </p:extLst>
+  </p:cSld>
+  <p:clrMapOvr>
+    <a:masterClrMapping/>
+  </p:clrMapOvr>
+</p:sld>
+</file>
+
+<file path=ppt/slides/slide17.xml><?xml version="1.0" encoding="utf-8"?>
+<p:sld xmlns:a="http://schemas.openxmlformats.org/drawingml/2006/main" xmlns:r="http://schemas.openxmlformats.org/officeDocument/2006/relationships" xmlns:p="http://schemas.openxmlformats.org/presentationml/2006/main">
+  <p:cSld>
+    <p:spTree>
+      <p:nvGrpSpPr>
+        <p:cNvPr id="1" name="">
+          <a:extLst>
+            <a:ext uri="{FF2B5EF4-FFF2-40B4-BE49-F238E27FC236}">
+              <a16:creationId xmlns:a16="http://schemas.microsoft.com/office/drawing/2014/main" id="{2E8759B4-4D66-C0CE-571E-C4B0E0ABA1E8}"/>
+            </a:ext>
+          </a:extLst>
+        </p:cNvPr>
+        <p:cNvGrpSpPr/>
+        <p:nvPr/>
+      </p:nvGrpSpPr>
+      <p:grpSpPr>
+        <a:xfrm>
+          <a:off x="0" y="0"/>
+          <a:ext cx="0" cy="0"/>
+          <a:chOff x="0" y="0"/>
+          <a:chExt cx="0" cy="0"/>
+        </a:xfrm>
+      </p:grpSpPr>
+      <p:sp>
+        <p:nvSpPr>
+          <p:cNvPr id="2" name="Título 1">
+            <a:extLst>
+              <a:ext uri="{FF2B5EF4-FFF2-40B4-BE49-F238E27FC236}">
+                <a16:creationId xmlns:a16="http://schemas.microsoft.com/office/drawing/2014/main" id="{EEEC7760-8BF5-2EE1-2C07-9D592E6B8144}"/>
+              </a:ext>
+            </a:extLst>
+          </p:cNvPr>
+          <p:cNvSpPr>
+            <a:spLocks noGrp="1"/>
+          </p:cNvSpPr>
+          <p:nvPr>
+            <p:ph type="title"/>
+          </p:nvPr>
+        </p:nvSpPr>
+        <p:spPr/>
+        <p:txBody>
+          <a:bodyPr/>
+          <a:lstStyle/>
+          <a:p>
+            <a:r>
+              <a:rPr lang="es-MX" noProof="0" dirty="0"/>
+              <a:t>Facultad de Estadística e Informática</a:t>
+            </a:r>
+          </a:p>
+        </p:txBody>
+      </p:sp>
+      <p:sp>
+        <p:nvSpPr>
+          <p:cNvPr id="4" name="Marcador de texto 3">
+            <a:extLst>
+              <a:ext uri="{FF2B5EF4-FFF2-40B4-BE49-F238E27FC236}">
+                <a16:creationId xmlns:a16="http://schemas.microsoft.com/office/drawing/2014/main" id="{252AC7C0-F4D0-984F-612E-AA87CC1E436C}"/>
+              </a:ext>
+            </a:extLst>
+          </p:cNvPr>
+          <p:cNvSpPr>
+            <a:spLocks noGrp="1"/>
+          </p:cNvSpPr>
+          <p:nvPr>
+            <p:ph type="body" sz="half" idx="2"/>
+          </p:nvPr>
+        </p:nvSpPr>
+        <p:spPr/>
+        <p:txBody>
+          <a:bodyPr/>
+          <a:lstStyle/>
+          <a:p>
+            <a:r>
+              <a:rPr lang="es-MX" noProof="0" dirty="0"/>
+              <a:t>Región: Xalapa</a:t>
+            </a:r>
+          </a:p>
+        </p:txBody>
+      </p:sp>
+      <p:sp>
+        <p:nvSpPr>
+          <p:cNvPr id="5" name="CuadroTexto 4">
+            <a:extLst>
+              <a:ext uri="{FF2B5EF4-FFF2-40B4-BE49-F238E27FC236}">
+                <a16:creationId xmlns:a16="http://schemas.microsoft.com/office/drawing/2014/main" id="{564858B1-8C1D-0E9E-DC5C-AE93ADC0B898}"/>
+              </a:ext>
+            </a:extLst>
+          </p:cNvPr>
+          <p:cNvSpPr txBox="1"/>
+          <p:nvPr/>
+        </p:nvSpPr>
+        <p:spPr>
+          <a:xfrm>
+            <a:off x="2699792" y="2198292"/>
+            <a:ext cx="5307626" cy="2775696"/>
+          </a:xfrm>
+          <a:prstGeom prst="rect">
+            <a:avLst/>
+          </a:prstGeom>
+          <a:noFill/>
+        </p:spPr>
+        <p:txBody>
+          <a:bodyPr wrap="square" rtlCol="0">
+            <a:spAutoFit/>
+          </a:bodyPr>
+          <a:lstStyle/>
+          <a:p>
+            <a:pPr algn="r">
+              <a:lnSpc>
+                <a:spcPts val="1100"/>
+              </a:lnSpc>
+            </a:pPr>
+            <a:r>
+              <a:rPr lang="es-MX" sz="900" noProof="0" dirty="0">
+                <a:latin typeface="Gill Sans MT" panose="020B0502020104020203" pitchFamily="34" charset="0"/>
+              </a:rPr>
+              <a:t>Licenciatura en Ingeniería en Ciberseguridad e Infraestructura de Computo</a:t>
+            </a:r>
+          </a:p>
+          <a:p>
+            <a:pPr algn="r">
+              <a:lnSpc>
+                <a:spcPts val="1100"/>
+              </a:lnSpc>
+            </a:pPr>
+            <a:endParaRPr lang="es-MX" sz="794" noProof="0" dirty="0">
+              <a:latin typeface="Gill Sans MT" panose="020B0502020104020203" pitchFamily="34" charset="0"/>
+            </a:endParaRPr>
+          </a:p>
+          <a:p>
+            <a:pPr algn="r">
+              <a:lnSpc>
+                <a:spcPts val="1400"/>
+              </a:lnSpc>
+            </a:pPr>
+            <a:r>
+              <a:rPr lang="es-MX" sz="1200" noProof="0" dirty="0">
+                <a:latin typeface="Gill Sans MT" panose="020B0502020104020203" pitchFamily="34" charset="0"/>
+              </a:rPr>
+              <a:t>Estado del arte de las medidas de seguridad a nivel de aplicación en el contexto de ataques de inyección de </a:t>
+            </a:r>
+            <a:r>
+              <a:rPr lang="es-MX" sz="1200" i="1" noProof="0" dirty="0" err="1">
+                <a:latin typeface="Gill Sans MT" panose="020B0502020104020203" pitchFamily="34" charset="0"/>
+              </a:rPr>
+              <a:t>prompt</a:t>
+            </a:r>
+            <a:r>
+              <a:rPr lang="es-MX" sz="1200" noProof="0" dirty="0">
+                <a:latin typeface="Gill Sans MT" panose="020B0502020104020203" pitchFamily="34" charset="0"/>
+              </a:rPr>
+              <a:t> dirigidos a sistemas basados en LLM</a:t>
+            </a:r>
+            <a:endParaRPr lang="es-MX" sz="926" noProof="0" dirty="0">
+              <a:latin typeface="Gill Sans MT" panose="020B0502020104020203" pitchFamily="34" charset="0"/>
+            </a:endParaRPr>
+          </a:p>
+          <a:p>
+            <a:pPr algn="r">
+              <a:lnSpc>
+                <a:spcPts val="1100"/>
+              </a:lnSpc>
+            </a:pPr>
+            <a:endParaRPr lang="es-MX" sz="900" noProof="0" dirty="0">
+              <a:latin typeface="Gill Sans MT" panose="020B0502020104020203" pitchFamily="34" charset="0"/>
+            </a:endParaRPr>
+          </a:p>
+          <a:p>
+            <a:pPr algn="r">
+              <a:lnSpc>
+                <a:spcPts val="1100"/>
+              </a:lnSpc>
+            </a:pPr>
+            <a:r>
+              <a:rPr lang="es-MX" sz="900" noProof="0" dirty="0">
+                <a:latin typeface="Gill Sans MT" panose="020B0502020104020203" pitchFamily="34" charset="0"/>
+              </a:rPr>
+              <a:t>Presentación de avances para la EE Proyecto Guiado</a:t>
+            </a:r>
+          </a:p>
+          <a:p>
+            <a:pPr algn="r">
+              <a:lnSpc>
+                <a:spcPts val="1100"/>
+              </a:lnSpc>
+            </a:pPr>
+            <a:endParaRPr lang="es-MX" sz="900" noProof="0" dirty="0">
+              <a:latin typeface="Gill Sans MT" panose="020B0502020104020203" pitchFamily="34" charset="0"/>
+            </a:endParaRPr>
+          </a:p>
+          <a:p>
+            <a:pPr algn="r">
+              <a:lnSpc>
+                <a:spcPts val="1100"/>
+              </a:lnSpc>
+            </a:pPr>
+            <a:r>
+              <a:rPr lang="es-MX" sz="900" noProof="0" dirty="0">
+                <a:latin typeface="Gill Sans MT" panose="020B0502020104020203" pitchFamily="34" charset="0"/>
+              </a:rPr>
+              <a:t>Presenta:</a:t>
+            </a:r>
+          </a:p>
+          <a:p>
+            <a:pPr marL="900430" algn="r">
+              <a:lnSpc>
+                <a:spcPct val="90909"/>
+              </a:lnSpc>
+              <a:spcAft>
+                <a:spcPts val="1000"/>
+              </a:spcAft>
+              <a:buNone/>
+            </a:pPr>
+            <a:r>
+              <a:rPr lang="es-MX" sz="900" b="1" noProof="0" dirty="0">
+                <a:effectLst/>
+                <a:latin typeface="Gill Sans MT" panose="020B0502020104020203" pitchFamily="34" charset="0"/>
+                <a:ea typeface="Times New Roman" panose="02020603050405020304" pitchFamily="18" charset="0"/>
+                <a:cs typeface="Times New Roman" panose="02020603050405020304" pitchFamily="18" charset="0"/>
+              </a:rPr>
+              <a:t>Abraham Núñez Sánchez</a:t>
+            </a:r>
+          </a:p>
+          <a:p>
+            <a:pPr algn="r">
+              <a:lnSpc>
+                <a:spcPts val="1100"/>
+              </a:lnSpc>
+            </a:pPr>
+            <a:r>
+              <a:rPr lang="es-MX" sz="900" noProof="0" dirty="0">
+                <a:latin typeface="Gill Sans MT" panose="020B0502020104020203" pitchFamily="34" charset="0"/>
+              </a:rPr>
+              <a:t>Director:</a:t>
+            </a:r>
+          </a:p>
+          <a:p>
+            <a:pPr marL="900430" algn="r">
+              <a:lnSpc>
+                <a:spcPct val="90909"/>
+              </a:lnSpc>
+              <a:spcAft>
+                <a:spcPts val="1000"/>
+              </a:spcAft>
+              <a:buNone/>
+            </a:pPr>
+            <a:r>
+              <a:rPr lang="es-MX" sz="900" b="1" noProof="0" dirty="0">
+                <a:latin typeface="Gill Sans MT" panose="020B0502020104020203" pitchFamily="34" charset="0"/>
+                <a:ea typeface="Times New Roman" panose="02020603050405020304" pitchFamily="18" charset="0"/>
+                <a:cs typeface="Times New Roman" panose="02020603050405020304" pitchFamily="18" charset="0"/>
+              </a:rPr>
+              <a:t>Héctor Xavier Limón Riaño</a:t>
+            </a:r>
+          </a:p>
+          <a:p>
+            <a:pPr algn="r">
+              <a:lnSpc>
+                <a:spcPts val="1100"/>
+              </a:lnSpc>
+            </a:pPr>
+            <a:r>
+              <a:rPr lang="es-MX" sz="900" noProof="0" dirty="0">
+                <a:latin typeface="Gill Sans MT" panose="020B0502020104020203" pitchFamily="34" charset="0"/>
+              </a:rPr>
+              <a:t>Septiembre 2026</a:t>
+            </a:r>
+          </a:p>
+          <a:p>
+            <a:pPr algn="r">
+              <a:lnSpc>
+                <a:spcPts val="1100"/>
+              </a:lnSpc>
+            </a:pPr>
+            <a:endParaRPr lang="es-MX" sz="900" noProof="0" dirty="0">
+              <a:latin typeface="Gill Sans MT" panose="020B0502020104020203" pitchFamily="34" charset="0"/>
+            </a:endParaRPr>
+          </a:p>
+          <a:p>
+            <a:pPr algn="r">
+              <a:lnSpc>
+                <a:spcPts val="1100"/>
+              </a:lnSpc>
+            </a:pPr>
+            <a:r>
+              <a:rPr lang="es-MX" sz="900" noProof="0" dirty="0">
+                <a:latin typeface="Gill Sans MT" panose="020B0502020104020203" pitchFamily="34" charset="0"/>
+              </a:rPr>
+              <a:t>“Lis de Veracruz: Arte, Ciencia, Luz</a:t>
+            </a:r>
+            <a:r>
+              <a:rPr lang="es-MX" sz="794" noProof="0" dirty="0">
+                <a:latin typeface="Gill Sans MT" panose="020B0502020104020203" pitchFamily="34" charset="0"/>
+              </a:rPr>
+              <a:t>”</a:t>
+            </a:r>
+          </a:p>
+          <a:p>
+            <a:pPr algn="r"/>
+            <a:endParaRPr lang="es-MX" sz="794" b="1" noProof="0" dirty="0">
+              <a:latin typeface="Gill Sans MT" panose="020B0502020104020203" pitchFamily="34" charset="0"/>
+            </a:endParaRPr>
+          </a:p>
+          <a:p>
+            <a:pPr algn="r"/>
+            <a:endParaRPr lang="es-MX" sz="1838" noProof="0" dirty="0">
+              <a:latin typeface="Gill Sans MT" panose="020B0502020104020203" pitchFamily="34" charset="0"/>
+            </a:endParaRPr>
+          </a:p>
+        </p:txBody>
+      </p:sp>
+    </p:spTree>
+    <p:extLst>
+      <p:ext uri="{BB962C8B-B14F-4D97-AF65-F5344CB8AC3E}">
+        <p14:creationId xmlns:p14="http://schemas.microsoft.com/office/powerpoint/2010/main" val="2946905072"/>
       </p:ext>
     </p:extLst>
   </p:cSld>
@@ -9192,21 +10302,19 @@
         <p:spPr>
           <a:xfrm>
             <a:off x="457202" y="1232800"/>
-            <a:ext cx="5266926" cy="3283165"/>
+            <a:ext cx="5266926" cy="2419070"/>
           </a:xfrm>
         </p:spPr>
         <p:txBody>
           <a:bodyPr>
-            <a:normAutofit fontScale="92500" lnSpcReduction="10000"/>
+            <a:normAutofit/>
           </a:bodyPr>
           <a:lstStyle/>
           <a:p>
-            <a:pPr marL="285750" lvl="0" indent="-285750">
+            <a:pPr lvl="0">
               <a:lnSpc>
                 <a:spcPct val="150000"/>
               </a:lnSpc>
-              <a:buFontTx/>
-              <a:buChar char="-"/>
             </a:pPr>
             <a:r>
               <a:rPr lang="es-MX" sz="1400" dirty="0">
@@ -9214,38 +10322,7 @@
                   <a:schemeClr val="tx1"/>
                 </a:solidFill>
               </a:rPr>
-              <a:t>De acuerdo con Fortinet (2026), la ciberseguridad ya no es solo una función de TI, sino una prioridad principal del negocio. </a:t>
-            </a:r>
-          </a:p>
-          <a:p>
-            <a:pPr marL="285750" lvl="0" indent="-285750">
-              <a:lnSpc>
-                <a:spcPct val="150000"/>
-              </a:lnSpc>
-              <a:buFontTx/>
-              <a:buChar char="-"/>
-            </a:pPr>
-            <a:endParaRPr lang="es-MX" sz="1400" dirty="0">
-              <a:solidFill>
-                <a:schemeClr val="tx1"/>
-              </a:solidFill>
-            </a:endParaRPr>
-          </a:p>
-          <a:p>
-            <a:pPr marL="285750" lvl="0" indent="-285750">
-              <a:lnSpc>
-                <a:spcPct val="150000"/>
-              </a:lnSpc>
-              <a:buFontTx/>
-              <a:buChar char="-"/>
-            </a:pPr>
-            <a:r>
-              <a:rPr lang="es-MX" sz="1400" dirty="0">
-                <a:solidFill>
-                  <a:schemeClr val="tx1"/>
-                </a:solidFill>
-              </a:rPr>
-              <a:t>En los últimos años, una de las tendencias en el área de la tecnología es la inteligencia artificial generativa en aplicaciones de uso cotidiano y profesional.</a:t>
+              <a:t>- De acuerdo con Fortinet (s.f.), la ciberseguridad ya no es solo una función de TI, sino una prioridad principal del negocio. </a:t>
             </a:r>
           </a:p>
           <a:p>
@@ -9261,12 +10338,10 @@
             </a:endParaRPr>
           </a:p>
           <a:p>
-            <a:pPr marL="285750" lvl="0" indent="-285750">
+            <a:pPr lvl="0">
               <a:lnSpc>
                 <a:spcPct val="150000"/>
               </a:lnSpc>
-              <a:buFontTx/>
-              <a:buChar char="-"/>
             </a:pPr>
             <a:r>
               <a:rPr lang="es-MX" sz="1400" dirty="0">
@@ -9274,7 +10349,7 @@
                   <a:schemeClr val="tx1"/>
                 </a:solidFill>
               </a:rPr>
-              <a:t>Los modelos de lenguaje grandes (LLM) son modelos de aprendizaje entrenados con grandes cantidades de datos, lo que les permite comprender y generar lenguaje natural para realizar diversas tareas, según IBM.</a:t>
+              <a:t>- En los últimos años, una de las tendencias en el área de la tecnología es la inteligencia artificial generativa en aplicaciones de uso cotidiano y profesional. IBM (s.f.) señala que los LLM muestran una amplia versatilidad en distintos sectores industriales.</a:t>
             </a:r>
           </a:p>
         </p:txBody>
@@ -9301,7 +10376,7 @@
         </p:blipFill>
         <p:spPr>
           <a:xfrm>
-            <a:off x="5940152" y="1491630"/>
+            <a:off x="5940152" y="1347614"/>
             <a:ext cx="2601144" cy="1840352"/>
           </a:xfrm>
           <a:prstGeom prst="rect">
@@ -9382,6 +10457,179 @@
             <a:r>
               <a:rPr lang="es-MX" sz="800" dirty="0"/>
               <a:t> dirigidos a sistemas basados en LLM​</a:t>
+            </a:r>
+          </a:p>
+        </p:txBody>
+      </p:sp>
+      <p:sp>
+        <p:nvSpPr>
+          <p:cNvPr id="5" name="CuadroTexto 4">
+            <a:extLst>
+              <a:ext uri="{FF2B5EF4-FFF2-40B4-BE49-F238E27FC236}">
+                <a16:creationId xmlns:a16="http://schemas.microsoft.com/office/drawing/2014/main" id="{FF358467-0AA5-1AE0-C097-16C68CEABDDA}"/>
+              </a:ext>
+            </a:extLst>
+          </p:cNvPr>
+          <p:cNvSpPr txBox="1"/>
+          <p:nvPr/>
+        </p:nvSpPr>
+        <p:spPr>
+          <a:xfrm>
+            <a:off x="457202" y="3857144"/>
+            <a:ext cx="8147245" cy="705258"/>
+          </a:xfrm>
+          <a:prstGeom prst="rect">
+            <a:avLst/>
+          </a:prstGeom>
+          <a:noFill/>
+        </p:spPr>
+        <p:txBody>
+          <a:bodyPr wrap="square">
+            <a:spAutoFit/>
+          </a:bodyPr>
+          <a:lstStyle/>
+          <a:p>
+            <a:pPr lvl="0">
+              <a:lnSpc>
+                <a:spcPct val="150000"/>
+              </a:lnSpc>
+            </a:pPr>
+            <a:r>
+              <a:rPr lang="es-MX" sz="1400" dirty="0">
+                <a:solidFill>
+                  <a:schemeClr val="tx1"/>
+                </a:solidFill>
+              </a:rPr>
+              <a:t>- Los modelos de lenguaje grandes (LLM) son modelos de aprendizaje entrenados con grandes cantidades de datos, lo que les permite comprender y generar lenguaje natural para realizar diversas tareas, según IBM (s.f.).</a:t>
+            </a:r>
+          </a:p>
+        </p:txBody>
+      </p:sp>
+      <p:sp>
+        <p:nvSpPr>
+          <p:cNvPr id="6" name="Marcador de número de diapositiva 1">
+            <a:extLst>
+              <a:ext uri="{FF2B5EF4-FFF2-40B4-BE49-F238E27FC236}">
+                <a16:creationId xmlns:a16="http://schemas.microsoft.com/office/drawing/2014/main" id="{D666D0E3-F5A5-F6ED-6400-6E878629992E}"/>
+              </a:ext>
+            </a:extLst>
+          </p:cNvPr>
+          <p:cNvSpPr txBox="1">
+            <a:spLocks/>
+          </p:cNvSpPr>
+          <p:nvPr/>
+        </p:nvSpPr>
+        <p:spPr>
+          <a:xfrm>
+            <a:off x="8556784" y="4749851"/>
+            <a:ext cx="548700" cy="393600"/>
+          </a:xfrm>
+          <a:prstGeom prst="rect">
+            <a:avLst/>
+          </a:prstGeom>
+        </p:spPr>
+        <p:txBody>
+          <a:bodyPr/>
+          <a:lstStyle>
+            <a:defPPr>
+              <a:defRPr lang="es-MX"/>
+            </a:defPPr>
+            <a:lvl1pPr marL="0" algn="l" defTabSz="1412243" rtl="0" eaLnBrk="1" latinLnBrk="0" hangingPunct="1">
+              <a:defRPr sz="2779" kern="1200">
+                <a:solidFill>
+                  <a:schemeClr val="tx1"/>
+                </a:solidFill>
+                <a:latin typeface="+mn-lt"/>
+                <a:ea typeface="+mn-ea"/>
+                <a:cs typeface="+mn-cs"/>
+              </a:defRPr>
+            </a:lvl1pPr>
+            <a:lvl2pPr marL="706122" algn="l" defTabSz="1412243" rtl="0" eaLnBrk="1" latinLnBrk="0" hangingPunct="1">
+              <a:defRPr sz="2779" kern="1200">
+                <a:solidFill>
+                  <a:schemeClr val="tx1"/>
+                </a:solidFill>
+                <a:latin typeface="+mn-lt"/>
+                <a:ea typeface="+mn-ea"/>
+                <a:cs typeface="+mn-cs"/>
+              </a:defRPr>
+            </a:lvl2pPr>
+            <a:lvl3pPr marL="1412243" algn="l" defTabSz="1412243" rtl="0" eaLnBrk="1" latinLnBrk="0" hangingPunct="1">
+              <a:defRPr sz="2779" kern="1200">
+                <a:solidFill>
+                  <a:schemeClr val="tx1"/>
+                </a:solidFill>
+                <a:latin typeface="+mn-lt"/>
+                <a:ea typeface="+mn-ea"/>
+                <a:cs typeface="+mn-cs"/>
+              </a:defRPr>
+            </a:lvl3pPr>
+            <a:lvl4pPr marL="2118365" algn="l" defTabSz="1412243" rtl="0" eaLnBrk="1" latinLnBrk="0" hangingPunct="1">
+              <a:defRPr sz="2779" kern="1200">
+                <a:solidFill>
+                  <a:schemeClr val="tx1"/>
+                </a:solidFill>
+                <a:latin typeface="+mn-lt"/>
+                <a:ea typeface="+mn-ea"/>
+                <a:cs typeface="+mn-cs"/>
+              </a:defRPr>
+            </a:lvl4pPr>
+            <a:lvl5pPr marL="2824487" algn="l" defTabSz="1412243" rtl="0" eaLnBrk="1" latinLnBrk="0" hangingPunct="1">
+              <a:defRPr sz="2779" kern="1200">
+                <a:solidFill>
+                  <a:schemeClr val="tx1"/>
+                </a:solidFill>
+                <a:latin typeface="+mn-lt"/>
+                <a:ea typeface="+mn-ea"/>
+                <a:cs typeface="+mn-cs"/>
+              </a:defRPr>
+            </a:lvl5pPr>
+            <a:lvl6pPr marL="3530609" algn="l" defTabSz="1412243" rtl="0" eaLnBrk="1" latinLnBrk="0" hangingPunct="1">
+              <a:defRPr sz="2779" kern="1200">
+                <a:solidFill>
+                  <a:schemeClr val="tx1"/>
+                </a:solidFill>
+                <a:latin typeface="+mn-lt"/>
+                <a:ea typeface="+mn-ea"/>
+                <a:cs typeface="+mn-cs"/>
+              </a:defRPr>
+            </a:lvl6pPr>
+            <a:lvl7pPr marL="4236730" algn="l" defTabSz="1412243" rtl="0" eaLnBrk="1" latinLnBrk="0" hangingPunct="1">
+              <a:defRPr sz="2779" kern="1200">
+                <a:solidFill>
+                  <a:schemeClr val="tx1"/>
+                </a:solidFill>
+                <a:latin typeface="+mn-lt"/>
+                <a:ea typeface="+mn-ea"/>
+                <a:cs typeface="+mn-cs"/>
+              </a:defRPr>
+            </a:lvl7pPr>
+            <a:lvl8pPr marL="4942852" algn="l" defTabSz="1412243" rtl="0" eaLnBrk="1" latinLnBrk="0" hangingPunct="1">
+              <a:defRPr sz="2779" kern="1200">
+                <a:solidFill>
+                  <a:schemeClr val="tx1"/>
+                </a:solidFill>
+                <a:latin typeface="+mn-lt"/>
+                <a:ea typeface="+mn-ea"/>
+                <a:cs typeface="+mn-cs"/>
+              </a:defRPr>
+            </a:lvl8pPr>
+            <a:lvl9pPr marL="5648974" algn="l" defTabSz="1412243" rtl="0" eaLnBrk="1" latinLnBrk="0" hangingPunct="1">
+              <a:defRPr sz="2779" kern="1200">
+                <a:solidFill>
+                  <a:schemeClr val="tx1"/>
+                </a:solidFill>
+                <a:latin typeface="+mn-lt"/>
+                <a:ea typeface="+mn-ea"/>
+                <a:cs typeface="+mn-cs"/>
+              </a:defRPr>
+            </a:lvl9pPr>
+          </a:lstStyle>
+          <a:p>
+            <a:pPr algn="r"/>
+            <a:r>
+              <a:rPr lang="es-ES" dirty="0"/>
+              <a:t>1</a:t>
             </a:r>
           </a:p>
         </p:txBody>
@@ -9525,7 +10773,7 @@
                   <a:schemeClr val="tx1"/>
                 </a:solidFill>
               </a:rPr>
-              <a:t>” señala que los LLM pueden integrarse en aplicaciones de software y combinarse con bases de datos, documentos y herramientas externas. </a:t>
+              <a:t>” señalan que los LLM pueden integrarse en aplicaciones de software y combinarse con bases de datos, documentos y herramientas externas. </a:t>
             </a:r>
           </a:p>
         </p:txBody>
@@ -9714,6 +10962,135 @@
             <a:r>
               <a:rPr lang="es-MX" sz="800" dirty="0"/>
               <a:t> dirigidos a sistemas basados en LLM​</a:t>
+            </a:r>
+          </a:p>
+        </p:txBody>
+      </p:sp>
+      <p:sp>
+        <p:nvSpPr>
+          <p:cNvPr id="3" name="Marcador de número de diapositiva 1">
+            <a:extLst>
+              <a:ext uri="{FF2B5EF4-FFF2-40B4-BE49-F238E27FC236}">
+                <a16:creationId xmlns:a16="http://schemas.microsoft.com/office/drawing/2014/main" id="{95EC3A0D-CB8D-DEC0-F80A-0B3D882AEEDC}"/>
+              </a:ext>
+            </a:extLst>
+          </p:cNvPr>
+          <p:cNvSpPr txBox="1">
+            <a:spLocks/>
+          </p:cNvSpPr>
+          <p:nvPr/>
+        </p:nvSpPr>
+        <p:spPr>
+          <a:xfrm>
+            <a:off x="8595300" y="4679206"/>
+            <a:ext cx="548700" cy="393600"/>
+          </a:xfrm>
+          <a:prstGeom prst="rect">
+            <a:avLst/>
+          </a:prstGeom>
+        </p:spPr>
+        <p:txBody>
+          <a:bodyPr/>
+          <a:lstStyle>
+            <a:defPPr>
+              <a:defRPr lang="es-MX"/>
+            </a:defPPr>
+            <a:lvl1pPr marL="0" algn="l" defTabSz="1412243" rtl="0" eaLnBrk="1" latinLnBrk="0" hangingPunct="1">
+              <a:defRPr sz="2779" kern="1200">
+                <a:solidFill>
+                  <a:schemeClr val="tx1"/>
+                </a:solidFill>
+                <a:latin typeface="+mn-lt"/>
+                <a:ea typeface="+mn-ea"/>
+                <a:cs typeface="+mn-cs"/>
+              </a:defRPr>
+            </a:lvl1pPr>
+            <a:lvl2pPr marL="706122" algn="l" defTabSz="1412243" rtl="0" eaLnBrk="1" latinLnBrk="0" hangingPunct="1">
+              <a:defRPr sz="2779" kern="1200">
+                <a:solidFill>
+                  <a:schemeClr val="tx1"/>
+                </a:solidFill>
+                <a:latin typeface="+mn-lt"/>
+                <a:ea typeface="+mn-ea"/>
+                <a:cs typeface="+mn-cs"/>
+              </a:defRPr>
+            </a:lvl2pPr>
+            <a:lvl3pPr marL="1412243" algn="l" defTabSz="1412243" rtl="0" eaLnBrk="1" latinLnBrk="0" hangingPunct="1">
+              <a:defRPr sz="2779" kern="1200">
+                <a:solidFill>
+                  <a:schemeClr val="tx1"/>
+                </a:solidFill>
+                <a:latin typeface="+mn-lt"/>
+                <a:ea typeface="+mn-ea"/>
+                <a:cs typeface="+mn-cs"/>
+              </a:defRPr>
+            </a:lvl3pPr>
+            <a:lvl4pPr marL="2118365" algn="l" defTabSz="1412243" rtl="0" eaLnBrk="1" latinLnBrk="0" hangingPunct="1">
+              <a:defRPr sz="2779" kern="1200">
+                <a:solidFill>
+                  <a:schemeClr val="tx1"/>
+                </a:solidFill>
+                <a:latin typeface="+mn-lt"/>
+                <a:ea typeface="+mn-ea"/>
+                <a:cs typeface="+mn-cs"/>
+              </a:defRPr>
+            </a:lvl4pPr>
+            <a:lvl5pPr marL="2824487" algn="l" defTabSz="1412243" rtl="0" eaLnBrk="1" latinLnBrk="0" hangingPunct="1">
+              <a:defRPr sz="2779" kern="1200">
+                <a:solidFill>
+                  <a:schemeClr val="tx1"/>
+                </a:solidFill>
+                <a:latin typeface="+mn-lt"/>
+                <a:ea typeface="+mn-ea"/>
+                <a:cs typeface="+mn-cs"/>
+              </a:defRPr>
+            </a:lvl5pPr>
+            <a:lvl6pPr marL="3530609" algn="l" defTabSz="1412243" rtl="0" eaLnBrk="1" latinLnBrk="0" hangingPunct="1">
+              <a:defRPr sz="2779" kern="1200">
+                <a:solidFill>
+                  <a:schemeClr val="tx1"/>
+                </a:solidFill>
+                <a:latin typeface="+mn-lt"/>
+                <a:ea typeface="+mn-ea"/>
+                <a:cs typeface="+mn-cs"/>
+              </a:defRPr>
+            </a:lvl6pPr>
+            <a:lvl7pPr marL="4236730" algn="l" defTabSz="1412243" rtl="0" eaLnBrk="1" latinLnBrk="0" hangingPunct="1">
+              <a:defRPr sz="2779" kern="1200">
+                <a:solidFill>
+                  <a:schemeClr val="tx1"/>
+                </a:solidFill>
+                <a:latin typeface="+mn-lt"/>
+                <a:ea typeface="+mn-ea"/>
+                <a:cs typeface="+mn-cs"/>
+              </a:defRPr>
+            </a:lvl7pPr>
+            <a:lvl8pPr marL="4942852" algn="l" defTabSz="1412243" rtl="0" eaLnBrk="1" latinLnBrk="0" hangingPunct="1">
+              <a:defRPr sz="2779" kern="1200">
+                <a:solidFill>
+                  <a:schemeClr val="tx1"/>
+                </a:solidFill>
+                <a:latin typeface="+mn-lt"/>
+                <a:ea typeface="+mn-ea"/>
+                <a:cs typeface="+mn-cs"/>
+              </a:defRPr>
+            </a:lvl8pPr>
+            <a:lvl9pPr marL="5648974" algn="l" defTabSz="1412243" rtl="0" eaLnBrk="1" latinLnBrk="0" hangingPunct="1">
+              <a:defRPr sz="2779" kern="1200">
+                <a:solidFill>
+                  <a:schemeClr val="tx1"/>
+                </a:solidFill>
+                <a:latin typeface="+mn-lt"/>
+                <a:ea typeface="+mn-ea"/>
+                <a:cs typeface="+mn-cs"/>
+              </a:defRPr>
+            </a:lvl9pPr>
+          </a:lstStyle>
+          <a:p>
+            <a:pPr algn="r"/>
+            <a:r>
+              <a:rPr lang="es-ES" dirty="0"/>
+              <a:t>2</a:t>
             </a:r>
           </a:p>
         </p:txBody>
@@ -9880,14 +11257,14 @@
           <p:nvPr>
             <p:extLst>
               <p:ext uri="{D42A27DB-BD31-4B8C-83A1-F6EECF244321}">
-                <p14:modId xmlns:p14="http://schemas.microsoft.com/office/powerpoint/2010/main" val="1518375479"/>
+                <p14:modId xmlns:p14="http://schemas.microsoft.com/office/powerpoint/2010/main" val="364096240"/>
               </p:ext>
             </p:extLst>
           </p:nvPr>
         </p:nvGraphicFramePr>
         <p:xfrm>
           <a:off x="457200" y="1063622"/>
-          <a:ext cx="8229600" cy="3556992"/>
+          <a:ext cx="8229600" cy="3374112"/>
         </p:xfrm>
         <a:graphic>
           <a:graphicData uri="http://schemas.openxmlformats.org/drawingml/2006/table">
@@ -9896,21 +11273,21 @@
                 <a:tableStyleId>{5C22544A-7EE6-4342-B048-85BDC9FD1C3A}</a:tableStyleId>
               </a:tblPr>
               <a:tblGrid>
-                <a:gridCol w="2602632">
+                <a:gridCol w="2314600">
                   <a:extLst>
                     <a:ext uri="{9D8B030D-6E8A-4147-A177-3AD203B41FA5}">
                       <a16:colId xmlns:a16="http://schemas.microsoft.com/office/drawing/2014/main" val="952410794"/>
                     </a:ext>
                   </a:extLst>
                 </a:gridCol>
-                <a:gridCol w="2736304">
+                <a:gridCol w="3096344">
                   <a:extLst>
                     <a:ext uri="{9D8B030D-6E8A-4147-A177-3AD203B41FA5}">
                       <a16:colId xmlns:a16="http://schemas.microsoft.com/office/drawing/2014/main" val="2703493866"/>
                     </a:ext>
                   </a:extLst>
                 </a:gridCol>
-                <a:gridCol w="2890664">
+                <a:gridCol w="2818656">
                   <a:extLst>
                     <a:ext uri="{9D8B030D-6E8A-4147-A177-3AD203B41FA5}">
                       <a16:colId xmlns:a16="http://schemas.microsoft.com/office/drawing/2014/main" val="428609497"/>
@@ -9995,10 +11372,16 @@
                     <a:lstStyle/>
                     <a:p>
                       <a:r>
+                        <a:rPr lang="es-MX" sz="1200" dirty="0" err="1">
+                          <a:latin typeface="Gill Sans MT" panose="020B0502020104020203" pitchFamily="34" charset="0"/>
+                        </a:rPr>
+                        <a:t>Damacena</a:t>
+                      </a:r>
+                      <a:r>
                         <a:rPr lang="es-MX" sz="1200" dirty="0">
                           <a:latin typeface="Gill Sans MT" panose="020B0502020104020203" pitchFamily="34" charset="0"/>
                         </a:rPr>
-                        <a:t>Duarte et al. (2026) Realizan una revisión sistemática sobre ataques de inyección de </a:t>
+                        <a:t> Duarte et al. (2026) Realizan una revisión sistemática sobre ataques de inyección de </a:t>
                       </a:r>
                       <a:r>
                         <a:rPr lang="es-MX" sz="1200" i="1" dirty="0" err="1">
@@ -10107,7 +11490,15 @@
                         <a:rPr lang="en-US" sz="1200" i="1" dirty="0">
                           <a:latin typeface="Gill Sans MT" panose="020B0502020104020203" pitchFamily="34" charset="0"/>
                         </a:rPr>
-                        <a:t>The Landscape of Prompt Injection Threats in LLM Agents: From Taxonomy to Analysis.</a:t>
+                        <a:t>A Systematic Literature Review of Prompt</a:t>
+                      </a:r>
+                    </a:p>
+                    <a:p>
+                      <a:r>
+                        <a:rPr lang="en-US" sz="1200" i="1" dirty="0">
+                          <a:latin typeface="Gill Sans MT" panose="020B0502020104020203" pitchFamily="34" charset="0"/>
+                        </a:rPr>
+                        <a:t>Injection Attacks in LLM-Integrated Systems</a:t>
                       </a:r>
                       <a:endParaRPr lang="es-MX" sz="1200" i="1" dirty="0">
                         <a:latin typeface="Gill Sans MT" panose="020B0502020104020203" pitchFamily="34" charset="0"/>
@@ -10122,13 +11513,19 @@
                     <a:lstStyle/>
                     <a:p>
                       <a:r>
+                        <a:rPr lang="es-MX" sz="1200" dirty="0" err="1">
+                          <a:latin typeface="Gill Sans MT" panose="020B0502020104020203" pitchFamily="34" charset="0"/>
+                        </a:rPr>
+                        <a:t>Woesle</a:t>
+                      </a:r>
+                      <a:r>
                         <a:rPr lang="es-MX" sz="1200" dirty="0">
                           <a:latin typeface="Gill Sans MT" panose="020B0502020104020203" pitchFamily="34" charset="0"/>
                         </a:rPr>
-                        <a:t>Wang et al. (2026) Estudian las amenazas de inyección de </a:t>
+                        <a:t> y Buettner (2026) Realizan una revisión sistemática de 89 publicaciones sobre ataques de inyección de </a:t>
                       </a:r>
                       <a:r>
-                        <a:rPr lang="es-MX" sz="1200" i="1" dirty="0" err="1">
+                        <a:rPr lang="es-MX" sz="1200" dirty="0" err="1">
                           <a:latin typeface="Gill Sans MT" panose="020B0502020104020203" pitchFamily="34" charset="0"/>
                         </a:rPr>
                         <a:t>prompt</a:t>
@@ -10137,7 +11534,7 @@
                         <a:rPr lang="es-MX" sz="1200" dirty="0">
                           <a:latin typeface="Gill Sans MT" panose="020B0502020104020203" pitchFamily="34" charset="0"/>
                         </a:rPr>
-                        <a:t> en agentes basados en LLM.</a:t>
+                        <a:t> en sistemas integrados con LLM.</a:t>
                       </a:r>
                     </a:p>
                   </a:txBody>
@@ -10152,19 +11549,7 @@
                         <a:rPr lang="es-MX" sz="1200" dirty="0">
                           <a:latin typeface="Gill Sans MT" panose="020B0502020104020203" pitchFamily="34" charset="0"/>
                         </a:rPr>
-                        <a:t>Clasifican las defensas según su intervención en los niveles de texto, modelo y ejecución, y proponen </a:t>
-                      </a:r>
-                      <a:r>
-                        <a:rPr lang="es-MX" sz="1200" i="1" dirty="0" err="1">
-                          <a:latin typeface="Gill Sans MT" panose="020B0502020104020203" pitchFamily="34" charset="0"/>
-                        </a:rPr>
-                        <a:t>AgentPI</a:t>
-                      </a:r>
-                      <a:r>
-                        <a:rPr lang="es-MX" sz="1200" dirty="0">
-                          <a:latin typeface="Gill Sans MT" panose="020B0502020104020203" pitchFamily="34" charset="0"/>
-                        </a:rPr>
-                        <a:t> para evaluar defensas en escenarios dependientes del contexto.</a:t>
+                        <a:t>Proponen un marco de análisis basado en tres ejes: límite de confianza, objetivo del atacante y orientación de la investigación.</a:t>
                       </a:r>
                     </a:p>
                   </a:txBody>
@@ -10180,6 +11565,135 @@
           </a:graphicData>
         </a:graphic>
       </p:graphicFrame>
+      <p:sp>
+        <p:nvSpPr>
+          <p:cNvPr id="3" name="Marcador de número de diapositiva 1">
+            <a:extLst>
+              <a:ext uri="{FF2B5EF4-FFF2-40B4-BE49-F238E27FC236}">
+                <a16:creationId xmlns:a16="http://schemas.microsoft.com/office/drawing/2014/main" id="{FA5C9D12-2CF0-8EDA-CEA1-634C8C30040D}"/>
+              </a:ext>
+            </a:extLst>
+          </p:cNvPr>
+          <p:cNvSpPr txBox="1">
+            <a:spLocks/>
+          </p:cNvSpPr>
+          <p:nvPr/>
+        </p:nvSpPr>
+        <p:spPr>
+          <a:xfrm>
+            <a:off x="8556784" y="4749851"/>
+            <a:ext cx="548700" cy="393600"/>
+          </a:xfrm>
+          <a:prstGeom prst="rect">
+            <a:avLst/>
+          </a:prstGeom>
+        </p:spPr>
+        <p:txBody>
+          <a:bodyPr/>
+          <a:lstStyle>
+            <a:defPPr>
+              <a:defRPr lang="es-MX"/>
+            </a:defPPr>
+            <a:lvl1pPr marL="0" algn="l" defTabSz="1412243" rtl="0" eaLnBrk="1" latinLnBrk="0" hangingPunct="1">
+              <a:defRPr sz="2779" kern="1200">
+                <a:solidFill>
+                  <a:schemeClr val="tx1"/>
+                </a:solidFill>
+                <a:latin typeface="+mn-lt"/>
+                <a:ea typeface="+mn-ea"/>
+                <a:cs typeface="+mn-cs"/>
+              </a:defRPr>
+            </a:lvl1pPr>
+            <a:lvl2pPr marL="706122" algn="l" defTabSz="1412243" rtl="0" eaLnBrk="1" latinLnBrk="0" hangingPunct="1">
+              <a:defRPr sz="2779" kern="1200">
+                <a:solidFill>
+                  <a:schemeClr val="tx1"/>
+                </a:solidFill>
+                <a:latin typeface="+mn-lt"/>
+                <a:ea typeface="+mn-ea"/>
+                <a:cs typeface="+mn-cs"/>
+              </a:defRPr>
+            </a:lvl2pPr>
+            <a:lvl3pPr marL="1412243" algn="l" defTabSz="1412243" rtl="0" eaLnBrk="1" latinLnBrk="0" hangingPunct="1">
+              <a:defRPr sz="2779" kern="1200">
+                <a:solidFill>
+                  <a:schemeClr val="tx1"/>
+                </a:solidFill>
+                <a:latin typeface="+mn-lt"/>
+                <a:ea typeface="+mn-ea"/>
+                <a:cs typeface="+mn-cs"/>
+              </a:defRPr>
+            </a:lvl3pPr>
+            <a:lvl4pPr marL="2118365" algn="l" defTabSz="1412243" rtl="0" eaLnBrk="1" latinLnBrk="0" hangingPunct="1">
+              <a:defRPr sz="2779" kern="1200">
+                <a:solidFill>
+                  <a:schemeClr val="tx1"/>
+                </a:solidFill>
+                <a:latin typeface="+mn-lt"/>
+                <a:ea typeface="+mn-ea"/>
+                <a:cs typeface="+mn-cs"/>
+              </a:defRPr>
+            </a:lvl4pPr>
+            <a:lvl5pPr marL="2824487" algn="l" defTabSz="1412243" rtl="0" eaLnBrk="1" latinLnBrk="0" hangingPunct="1">
+              <a:defRPr sz="2779" kern="1200">
+                <a:solidFill>
+                  <a:schemeClr val="tx1"/>
+                </a:solidFill>
+                <a:latin typeface="+mn-lt"/>
+                <a:ea typeface="+mn-ea"/>
+                <a:cs typeface="+mn-cs"/>
+              </a:defRPr>
+            </a:lvl5pPr>
+            <a:lvl6pPr marL="3530609" algn="l" defTabSz="1412243" rtl="0" eaLnBrk="1" latinLnBrk="0" hangingPunct="1">
+              <a:defRPr sz="2779" kern="1200">
+                <a:solidFill>
+                  <a:schemeClr val="tx1"/>
+                </a:solidFill>
+                <a:latin typeface="+mn-lt"/>
+                <a:ea typeface="+mn-ea"/>
+                <a:cs typeface="+mn-cs"/>
+              </a:defRPr>
+            </a:lvl6pPr>
+            <a:lvl7pPr marL="4236730" algn="l" defTabSz="1412243" rtl="0" eaLnBrk="1" latinLnBrk="0" hangingPunct="1">
+              <a:defRPr sz="2779" kern="1200">
+                <a:solidFill>
+                  <a:schemeClr val="tx1"/>
+                </a:solidFill>
+                <a:latin typeface="+mn-lt"/>
+                <a:ea typeface="+mn-ea"/>
+                <a:cs typeface="+mn-cs"/>
+              </a:defRPr>
+            </a:lvl7pPr>
+            <a:lvl8pPr marL="4942852" algn="l" defTabSz="1412243" rtl="0" eaLnBrk="1" latinLnBrk="0" hangingPunct="1">
+              <a:defRPr sz="2779" kern="1200">
+                <a:solidFill>
+                  <a:schemeClr val="tx1"/>
+                </a:solidFill>
+                <a:latin typeface="+mn-lt"/>
+                <a:ea typeface="+mn-ea"/>
+                <a:cs typeface="+mn-cs"/>
+              </a:defRPr>
+            </a:lvl8pPr>
+            <a:lvl9pPr marL="5648974" algn="l" defTabSz="1412243" rtl="0" eaLnBrk="1" latinLnBrk="0" hangingPunct="1">
+              <a:defRPr sz="2779" kern="1200">
+                <a:solidFill>
+                  <a:schemeClr val="tx1"/>
+                </a:solidFill>
+                <a:latin typeface="+mn-lt"/>
+                <a:ea typeface="+mn-ea"/>
+                <a:cs typeface="+mn-cs"/>
+              </a:defRPr>
+            </a:lvl9pPr>
+          </a:lstStyle>
+          <a:p>
+            <a:pPr algn="r"/>
+            <a:r>
+              <a:rPr lang="es-ES" dirty="0"/>
+              <a:t>3</a:t>
+            </a:r>
+          </a:p>
+        </p:txBody>
+      </p:sp>
     </p:spTree>
     <p:extLst>
       <p:ext uri="{BB962C8B-B14F-4D97-AF65-F5344CB8AC3E}">
@@ -10269,10 +11783,9 @@
               <a:buNone/>
             </a:pPr>
             <a:r>
-              <a:rPr lang="es-ES" b="1"/>
+              <a:rPr lang="es-ES" b="1" dirty="0"/>
               <a:t>Problemática</a:t>
             </a:r>
-            <a:endParaRPr lang="es-ES" b="1" dirty="0"/>
           </a:p>
         </p:txBody>
       </p:sp>
@@ -10294,7 +11807,7 @@
         </p:nvSpPr>
         <p:spPr>
           <a:xfrm>
-            <a:off x="2977480" y="1150412"/>
+            <a:off x="2952822" y="1131590"/>
             <a:ext cx="5709320" cy="3509570"/>
           </a:xfrm>
           <a:prstGeom prst="rect">
@@ -10364,7 +11877,7 @@
                   <a:schemeClr val="tx1"/>
                 </a:solidFill>
               </a:rPr>
-              <a:t>Una medida que presenta buenos resultados en un escenario determinado no necesariamente ofrece el mismo nivel de protección cuando se utiliza en otro contexto o ante otro tipo de inyección.</a:t>
+              <a:t>Una medida que presenta resultados favorables en un escenario determinado no necesariamente ofrece el mismo nivel de protección cuando se utiliza en otro contexto o ante otro tipo de inyección.</a:t>
             </a:r>
           </a:p>
           <a:p>
@@ -10542,6 +12055,48 @@
           </a:prstGeom>
         </p:spPr>
       </p:pic>
+      <p:sp>
+        <p:nvSpPr>
+          <p:cNvPr id="2" name="Marcador de número de diapositiva 1">
+            <a:extLst>
+              <a:ext uri="{FF2B5EF4-FFF2-40B4-BE49-F238E27FC236}">
+                <a16:creationId xmlns:a16="http://schemas.microsoft.com/office/drawing/2014/main" id="{93B3C97C-7D6D-04E0-49AB-7FFA48553F36}"/>
+              </a:ext>
+            </a:extLst>
+          </p:cNvPr>
+          <p:cNvSpPr>
+            <a:spLocks noGrp="1"/>
+          </p:cNvSpPr>
+          <p:nvPr>
+            <p:ph type="sldNum" idx="12"/>
+          </p:nvPr>
+        </p:nvSpPr>
+        <p:spPr>
+          <a:xfrm>
+            <a:off x="8556574" y="4641160"/>
+            <a:ext cx="548700" cy="393600"/>
+          </a:xfrm>
+        </p:spPr>
+        <p:txBody>
+          <a:bodyPr/>
+          <a:lstStyle/>
+          <a:p>
+            <a:pPr marL="0" lvl="0" indent="0" algn="r" rtl="0">
+              <a:spcBef>
+                <a:spcPts val="0"/>
+              </a:spcBef>
+              <a:spcAft>
+                <a:spcPts val="0"/>
+              </a:spcAft>
+              <a:buNone/>
+            </a:pPr>
+            <a:r>
+              <a:rPr lang="es-ES" dirty="0"/>
+              <a:t>4</a:t>
+            </a:r>
+          </a:p>
+        </p:txBody>
+      </p:sp>
     </p:spTree>
     <p:extLst>
       <p:ext uri="{BB962C8B-B14F-4D97-AF65-F5344CB8AC3E}">
@@ -10584,8 +12139,8 @@
         </p:nvSpPr>
         <p:spPr>
           <a:xfrm>
-            <a:off x="475605" y="1461490"/>
-            <a:ext cx="8229599" cy="3160653"/>
+            <a:off x="451084" y="1335884"/>
+            <a:ext cx="5320531" cy="3270499"/>
           </a:xfrm>
           <a:prstGeom prst="rect">
             <a:avLst/>
@@ -10601,7 +12156,7 @@
           </a:bodyPr>
           <a:lstStyle/>
           <a:p>
-            <a:pPr marL="285750" lvl="0" indent="-285750" algn="just" rtl="0">
+            <a:pPr marL="0" lvl="0" indent="0" algn="just" rtl="0">
               <a:lnSpc>
                 <a:spcPct val="200000"/>
               </a:lnSpc>
@@ -10615,8 +12170,6 @@
                 <a:srgbClr val="7F7F7F"/>
               </a:buClr>
               <a:buSzPts val="1900"/>
-              <a:buFont typeface="Arial" panose="020B0604020202020204" pitchFamily="34" charset="0"/>
-              <a:buChar char="•"/>
             </a:pPr>
             <a:r>
               <a:rPr lang="es-MX" sz="1800" dirty="0">
@@ -10784,6 +12337,78 @@
             <a:r>
               <a:rPr lang="es-MX" sz="800" dirty="0"/>
               <a:t> dirigidos a sistemas basados en LLM​</a:t>
+            </a:r>
+          </a:p>
+        </p:txBody>
+      </p:sp>
+      <p:pic>
+        <p:nvPicPr>
+          <p:cNvPr id="2" name="Imagen 1" descr="ilustraciones, imágenes clip art, dibujos animados e iconos de stock de diseño de iconos de preguntas y respuestas - pregunta">
+            <a:extLst>
+              <a:ext uri="{FF2B5EF4-FFF2-40B4-BE49-F238E27FC236}">
+                <a16:creationId xmlns:a16="http://schemas.microsoft.com/office/drawing/2014/main" id="{C33CCBA7-FECB-FAC1-3DC7-4564C778E573}"/>
+              </a:ext>
+            </a:extLst>
+          </p:cNvPr>
+          <p:cNvPicPr>
+            <a:picLocks noChangeAspect="1"/>
+          </p:cNvPicPr>
+          <p:nvPr/>
+        </p:nvPicPr>
+        <p:blipFill>
+          <a:blip r:embed="rId3"/>
+          <a:stretch>
+            <a:fillRect/>
+          </a:stretch>
+        </p:blipFill>
+        <p:spPr>
+          <a:xfrm>
+            <a:off x="6175516" y="1366954"/>
+            <a:ext cx="2409592" cy="2409592"/>
+          </a:xfrm>
+          <a:prstGeom prst="rect">
+            <a:avLst/>
+          </a:prstGeom>
+        </p:spPr>
+      </p:pic>
+      <p:sp>
+        <p:nvSpPr>
+          <p:cNvPr id="3" name="Marcador de número de diapositiva 2">
+            <a:extLst>
+              <a:ext uri="{FF2B5EF4-FFF2-40B4-BE49-F238E27FC236}">
+                <a16:creationId xmlns:a16="http://schemas.microsoft.com/office/drawing/2014/main" id="{53AA2D8D-3B18-0AC3-7439-924F2AD9F437}"/>
+              </a:ext>
+            </a:extLst>
+          </p:cNvPr>
+          <p:cNvSpPr>
+            <a:spLocks noGrp="1"/>
+          </p:cNvSpPr>
+          <p:nvPr>
+            <p:ph type="sldNum" idx="12"/>
+          </p:nvPr>
+        </p:nvSpPr>
+        <p:spPr>
+          <a:xfrm>
+            <a:off x="8556784" y="4679206"/>
+            <a:ext cx="548700" cy="393600"/>
+          </a:xfrm>
+        </p:spPr>
+        <p:txBody>
+          <a:bodyPr/>
+          <a:lstStyle/>
+          <a:p>
+            <a:pPr marL="0" lvl="0" indent="0" algn="r" rtl="0">
+              <a:spcBef>
+                <a:spcPts val="0"/>
+              </a:spcBef>
+              <a:spcAft>
+                <a:spcPts val="0"/>
+              </a:spcAft>
+              <a:buNone/>
+            </a:pPr>
+            <a:r>
+              <a:rPr lang="es-ES" dirty="0"/>
+              <a:t>5</a:t>
             </a:r>
           </a:p>
         </p:txBody>
@@ -10837,25 +12462,25 @@
         </p:nvSpPr>
         <p:spPr>
           <a:xfrm>
-            <a:off x="574593" y="1203598"/>
-            <a:ext cx="8012976" cy="3024335"/>
+            <a:off x="539552" y="699542"/>
+            <a:ext cx="8012976" cy="3960440"/>
           </a:xfrm>
         </p:spPr>
         <p:txBody>
           <a:bodyPr>
-            <a:normAutofit lnSpcReduction="10000"/>
+            <a:normAutofit/>
           </a:bodyPr>
           <a:lstStyle/>
           <a:p>
             <a:pPr marL="342900" indent="-342900" algn="just">
               <a:lnSpc>
-                <a:spcPct val="170000"/>
+                <a:spcPct val="150000"/>
               </a:lnSpc>
-              <a:buFont typeface="Arial" panose="020B0604020202020204" pitchFamily="34" charset="0"/>
-              <a:buChar char="•"/>
+              <a:buFont typeface="+mj-lt"/>
+              <a:buAutoNum type="arabicPeriod"/>
             </a:pPr>
             <a:r>
-              <a:rPr lang="es-MX" sz="1600" noProof="0" dirty="0">
+              <a:rPr lang="es-MX" sz="1400" noProof="0" dirty="0">
                 <a:solidFill>
                   <a:schemeClr val="tx1"/>
                 </a:solidFill>
@@ -10863,7 +12488,7 @@
               <a:t>¿Qué es un ataque de inyección de </a:t>
             </a:r>
             <a:r>
-              <a:rPr lang="es-MX" sz="1600" i="1" noProof="0" dirty="0" err="1">
+              <a:rPr lang="es-MX" sz="1400" i="1" noProof="0" dirty="0" err="1">
                 <a:solidFill>
                   <a:schemeClr val="tx1"/>
                 </a:solidFill>
@@ -10871,36 +12496,24 @@
               <a:t>prompt</a:t>
             </a:r>
             <a:r>
-              <a:rPr lang="es-MX" sz="1600" noProof="0" dirty="0">
+              <a:rPr lang="es-MX" sz="1400" noProof="0" dirty="0">
                 <a:solidFill>
                   <a:schemeClr val="tx1"/>
                 </a:solidFill>
               </a:rPr>
               <a:t> y cuáles son las categorías que presenta?</a:t>
             </a:r>
-          </a:p>
-          <a:p>
-            <a:pPr algn="just">
-              <a:lnSpc>
-                <a:spcPct val="170000"/>
-              </a:lnSpc>
-            </a:pPr>
-            <a:endParaRPr lang="es-MX" sz="1600" noProof="0" dirty="0">
-              <a:solidFill>
-                <a:schemeClr val="tx1"/>
-              </a:solidFill>
-            </a:endParaRPr>
           </a:p>
           <a:p>
             <a:pPr marL="342900" indent="-342900" algn="just">
               <a:lnSpc>
-                <a:spcPct val="170000"/>
+                <a:spcPct val="150000"/>
               </a:lnSpc>
-              <a:buFont typeface="Arial" panose="020B0604020202020204" pitchFamily="34" charset="0"/>
-              <a:buChar char="•"/>
+              <a:buFont typeface="+mj-lt"/>
+              <a:buAutoNum type="arabicPeriod"/>
             </a:pPr>
             <a:r>
-              <a:rPr lang="es-MX" sz="1600" noProof="0" dirty="0">
+              <a:rPr lang="es-MX" sz="1400" noProof="0" dirty="0">
                 <a:solidFill>
                   <a:schemeClr val="tx1"/>
                 </a:solidFill>
@@ -10908,7 +12521,7 @@
               <a:t>¿Qué medidas de seguridad a nivel de aplicación han sido propuestas en la literatura reciente para reducir los ataques de inyección de </a:t>
             </a:r>
             <a:r>
-              <a:rPr lang="es-MX" sz="1600" i="1" noProof="0" dirty="0" err="1">
+              <a:rPr lang="es-MX" sz="1400" i="1" noProof="0" dirty="0" err="1">
                 <a:solidFill>
                   <a:schemeClr val="tx1"/>
                 </a:solidFill>
@@ -10916,41 +12529,96 @@
               <a:t>prompt</a:t>
             </a:r>
             <a:r>
-              <a:rPr lang="es-MX" sz="1600" noProof="0" dirty="0">
+              <a:rPr lang="es-MX" sz="1400" noProof="0" dirty="0">
                 <a:solidFill>
                   <a:schemeClr val="tx1"/>
                 </a:solidFill>
               </a:rPr>
               <a:t> en sistemas basados en LLM?</a:t>
             </a:r>
-          </a:p>
-          <a:p>
-            <a:pPr algn="just">
-              <a:lnSpc>
-                <a:spcPct val="170000"/>
-              </a:lnSpc>
-            </a:pPr>
-            <a:endParaRPr lang="es-MX" sz="1600" noProof="0" dirty="0">
-              <a:solidFill>
-                <a:schemeClr val="tx1"/>
-              </a:solidFill>
-            </a:endParaRPr>
           </a:p>
           <a:p>
             <a:pPr marL="342900" indent="-342900" algn="just">
               <a:lnSpc>
-                <a:spcPct val="170000"/>
+                <a:spcPct val="150000"/>
               </a:lnSpc>
-              <a:buFont typeface="Arial" panose="020B0604020202020204" pitchFamily="34" charset="0"/>
-              <a:buChar char="•"/>
+              <a:buFont typeface="+mj-lt"/>
+              <a:buAutoNum type="arabicPeriod"/>
             </a:pPr>
             <a:r>
-              <a:rPr lang="es-MX" sz="1600" noProof="0" dirty="0">
+              <a:rPr lang="es-MX" sz="1400" noProof="0" dirty="0">
                 <a:solidFill>
                   <a:schemeClr val="tx1"/>
                 </a:solidFill>
               </a:rPr>
               <a:t>¿Cómo pueden clasificarse las medidas de seguridad identificadas de acuerdo con el punto de intervención dentro del sistema basado en LLM?</a:t>
+            </a:r>
+          </a:p>
+          <a:p>
+            <a:pPr marL="342900" indent="-342900" algn="just">
+              <a:lnSpc>
+                <a:spcPct val="150000"/>
+              </a:lnSpc>
+              <a:buFont typeface="+mj-lt"/>
+              <a:buAutoNum type="arabicPeriod"/>
+            </a:pPr>
+            <a:r>
+              <a:rPr lang="es-MX" sz="1400" noProof="0" dirty="0">
+                <a:solidFill>
+                  <a:schemeClr val="tx1"/>
+                </a:solidFill>
+              </a:rPr>
+              <a:t>¿En qué contextos y escenarios han sido evaluadas las medidas identificadas, qué tipos de ataques abordan y qué criterios se utilizan para determinar su efectividad?</a:t>
+            </a:r>
+          </a:p>
+          <a:p>
+            <a:pPr marL="342900" indent="-342900" algn="just">
+              <a:lnSpc>
+                <a:spcPct val="150000"/>
+              </a:lnSpc>
+              <a:buFont typeface="+mj-lt"/>
+              <a:buAutoNum type="arabicPeriod"/>
+            </a:pPr>
+            <a:r>
+              <a:rPr lang="es-MX" sz="1400" noProof="0" dirty="0">
+                <a:solidFill>
+                  <a:schemeClr val="tx1"/>
+                </a:solidFill>
+              </a:rPr>
+              <a:t>¿Qué limitaciones y compromisos entre seguridad, utilidad, rendimiento, costo o complejidad de implementación han sido reportados para las medidas analizadas?</a:t>
+            </a:r>
+          </a:p>
+          <a:p>
+            <a:pPr marL="342900" indent="-342900" algn="just">
+              <a:lnSpc>
+                <a:spcPct val="150000"/>
+              </a:lnSpc>
+              <a:buFont typeface="+mj-lt"/>
+              <a:buAutoNum type="arabicPeriod"/>
+            </a:pPr>
+            <a:r>
+              <a:rPr lang="es-MX" sz="1400" noProof="0" dirty="0">
+                <a:solidFill>
+                  <a:schemeClr val="tx1"/>
+                </a:solidFill>
+              </a:rPr>
+              <a:t>¿Qué cosas permanecen abiertas o insuficientemente en la literatura sobre medidas de seguridad a nivel de aplicación frente a ataques de inyección de </a:t>
+            </a:r>
+            <a:r>
+              <a:rPr lang="es-MX" sz="1400" noProof="0" dirty="0" err="1">
+                <a:solidFill>
+                  <a:schemeClr val="tx1"/>
+                </a:solidFill>
+              </a:rPr>
+              <a:t>prompt</a:t>
+            </a:r>
+            <a:r>
+              <a:rPr lang="es-MX" sz="1400" noProof="0" dirty="0">
+                <a:solidFill>
+                  <a:schemeClr val="tx1"/>
+                </a:solidFill>
+              </a:rPr>
+              <a:t>?</a:t>
             </a:r>
           </a:p>
         </p:txBody>
@@ -10973,13 +12641,13 @@
         </p:nvSpPr>
         <p:spPr>
           <a:xfrm>
-            <a:off x="574593" y="580087"/>
+            <a:off x="539552" y="123478"/>
             <a:ext cx="7994811" cy="407488"/>
           </a:xfrm>
         </p:spPr>
         <p:txBody>
           <a:bodyPr>
-            <a:normAutofit lnSpcReduction="10000"/>
+            <a:normAutofit/>
           </a:bodyPr>
           <a:lstStyle/>
           <a:p>
@@ -10996,8 +12664,8 @@
               <a:buSzPts val="1900"/>
             </a:pPr>
             <a:r>
-              <a:rPr lang="es-ES" b="1" dirty="0"/>
-              <a:t>Preguntas de investigación (2/3) – Preguntas complementarias </a:t>
+              <a:rPr lang="es-ES" sz="1600" b="1" dirty="0"/>
+              <a:t>Preguntas de investigación (2/2) – Preguntas complementarias </a:t>
             </a:r>
           </a:p>
         </p:txBody>
@@ -11079,6 +12747,135 @@
           </a:p>
         </p:txBody>
       </p:sp>
+      <p:sp>
+        <p:nvSpPr>
+          <p:cNvPr id="2" name="Marcador de número de diapositiva 1">
+            <a:extLst>
+              <a:ext uri="{FF2B5EF4-FFF2-40B4-BE49-F238E27FC236}">
+                <a16:creationId xmlns:a16="http://schemas.microsoft.com/office/drawing/2014/main" id="{EEAC64ED-14EF-C2AE-854D-71FACE13C00E}"/>
+              </a:ext>
+            </a:extLst>
+          </p:cNvPr>
+          <p:cNvSpPr txBox="1">
+            <a:spLocks/>
+          </p:cNvSpPr>
+          <p:nvPr/>
+        </p:nvSpPr>
+        <p:spPr>
+          <a:xfrm>
+            <a:off x="8570319" y="4679206"/>
+            <a:ext cx="548700" cy="393600"/>
+          </a:xfrm>
+          <a:prstGeom prst="rect">
+            <a:avLst/>
+          </a:prstGeom>
+        </p:spPr>
+        <p:txBody>
+          <a:bodyPr/>
+          <a:lstStyle>
+            <a:defPPr>
+              <a:defRPr lang="es-MX"/>
+            </a:defPPr>
+            <a:lvl1pPr marL="0" algn="l" defTabSz="1412243" rtl="0" eaLnBrk="1" latinLnBrk="0" hangingPunct="1">
+              <a:defRPr sz="2779" kern="1200">
+                <a:solidFill>
+                  <a:schemeClr val="tx1"/>
+                </a:solidFill>
+                <a:latin typeface="+mn-lt"/>
+                <a:ea typeface="+mn-ea"/>
+                <a:cs typeface="+mn-cs"/>
+              </a:defRPr>
+            </a:lvl1pPr>
+            <a:lvl2pPr marL="706122" algn="l" defTabSz="1412243" rtl="0" eaLnBrk="1" latinLnBrk="0" hangingPunct="1">
+              <a:defRPr sz="2779" kern="1200">
+                <a:solidFill>
+                  <a:schemeClr val="tx1"/>
+                </a:solidFill>
+                <a:latin typeface="+mn-lt"/>
+                <a:ea typeface="+mn-ea"/>
+                <a:cs typeface="+mn-cs"/>
+              </a:defRPr>
+            </a:lvl2pPr>
+            <a:lvl3pPr marL="1412243" algn="l" defTabSz="1412243" rtl="0" eaLnBrk="1" latinLnBrk="0" hangingPunct="1">
+              <a:defRPr sz="2779" kern="1200">
+                <a:solidFill>
+                  <a:schemeClr val="tx1"/>
+                </a:solidFill>
+                <a:latin typeface="+mn-lt"/>
+                <a:ea typeface="+mn-ea"/>
+                <a:cs typeface="+mn-cs"/>
+              </a:defRPr>
+            </a:lvl3pPr>
+            <a:lvl4pPr marL="2118365" algn="l" defTabSz="1412243" rtl="0" eaLnBrk="1" latinLnBrk="0" hangingPunct="1">
+              <a:defRPr sz="2779" kern="1200">
+                <a:solidFill>
+                  <a:schemeClr val="tx1"/>
+                </a:solidFill>
+                <a:latin typeface="+mn-lt"/>
+                <a:ea typeface="+mn-ea"/>
+                <a:cs typeface="+mn-cs"/>
+              </a:defRPr>
+            </a:lvl4pPr>
+            <a:lvl5pPr marL="2824487" algn="l" defTabSz="1412243" rtl="0" eaLnBrk="1" latinLnBrk="0" hangingPunct="1">
+              <a:defRPr sz="2779" kern="1200">
+                <a:solidFill>
+                  <a:schemeClr val="tx1"/>
+                </a:solidFill>
+                <a:latin typeface="+mn-lt"/>
+                <a:ea typeface="+mn-ea"/>
+                <a:cs typeface="+mn-cs"/>
+              </a:defRPr>
+            </a:lvl5pPr>
+            <a:lvl6pPr marL="3530609" algn="l" defTabSz="1412243" rtl="0" eaLnBrk="1" latinLnBrk="0" hangingPunct="1">
+              <a:defRPr sz="2779" kern="1200">
+                <a:solidFill>
+                  <a:schemeClr val="tx1"/>
+                </a:solidFill>
+                <a:latin typeface="+mn-lt"/>
+                <a:ea typeface="+mn-ea"/>
+                <a:cs typeface="+mn-cs"/>
+              </a:defRPr>
+            </a:lvl6pPr>
+            <a:lvl7pPr marL="4236730" algn="l" defTabSz="1412243" rtl="0" eaLnBrk="1" latinLnBrk="0" hangingPunct="1">
+              <a:defRPr sz="2779" kern="1200">
+                <a:solidFill>
+                  <a:schemeClr val="tx1"/>
+                </a:solidFill>
+                <a:latin typeface="+mn-lt"/>
+                <a:ea typeface="+mn-ea"/>
+                <a:cs typeface="+mn-cs"/>
+              </a:defRPr>
+            </a:lvl7pPr>
+            <a:lvl8pPr marL="4942852" algn="l" defTabSz="1412243" rtl="0" eaLnBrk="1" latinLnBrk="0" hangingPunct="1">
+              <a:defRPr sz="2779" kern="1200">
+                <a:solidFill>
+                  <a:schemeClr val="tx1"/>
+                </a:solidFill>
+                <a:latin typeface="+mn-lt"/>
+                <a:ea typeface="+mn-ea"/>
+                <a:cs typeface="+mn-cs"/>
+              </a:defRPr>
+            </a:lvl8pPr>
+            <a:lvl9pPr marL="5648974" algn="l" defTabSz="1412243" rtl="0" eaLnBrk="1" latinLnBrk="0" hangingPunct="1">
+              <a:defRPr sz="2779" kern="1200">
+                <a:solidFill>
+                  <a:schemeClr val="tx1"/>
+                </a:solidFill>
+                <a:latin typeface="+mn-lt"/>
+                <a:ea typeface="+mn-ea"/>
+                <a:cs typeface="+mn-cs"/>
+              </a:defRPr>
+            </a:lvl9pPr>
+          </a:lstStyle>
+          <a:p>
+            <a:pPr algn="r"/>
+            <a:r>
+              <a:rPr lang="es-ES" dirty="0"/>
+              <a:t>6</a:t>
+            </a:r>
+          </a:p>
+        </p:txBody>
+      </p:sp>
     </p:spTree>
     <p:extLst>
       <p:ext uri="{BB962C8B-B14F-4D97-AF65-F5344CB8AC3E}">
@@ -11093,286 +12890,6 @@
 </file>
 
 <file path=ppt/slides/slide8.xml><?xml version="1.0" encoding="utf-8"?>
-<p:sld xmlns:a="http://schemas.openxmlformats.org/drawingml/2006/main" xmlns:r="http://schemas.openxmlformats.org/officeDocument/2006/relationships" xmlns:p="http://schemas.openxmlformats.org/presentationml/2006/main">
-  <p:cSld>
-    <p:spTree>
-      <p:nvGrpSpPr>
-        <p:cNvPr id="1" name="">
-          <a:extLst>
-            <a:ext uri="{FF2B5EF4-FFF2-40B4-BE49-F238E27FC236}">
-              <a16:creationId xmlns:a16="http://schemas.microsoft.com/office/drawing/2014/main" id="{4B13A041-1E26-E54B-DD56-879120A8A1BF}"/>
-            </a:ext>
-          </a:extLst>
-        </p:cNvPr>
-        <p:cNvGrpSpPr/>
-        <p:nvPr/>
-      </p:nvGrpSpPr>
-      <p:grpSpPr>
-        <a:xfrm>
-          <a:off x="0" y="0"/>
-          <a:ext cx="0" cy="0"/>
-          <a:chOff x="0" y="0"/>
-          <a:chExt cx="0" cy="0"/>
-        </a:xfrm>
-      </p:grpSpPr>
-      <p:sp>
-        <p:nvSpPr>
-          <p:cNvPr id="3" name="Marcador de contenido 2">
-            <a:extLst>
-              <a:ext uri="{FF2B5EF4-FFF2-40B4-BE49-F238E27FC236}">
-                <a16:creationId xmlns:a16="http://schemas.microsoft.com/office/drawing/2014/main" id="{4D47E8E9-88AF-B6C0-5243-259089C2CBB6}"/>
-              </a:ext>
-            </a:extLst>
-          </p:cNvPr>
-          <p:cNvSpPr>
-            <a:spLocks noGrp="1"/>
-          </p:cNvSpPr>
-          <p:nvPr>
-            <p:ph sz="quarter" idx="15"/>
-          </p:nvPr>
-        </p:nvSpPr>
-        <p:spPr>
-          <a:xfrm>
-            <a:off x="629079" y="1325379"/>
-            <a:ext cx="7885836" cy="3024335"/>
-          </a:xfrm>
-        </p:spPr>
-        <p:txBody>
-          <a:bodyPr>
-            <a:normAutofit fontScale="92500" lnSpcReduction="20000"/>
-          </a:bodyPr>
-          <a:lstStyle/>
-          <a:p>
-            <a:pPr marL="342900" indent="-342900" algn="just">
-              <a:lnSpc>
-                <a:spcPct val="170000"/>
-              </a:lnSpc>
-              <a:buFont typeface="Arial" panose="020B0604020202020204" pitchFamily="34" charset="0"/>
-              <a:buChar char="•"/>
-            </a:pPr>
-            <a:r>
-              <a:rPr lang="es-MX" sz="1600" noProof="0" dirty="0">
-                <a:solidFill>
-                  <a:schemeClr val="tx1"/>
-                </a:solidFill>
-              </a:rPr>
-              <a:t>¿En qué contextos y escenarios han sido evaluadas las medidas identificadas, qué tipos de ataques abordan y qué criterios se utilizan para determinar su efectividad?</a:t>
-            </a:r>
-          </a:p>
-          <a:p>
-            <a:pPr algn="just">
-              <a:lnSpc>
-                <a:spcPct val="170000"/>
-              </a:lnSpc>
-            </a:pPr>
-            <a:endParaRPr lang="es-MX" sz="1600" noProof="0" dirty="0">
-              <a:solidFill>
-                <a:schemeClr val="tx1"/>
-              </a:solidFill>
-            </a:endParaRPr>
-          </a:p>
-          <a:p>
-            <a:pPr marL="342900" indent="-342900" algn="just">
-              <a:lnSpc>
-                <a:spcPct val="170000"/>
-              </a:lnSpc>
-              <a:buFont typeface="Arial" panose="020B0604020202020204" pitchFamily="34" charset="0"/>
-              <a:buChar char="•"/>
-            </a:pPr>
-            <a:r>
-              <a:rPr lang="es-MX" sz="1600" noProof="0" dirty="0">
-                <a:solidFill>
-                  <a:schemeClr val="tx1"/>
-                </a:solidFill>
-              </a:rPr>
-              <a:t>¿Qué limitaciones y compromisos entre seguridad, utilidad, rendimiento, costo o complejidad de implementación han sido reportados para las medidas analizadas?</a:t>
-            </a:r>
-          </a:p>
-          <a:p>
-            <a:pPr algn="just">
-              <a:lnSpc>
-                <a:spcPct val="170000"/>
-              </a:lnSpc>
-            </a:pPr>
-            <a:endParaRPr lang="es-MX" sz="1600" noProof="0" dirty="0">
-              <a:solidFill>
-                <a:schemeClr val="tx1"/>
-              </a:solidFill>
-            </a:endParaRPr>
-          </a:p>
-          <a:p>
-            <a:pPr marL="342900" indent="-342900" algn="just">
-              <a:lnSpc>
-                <a:spcPct val="170000"/>
-              </a:lnSpc>
-              <a:buFont typeface="Arial" panose="020B0604020202020204" pitchFamily="34" charset="0"/>
-              <a:buChar char="•"/>
-            </a:pPr>
-            <a:r>
-              <a:rPr lang="es-MX" sz="1600" noProof="0" dirty="0">
-                <a:solidFill>
-                  <a:schemeClr val="tx1"/>
-                </a:solidFill>
-              </a:rPr>
-              <a:t>¿Qué cosas permanecen abiertas o insuficientemente en la literatura sobre medidas de seguridad a nivel de aplicación frente a ataques de inyección de </a:t>
-            </a:r>
-            <a:r>
-              <a:rPr lang="es-MX" sz="1600" i="1" noProof="0" dirty="0" err="1">
-                <a:solidFill>
-                  <a:schemeClr val="tx1"/>
-                </a:solidFill>
-              </a:rPr>
-              <a:t>prompt</a:t>
-            </a:r>
-            <a:r>
-              <a:rPr lang="es-MX" sz="1600" noProof="0" dirty="0">
-                <a:solidFill>
-                  <a:schemeClr val="tx1"/>
-                </a:solidFill>
-              </a:rPr>
-              <a:t>?</a:t>
-            </a:r>
-          </a:p>
-        </p:txBody>
-      </p:sp>
-      <p:sp>
-        <p:nvSpPr>
-          <p:cNvPr id="4" name="Marcador de texto 3">
-            <a:extLst>
-              <a:ext uri="{FF2B5EF4-FFF2-40B4-BE49-F238E27FC236}">
-                <a16:creationId xmlns:a16="http://schemas.microsoft.com/office/drawing/2014/main" id="{20BCABCE-A632-8AF3-DE16-10E3911691A8}"/>
-              </a:ext>
-            </a:extLst>
-          </p:cNvPr>
-          <p:cNvSpPr>
-            <a:spLocks noGrp="1"/>
-          </p:cNvSpPr>
-          <p:nvPr>
-            <p:ph type="body" sz="quarter" idx="16"/>
-          </p:nvPr>
-        </p:nvSpPr>
-        <p:spPr>
-          <a:xfrm>
-            <a:off x="574593" y="580087"/>
-            <a:ext cx="7994811" cy="407488"/>
-          </a:xfrm>
-        </p:spPr>
-        <p:txBody>
-          <a:bodyPr>
-            <a:normAutofit lnSpcReduction="10000"/>
-          </a:bodyPr>
-          <a:lstStyle/>
-          <a:p>
-            <a:pPr lvl="0">
-              <a:lnSpc>
-                <a:spcPct val="121052"/>
-              </a:lnSpc>
-              <a:spcBef>
-                <a:spcPts val="0"/>
-              </a:spcBef>
-              <a:buClr>
-                <a:schemeClr val="dk1"/>
-              </a:buClr>
-              <a:buSzPts val="1900"/>
-            </a:pPr>
-            <a:r>
-              <a:rPr lang="es-ES" b="1" dirty="0"/>
-              <a:t>Preguntas de investigación (3/3) – Preguntas complementarias </a:t>
-            </a:r>
-          </a:p>
-        </p:txBody>
-      </p:sp>
-      <p:sp>
-        <p:nvSpPr>
-          <p:cNvPr id="7" name="Google Shape;106;p14">
-            <a:extLst>
-              <a:ext uri="{FF2B5EF4-FFF2-40B4-BE49-F238E27FC236}">
-                <a16:creationId xmlns:a16="http://schemas.microsoft.com/office/drawing/2014/main" id="{799D8556-DB9D-357D-CB86-EC738CE854A3}"/>
-              </a:ext>
-            </a:extLst>
-          </p:cNvPr>
-          <p:cNvSpPr txBox="1">
-            <a:spLocks/>
-          </p:cNvSpPr>
-          <p:nvPr/>
-        </p:nvSpPr>
-        <p:spPr>
-          <a:xfrm>
-            <a:off x="179512" y="4876006"/>
-            <a:ext cx="7200800" cy="144016"/>
-          </a:xfrm>
-          <a:prstGeom prst="rect">
-            <a:avLst/>
-          </a:prstGeom>
-          <a:noFill/>
-          <a:ln>
-            <a:noFill/>
-          </a:ln>
-        </p:spPr>
-        <p:txBody>
-          <a:bodyPr spcFirstLastPara="1" vert="horz" wrap="square" lIns="36000" tIns="0" rIns="91425" bIns="45700" rtlCol="0" anchor="t" anchorCtr="0">
-            <a:noAutofit/>
-          </a:bodyPr>
-          <a:lstStyle>
-            <a:lvl1pPr algn="l" defTabSz="298227" rtl="0" eaLnBrk="1" latinLnBrk="0" hangingPunct="1">
-              <a:lnSpc>
-                <a:spcPts val="2600"/>
-              </a:lnSpc>
-              <a:spcBef>
-                <a:spcPct val="0"/>
-              </a:spcBef>
-              <a:buNone/>
-              <a:defRPr sz="2200" kern="1200">
-                <a:solidFill>
-                  <a:schemeClr val="tx1"/>
-                </a:solidFill>
-                <a:latin typeface="Gill Sans MT" panose="020B0502020104020203" pitchFamily="34" charset="0"/>
-                <a:ea typeface="+mj-ea"/>
-                <a:cs typeface="+mj-cs"/>
-              </a:defRPr>
-            </a:lvl1pPr>
-          </a:lstStyle>
-          <a:p>
-            <a:pPr>
-              <a:lnSpc>
-                <a:spcPct val="116666"/>
-              </a:lnSpc>
-              <a:spcBef>
-                <a:spcPts val="0"/>
-              </a:spcBef>
-              <a:buClr>
-                <a:schemeClr val="dk1"/>
-              </a:buClr>
-            </a:pPr>
-            <a:r>
-              <a:rPr lang="es-MX" sz="800" dirty="0"/>
-              <a:t>​​Monografía: Estado del arte de las medidas de seguridad a nivel de aplicación en el contexto de ataques de inyección de </a:t>
-            </a:r>
-            <a:r>
-              <a:rPr lang="es-MX" sz="800" i="1" dirty="0" err="1"/>
-              <a:t>prompt</a:t>
-            </a:r>
-            <a:r>
-              <a:rPr lang="es-MX" sz="800" dirty="0"/>
-              <a:t> dirigidos a sistemas basados en LLM​</a:t>
-            </a:r>
-          </a:p>
-        </p:txBody>
-      </p:sp>
-    </p:spTree>
-    <p:extLst>
-      <p:ext uri="{BB962C8B-B14F-4D97-AF65-F5344CB8AC3E}">
-        <p14:creationId xmlns:p14="http://schemas.microsoft.com/office/powerpoint/2010/main" val="3106519394"/>
-      </p:ext>
-    </p:extLst>
-  </p:cSld>
-  <p:clrMapOvr>
-    <a:masterClrMapping/>
-  </p:clrMapOvr>
-</p:sld>
-</file>
-
-<file path=ppt/slides/slide9.xml><?xml version="1.0" encoding="utf-8"?>
 <p:sld xmlns:a="http://schemas.openxmlformats.org/drawingml/2006/main" xmlns:r="http://schemas.openxmlformats.org/officeDocument/2006/relationships" xmlns:p="http://schemas.openxmlformats.org/presentationml/2006/main">
   <p:cSld>
     <p:spTree>
@@ -11401,25 +12918,23 @@
         </p:nvSpPr>
         <p:spPr>
           <a:xfrm>
-            <a:off x="458459" y="1505999"/>
-            <a:ext cx="8233694" cy="2865951"/>
+            <a:off x="3347864" y="1248088"/>
+            <a:ext cx="5337677" cy="2865951"/>
           </a:xfrm>
         </p:spPr>
         <p:txBody>
           <a:bodyPr>
-            <a:normAutofit/>
+            <a:normAutofit lnSpcReduction="10000"/>
           </a:bodyPr>
           <a:lstStyle/>
           <a:p>
-            <a:pPr marL="342900" indent="-342900" algn="just">
+            <a:pPr algn="just">
               <a:lnSpc>
                 <a:spcPct val="200000"/>
               </a:lnSpc>
-              <a:buFont typeface="Arial" panose="020B0604020202020204" pitchFamily="34" charset="0"/>
-              <a:buChar char="•"/>
             </a:pPr>
             <a:r>
-              <a:rPr lang="es-MX" sz="1800" noProof="0" dirty="0">
+              <a:rPr lang="es-MX" sz="1600" noProof="0" dirty="0">
                 <a:solidFill>
                   <a:schemeClr val="tx1"/>
                 </a:solidFill>
@@ -11427,7 +12942,7 @@
               <a:t>Analizar las medidas de seguridad a nivel de aplicación frente a ataques de inyección de </a:t>
             </a:r>
             <a:r>
-              <a:rPr lang="es-MX" sz="1800" i="1" noProof="0" dirty="0" err="1">
+              <a:rPr lang="es-MX" sz="1600" i="1" noProof="0" dirty="0" err="1">
                 <a:solidFill>
                   <a:schemeClr val="tx1"/>
                 </a:solidFill>
@@ -11435,7 +12950,7 @@
               <a:t>prompt</a:t>
             </a:r>
             <a:r>
-              <a:rPr lang="es-MX" sz="1800" noProof="0" dirty="0">
+              <a:rPr lang="es-MX" sz="1600" noProof="0" dirty="0">
                 <a:solidFill>
                   <a:schemeClr val="tx1"/>
                 </a:solidFill>
@@ -11457,7 +12972,7 @@
         </p:nvSpPr>
         <p:spPr>
           <a:xfrm>
-            <a:off x="550841" y="771551"/>
+            <a:off x="539552" y="605898"/>
             <a:ext cx="4525215" cy="648072"/>
           </a:xfrm>
         </p:spPr>
@@ -11472,7 +12987,15 @@
             </a:pPr>
             <a:r>
               <a:rPr lang="es-MX" b="1" noProof="0" dirty="0"/>
-              <a:t>Objetivos (1/2) - Objetivo general</a:t>
+              <a:t>Objetivos (1/</a:t>
+            </a:r>
+            <a:r>
+              <a:rPr lang="es-MX" b="1" dirty="0"/>
+              <a:t>2</a:t>
+            </a:r>
+            <a:r>
+              <a:rPr lang="es-MX" b="1" noProof="0" dirty="0"/>
+              <a:t>) - Objetivo general</a:t>
             </a:r>
           </a:p>
         </p:txBody>
@@ -11554,10 +13077,627 @@
           </a:p>
         </p:txBody>
       </p:sp>
+      <p:pic>
+        <p:nvPicPr>
+          <p:cNvPr id="3" name="Imagen 2" descr="ilustraciones, imágenes clip art, dibujos animados e iconos de stock de objetivo de negocio, tablero de dardos, icono de objetivo - objetivos">
+            <a:extLst>
+              <a:ext uri="{FF2B5EF4-FFF2-40B4-BE49-F238E27FC236}">
+                <a16:creationId xmlns:a16="http://schemas.microsoft.com/office/drawing/2014/main" id="{B199723B-E06E-0EA8-D558-0D43D5139EBE}"/>
+              </a:ext>
+            </a:extLst>
+          </p:cNvPr>
+          <p:cNvPicPr>
+            <a:picLocks noChangeAspect="1"/>
+          </p:cNvPicPr>
+          <p:nvPr/>
+        </p:nvPicPr>
+        <p:blipFill>
+          <a:blip r:embed="rId2"/>
+          <a:stretch>
+            <a:fillRect/>
+          </a:stretch>
+        </p:blipFill>
+        <p:spPr>
+          <a:xfrm>
+            <a:off x="458459" y="1247633"/>
+            <a:ext cx="2648234" cy="2648234"/>
+          </a:xfrm>
+          <a:prstGeom prst="rect">
+            <a:avLst/>
+          </a:prstGeom>
+        </p:spPr>
+      </p:pic>
+      <p:sp>
+        <p:nvSpPr>
+          <p:cNvPr id="4" name="Marcador de número de diapositiva 1">
+            <a:extLst>
+              <a:ext uri="{FF2B5EF4-FFF2-40B4-BE49-F238E27FC236}">
+                <a16:creationId xmlns:a16="http://schemas.microsoft.com/office/drawing/2014/main" id="{5B8B6F36-B13C-502C-3B62-99065795C128}"/>
+              </a:ext>
+            </a:extLst>
+          </p:cNvPr>
+          <p:cNvSpPr txBox="1">
+            <a:spLocks/>
+          </p:cNvSpPr>
+          <p:nvPr/>
+        </p:nvSpPr>
+        <p:spPr>
+          <a:xfrm>
+            <a:off x="8572939" y="4679206"/>
+            <a:ext cx="548700" cy="393600"/>
+          </a:xfrm>
+          <a:prstGeom prst="rect">
+            <a:avLst/>
+          </a:prstGeom>
+        </p:spPr>
+        <p:txBody>
+          <a:bodyPr/>
+          <a:lstStyle>
+            <a:defPPr>
+              <a:defRPr lang="es-MX"/>
+            </a:defPPr>
+            <a:lvl1pPr marL="0" algn="l" defTabSz="1412243" rtl="0" eaLnBrk="1" latinLnBrk="0" hangingPunct="1">
+              <a:defRPr sz="2779" kern="1200">
+                <a:solidFill>
+                  <a:schemeClr val="tx1"/>
+                </a:solidFill>
+                <a:latin typeface="+mn-lt"/>
+                <a:ea typeface="+mn-ea"/>
+                <a:cs typeface="+mn-cs"/>
+              </a:defRPr>
+            </a:lvl1pPr>
+            <a:lvl2pPr marL="706122" algn="l" defTabSz="1412243" rtl="0" eaLnBrk="1" latinLnBrk="0" hangingPunct="1">
+              <a:defRPr sz="2779" kern="1200">
+                <a:solidFill>
+                  <a:schemeClr val="tx1"/>
+                </a:solidFill>
+                <a:latin typeface="+mn-lt"/>
+                <a:ea typeface="+mn-ea"/>
+                <a:cs typeface="+mn-cs"/>
+              </a:defRPr>
+            </a:lvl2pPr>
+            <a:lvl3pPr marL="1412243" algn="l" defTabSz="1412243" rtl="0" eaLnBrk="1" latinLnBrk="0" hangingPunct="1">
+              <a:defRPr sz="2779" kern="1200">
+                <a:solidFill>
+                  <a:schemeClr val="tx1"/>
+                </a:solidFill>
+                <a:latin typeface="+mn-lt"/>
+                <a:ea typeface="+mn-ea"/>
+                <a:cs typeface="+mn-cs"/>
+              </a:defRPr>
+            </a:lvl3pPr>
+            <a:lvl4pPr marL="2118365" algn="l" defTabSz="1412243" rtl="0" eaLnBrk="1" latinLnBrk="0" hangingPunct="1">
+              <a:defRPr sz="2779" kern="1200">
+                <a:solidFill>
+                  <a:schemeClr val="tx1"/>
+                </a:solidFill>
+                <a:latin typeface="+mn-lt"/>
+                <a:ea typeface="+mn-ea"/>
+                <a:cs typeface="+mn-cs"/>
+              </a:defRPr>
+            </a:lvl4pPr>
+            <a:lvl5pPr marL="2824487" algn="l" defTabSz="1412243" rtl="0" eaLnBrk="1" latinLnBrk="0" hangingPunct="1">
+              <a:defRPr sz="2779" kern="1200">
+                <a:solidFill>
+                  <a:schemeClr val="tx1"/>
+                </a:solidFill>
+                <a:latin typeface="+mn-lt"/>
+                <a:ea typeface="+mn-ea"/>
+                <a:cs typeface="+mn-cs"/>
+              </a:defRPr>
+            </a:lvl5pPr>
+            <a:lvl6pPr marL="3530609" algn="l" defTabSz="1412243" rtl="0" eaLnBrk="1" latinLnBrk="0" hangingPunct="1">
+              <a:defRPr sz="2779" kern="1200">
+                <a:solidFill>
+                  <a:schemeClr val="tx1"/>
+                </a:solidFill>
+                <a:latin typeface="+mn-lt"/>
+                <a:ea typeface="+mn-ea"/>
+                <a:cs typeface="+mn-cs"/>
+              </a:defRPr>
+            </a:lvl6pPr>
+            <a:lvl7pPr marL="4236730" algn="l" defTabSz="1412243" rtl="0" eaLnBrk="1" latinLnBrk="0" hangingPunct="1">
+              <a:defRPr sz="2779" kern="1200">
+                <a:solidFill>
+                  <a:schemeClr val="tx1"/>
+                </a:solidFill>
+                <a:latin typeface="+mn-lt"/>
+                <a:ea typeface="+mn-ea"/>
+                <a:cs typeface="+mn-cs"/>
+              </a:defRPr>
+            </a:lvl7pPr>
+            <a:lvl8pPr marL="4942852" algn="l" defTabSz="1412243" rtl="0" eaLnBrk="1" latinLnBrk="0" hangingPunct="1">
+              <a:defRPr sz="2779" kern="1200">
+                <a:solidFill>
+                  <a:schemeClr val="tx1"/>
+                </a:solidFill>
+                <a:latin typeface="+mn-lt"/>
+                <a:ea typeface="+mn-ea"/>
+                <a:cs typeface="+mn-cs"/>
+              </a:defRPr>
+            </a:lvl8pPr>
+            <a:lvl9pPr marL="5648974" algn="l" defTabSz="1412243" rtl="0" eaLnBrk="1" latinLnBrk="0" hangingPunct="1">
+              <a:defRPr sz="2779" kern="1200">
+                <a:solidFill>
+                  <a:schemeClr val="tx1"/>
+                </a:solidFill>
+                <a:latin typeface="+mn-lt"/>
+                <a:ea typeface="+mn-ea"/>
+                <a:cs typeface="+mn-cs"/>
+              </a:defRPr>
+            </a:lvl9pPr>
+          </a:lstStyle>
+          <a:p>
+            <a:pPr algn="r"/>
+            <a:r>
+              <a:rPr lang="es-ES" dirty="0"/>
+              <a:t>7</a:t>
+            </a:r>
+          </a:p>
+        </p:txBody>
+      </p:sp>
     </p:spTree>
     <p:extLst>
       <p:ext uri="{BB962C8B-B14F-4D97-AF65-F5344CB8AC3E}">
         <p14:creationId xmlns:p14="http://schemas.microsoft.com/office/powerpoint/2010/main" val="2211088775"/>
+      </p:ext>
+    </p:extLst>
+  </p:cSld>
+  <p:clrMapOvr>
+    <a:masterClrMapping/>
+  </p:clrMapOvr>
+</p:sld>
+</file>
+
+<file path=ppt/slides/slide9.xml><?xml version="1.0" encoding="utf-8"?>
+<p:sld xmlns:a="http://schemas.openxmlformats.org/drawingml/2006/main" xmlns:r="http://schemas.openxmlformats.org/officeDocument/2006/relationships" xmlns:p="http://schemas.openxmlformats.org/presentationml/2006/main">
+  <p:cSld>
+    <p:spTree>
+      <p:nvGrpSpPr>
+        <p:cNvPr id="1" name="">
+          <a:extLst>
+            <a:ext uri="{FF2B5EF4-FFF2-40B4-BE49-F238E27FC236}">
+              <a16:creationId xmlns:a16="http://schemas.microsoft.com/office/drawing/2014/main" id="{E12D506B-01F4-2F26-EC3E-60C4CE7DBE36}"/>
+            </a:ext>
+          </a:extLst>
+        </p:cNvPr>
+        <p:cNvGrpSpPr/>
+        <p:nvPr/>
+      </p:nvGrpSpPr>
+      <p:grpSpPr>
+        <a:xfrm>
+          <a:off x="0" y="0"/>
+          <a:ext cx="0" cy="0"/>
+          <a:chOff x="0" y="0"/>
+          <a:chExt cx="0" cy="0"/>
+        </a:xfrm>
+      </p:grpSpPr>
+      <p:sp>
+        <p:nvSpPr>
+          <p:cNvPr id="3" name="Marcador de contenido 2">
+            <a:extLst>
+              <a:ext uri="{FF2B5EF4-FFF2-40B4-BE49-F238E27FC236}">
+                <a16:creationId xmlns:a16="http://schemas.microsoft.com/office/drawing/2014/main" id="{588CB29A-C4FE-7078-1DC2-D2E27CB5BECC}"/>
+              </a:ext>
+            </a:extLst>
+          </p:cNvPr>
+          <p:cNvSpPr>
+            <a:spLocks noGrp="1"/>
+          </p:cNvSpPr>
+          <p:nvPr>
+            <p:ph sz="quarter" idx="15"/>
+          </p:nvPr>
+        </p:nvSpPr>
+        <p:spPr>
+          <a:xfrm>
+            <a:off x="560238" y="1123721"/>
+            <a:ext cx="8208913" cy="3536261"/>
+          </a:xfrm>
+        </p:spPr>
+        <p:txBody>
+          <a:bodyPr>
+            <a:normAutofit fontScale="92500"/>
+          </a:bodyPr>
+          <a:lstStyle/>
+          <a:p>
+            <a:pPr marL="342900" indent="-342900" algn="just">
+              <a:lnSpc>
+                <a:spcPct val="150000"/>
+              </a:lnSpc>
+              <a:buFont typeface="Arial" panose="020B0604020202020204" pitchFamily="34" charset="0"/>
+              <a:buChar char="•"/>
+            </a:pPr>
+            <a:r>
+              <a:rPr lang="es-MX" sz="1400" noProof="0" dirty="0">
+                <a:solidFill>
+                  <a:schemeClr val="tx1"/>
+                </a:solidFill>
+              </a:rPr>
+              <a:t>OE-01: Identificar los ataques de inyección de </a:t>
+            </a:r>
+            <a:r>
+              <a:rPr lang="es-MX" sz="1400" i="1" noProof="0" dirty="0" err="1">
+                <a:solidFill>
+                  <a:schemeClr val="tx1"/>
+                </a:solidFill>
+              </a:rPr>
+              <a:t>prompt</a:t>
+            </a:r>
+            <a:r>
+              <a:rPr lang="es-MX" sz="1400" noProof="0" dirty="0">
+                <a:solidFill>
+                  <a:schemeClr val="tx1"/>
+                </a:solidFill>
+              </a:rPr>
+              <a:t> que pueden ser mitigados desde el lado de la aplicación.</a:t>
+            </a:r>
+          </a:p>
+          <a:p>
+            <a:pPr marL="342900" indent="-342900" algn="just">
+              <a:lnSpc>
+                <a:spcPct val="150000"/>
+              </a:lnSpc>
+              <a:buFont typeface="Arial" panose="020B0604020202020204" pitchFamily="34" charset="0"/>
+              <a:buChar char="•"/>
+            </a:pPr>
+            <a:r>
+              <a:rPr lang="es-MX" sz="1400" noProof="0" dirty="0">
+                <a:solidFill>
+                  <a:schemeClr val="tx1"/>
+                </a:solidFill>
+              </a:rPr>
+              <a:t>OE-02: Analizar las medidas de seguridad a nivel de aplicación propuestas en la literatura reciente para mitigar los ataques de inyección de </a:t>
+            </a:r>
+            <a:r>
+              <a:rPr lang="es-MX" sz="1400" i="1" noProof="0" dirty="0" err="1">
+                <a:solidFill>
+                  <a:schemeClr val="tx1"/>
+                </a:solidFill>
+              </a:rPr>
+              <a:t>prompt</a:t>
+            </a:r>
+            <a:r>
+              <a:rPr lang="es-MX" sz="1400" noProof="0" dirty="0">
+                <a:solidFill>
+                  <a:schemeClr val="tx1"/>
+                </a:solidFill>
+              </a:rPr>
+              <a:t> en sistemas basados en LLM.</a:t>
+            </a:r>
+          </a:p>
+          <a:p>
+            <a:pPr marL="342900" indent="-342900" algn="just">
+              <a:lnSpc>
+                <a:spcPct val="150000"/>
+              </a:lnSpc>
+              <a:buFont typeface="Arial" panose="020B0604020202020204" pitchFamily="34" charset="0"/>
+              <a:buChar char="•"/>
+            </a:pPr>
+            <a:r>
+              <a:rPr lang="es-MX" sz="1400" noProof="0" dirty="0">
+                <a:solidFill>
+                  <a:schemeClr val="tx1"/>
+                </a:solidFill>
+              </a:rPr>
+              <a:t>OE-03: Clasificar las medidas de seguridad identificadas de acuerdo con el punto de intervención dentro del sistema.</a:t>
+            </a:r>
+          </a:p>
+          <a:p>
+            <a:pPr marL="342900" indent="-342900" algn="just">
+              <a:lnSpc>
+                <a:spcPct val="150000"/>
+              </a:lnSpc>
+              <a:buFont typeface="Arial" panose="020B0604020202020204" pitchFamily="34" charset="0"/>
+              <a:buChar char="•"/>
+            </a:pPr>
+            <a:r>
+              <a:rPr lang="es-MX" sz="1400" noProof="0" dirty="0">
+                <a:solidFill>
+                  <a:schemeClr val="tx1"/>
+                </a:solidFill>
+              </a:rPr>
+              <a:t>OE-04: Identificar las taxonomías existentes para clasificar las mitigaciones de ataques de inyección de </a:t>
+            </a:r>
+            <a:r>
+              <a:rPr lang="es-MX" sz="1400" noProof="0" dirty="0" err="1">
+                <a:solidFill>
+                  <a:schemeClr val="tx1"/>
+                </a:solidFill>
+              </a:rPr>
+              <a:t>prompt</a:t>
+            </a:r>
+            <a:r>
+              <a:rPr lang="es-MX" sz="1400" noProof="0" dirty="0">
+                <a:solidFill>
+                  <a:schemeClr val="tx1"/>
+                </a:solidFill>
+              </a:rPr>
+              <a:t> a nivel de aplicación.</a:t>
+            </a:r>
+          </a:p>
+          <a:p>
+            <a:pPr marL="342900" indent="-342900" algn="just">
+              <a:lnSpc>
+                <a:spcPct val="150000"/>
+              </a:lnSpc>
+              <a:buFont typeface="Arial" panose="020B0604020202020204" pitchFamily="34" charset="0"/>
+              <a:buChar char="•"/>
+            </a:pPr>
+            <a:r>
+              <a:rPr lang="es-MX" sz="1400" noProof="0" dirty="0">
+                <a:solidFill>
+                  <a:schemeClr val="tx1"/>
+                </a:solidFill>
+              </a:rPr>
+              <a:t>OE-05: Analizar las formas en las que se evalúan las medidas de seguridad reportadas en la literatura considerando los tipos de ataques abordados, contextos de aplicación, criterios de evaluación, efectividad, impacto sobre la utilidad y limitaciones.</a:t>
+            </a:r>
+          </a:p>
+          <a:p>
+            <a:pPr marL="342900" indent="-342900" algn="just">
+              <a:lnSpc>
+                <a:spcPct val="150000"/>
+              </a:lnSpc>
+              <a:buFont typeface="Arial" panose="020B0604020202020204" pitchFamily="34" charset="0"/>
+              <a:buChar char="•"/>
+            </a:pPr>
+            <a:r>
+              <a:rPr lang="es-MX" sz="1400" noProof="0" dirty="0">
+                <a:solidFill>
+                  <a:schemeClr val="tx1"/>
+                </a:solidFill>
+              </a:rPr>
+              <a:t>OE-06: Discutir los alcances y limitaciones que permanezcan abiertos para futuras investigaciones.</a:t>
+            </a:r>
+          </a:p>
+        </p:txBody>
+      </p:sp>
+      <p:sp>
+        <p:nvSpPr>
+          <p:cNvPr id="4" name="Marcador de texto 3">
+            <a:extLst>
+              <a:ext uri="{FF2B5EF4-FFF2-40B4-BE49-F238E27FC236}">
+                <a16:creationId xmlns:a16="http://schemas.microsoft.com/office/drawing/2014/main" id="{5E16FE36-B834-A692-EE0B-B6D28EC6B825}"/>
+              </a:ext>
+            </a:extLst>
+          </p:cNvPr>
+          <p:cNvSpPr>
+            <a:spLocks noGrp="1"/>
+          </p:cNvSpPr>
+          <p:nvPr>
+            <p:ph type="body" sz="quarter" idx="16"/>
+          </p:nvPr>
+        </p:nvSpPr>
+        <p:spPr>
+          <a:xfrm>
+            <a:off x="574593" y="580087"/>
+            <a:ext cx="7994811" cy="407488"/>
+          </a:xfrm>
+        </p:spPr>
+        <p:txBody>
+          <a:bodyPr/>
+          <a:lstStyle/>
+          <a:p>
+            <a:r>
+              <a:rPr lang="es-MX" b="1" dirty="0"/>
+              <a:t>Objetivos (2/2) - </a:t>
+            </a:r>
+            <a:r>
+              <a:rPr lang="es-MX" b="1" noProof="0" dirty="0"/>
+              <a:t>Objetivos específicos</a:t>
+            </a:r>
+          </a:p>
+        </p:txBody>
+      </p:sp>
+      <p:sp>
+        <p:nvSpPr>
+          <p:cNvPr id="7" name="Google Shape;106;p14">
+            <a:extLst>
+              <a:ext uri="{FF2B5EF4-FFF2-40B4-BE49-F238E27FC236}">
+                <a16:creationId xmlns:a16="http://schemas.microsoft.com/office/drawing/2014/main" id="{0CF51A61-BD70-06C9-75A3-CB358F9D1EE2}"/>
+              </a:ext>
+            </a:extLst>
+          </p:cNvPr>
+          <p:cNvSpPr txBox="1">
+            <a:spLocks/>
+          </p:cNvSpPr>
+          <p:nvPr/>
+        </p:nvSpPr>
+        <p:spPr>
+          <a:xfrm>
+            <a:off x="179512" y="4876006"/>
+            <a:ext cx="7200800" cy="144016"/>
+          </a:xfrm>
+          <a:prstGeom prst="rect">
+            <a:avLst/>
+          </a:prstGeom>
+          <a:noFill/>
+          <a:ln>
+            <a:noFill/>
+          </a:ln>
+        </p:spPr>
+        <p:txBody>
+          <a:bodyPr spcFirstLastPara="1" vert="horz" wrap="square" lIns="36000" tIns="0" rIns="91425" bIns="45700" rtlCol="0" anchor="t" anchorCtr="0">
+            <a:noAutofit/>
+          </a:bodyPr>
+          <a:lstStyle>
+            <a:lvl1pPr algn="l" defTabSz="298227" rtl="0" eaLnBrk="1" latinLnBrk="0" hangingPunct="1">
+              <a:lnSpc>
+                <a:spcPts val="2600"/>
+              </a:lnSpc>
+              <a:spcBef>
+                <a:spcPct val="0"/>
+              </a:spcBef>
+              <a:buNone/>
+              <a:defRPr sz="2200" kern="1200">
+                <a:solidFill>
+                  <a:schemeClr val="tx1"/>
+                </a:solidFill>
+                <a:latin typeface="Gill Sans MT" panose="020B0502020104020203" pitchFamily="34" charset="0"/>
+                <a:ea typeface="+mj-ea"/>
+                <a:cs typeface="+mj-cs"/>
+              </a:defRPr>
+            </a:lvl1pPr>
+          </a:lstStyle>
+          <a:p>
+            <a:pPr>
+              <a:lnSpc>
+                <a:spcPct val="116666"/>
+              </a:lnSpc>
+              <a:spcBef>
+                <a:spcPts val="0"/>
+              </a:spcBef>
+              <a:buClr>
+                <a:schemeClr val="dk1"/>
+              </a:buClr>
+            </a:pPr>
+            <a:r>
+              <a:rPr lang="es-MX" sz="800" dirty="0"/>
+              <a:t>​​Monografía: Estado del arte de las medidas de seguridad a nivel de aplicación en el contexto de ataques de inyección de </a:t>
+            </a:r>
+            <a:r>
+              <a:rPr lang="es-MX" sz="800" i="1" dirty="0" err="1"/>
+              <a:t>prompt</a:t>
+            </a:r>
+            <a:r>
+              <a:rPr lang="es-MX" sz="800" dirty="0"/>
+              <a:t> dirigidos a sistemas basados en LLM​</a:t>
+            </a:r>
+          </a:p>
+        </p:txBody>
+      </p:sp>
+      <p:sp>
+        <p:nvSpPr>
+          <p:cNvPr id="2" name="Marcador de número de diapositiva 1">
+            <a:extLst>
+              <a:ext uri="{FF2B5EF4-FFF2-40B4-BE49-F238E27FC236}">
+                <a16:creationId xmlns:a16="http://schemas.microsoft.com/office/drawing/2014/main" id="{99BB89F3-DAA2-E5EF-65B7-7B634887A93C}"/>
+              </a:ext>
+            </a:extLst>
+          </p:cNvPr>
+          <p:cNvSpPr txBox="1">
+            <a:spLocks/>
+          </p:cNvSpPr>
+          <p:nvPr/>
+        </p:nvSpPr>
+        <p:spPr>
+          <a:xfrm>
+            <a:off x="8559060" y="4679206"/>
+            <a:ext cx="548700" cy="393600"/>
+          </a:xfrm>
+          <a:prstGeom prst="rect">
+            <a:avLst/>
+          </a:prstGeom>
+        </p:spPr>
+        <p:txBody>
+          <a:bodyPr/>
+          <a:lstStyle>
+            <a:defPPr>
+              <a:defRPr lang="es-MX"/>
+            </a:defPPr>
+            <a:lvl1pPr marL="0" algn="l" defTabSz="1412243" rtl="0" eaLnBrk="1" latinLnBrk="0" hangingPunct="1">
+              <a:defRPr sz="2779" kern="1200">
+                <a:solidFill>
+                  <a:schemeClr val="tx1"/>
+                </a:solidFill>
+                <a:latin typeface="+mn-lt"/>
+                <a:ea typeface="+mn-ea"/>
+                <a:cs typeface="+mn-cs"/>
+              </a:defRPr>
+            </a:lvl1pPr>
+            <a:lvl2pPr marL="706122" algn="l" defTabSz="1412243" rtl="0" eaLnBrk="1" latinLnBrk="0" hangingPunct="1">
+              <a:defRPr sz="2779" kern="1200">
+                <a:solidFill>
+                  <a:schemeClr val="tx1"/>
+                </a:solidFill>
+                <a:latin typeface="+mn-lt"/>
+                <a:ea typeface="+mn-ea"/>
+                <a:cs typeface="+mn-cs"/>
+              </a:defRPr>
+            </a:lvl2pPr>
+            <a:lvl3pPr marL="1412243" algn="l" defTabSz="1412243" rtl="0" eaLnBrk="1" latinLnBrk="0" hangingPunct="1">
+              <a:defRPr sz="2779" kern="1200">
+                <a:solidFill>
+                  <a:schemeClr val="tx1"/>
+                </a:solidFill>
+                <a:latin typeface="+mn-lt"/>
+                <a:ea typeface="+mn-ea"/>
+                <a:cs typeface="+mn-cs"/>
+              </a:defRPr>
+            </a:lvl3pPr>
+            <a:lvl4pPr marL="2118365" algn="l" defTabSz="1412243" rtl="0" eaLnBrk="1" latinLnBrk="0" hangingPunct="1">
+              <a:defRPr sz="2779" kern="1200">
+                <a:solidFill>
+                  <a:schemeClr val="tx1"/>
+                </a:solidFill>
+                <a:latin typeface="+mn-lt"/>
+                <a:ea typeface="+mn-ea"/>
+                <a:cs typeface="+mn-cs"/>
+              </a:defRPr>
+            </a:lvl4pPr>
+            <a:lvl5pPr marL="2824487" algn="l" defTabSz="1412243" rtl="0" eaLnBrk="1" latinLnBrk="0" hangingPunct="1">
+              <a:defRPr sz="2779" kern="1200">
+                <a:solidFill>
+                  <a:schemeClr val="tx1"/>
+                </a:solidFill>
+                <a:latin typeface="+mn-lt"/>
+                <a:ea typeface="+mn-ea"/>
+                <a:cs typeface="+mn-cs"/>
+              </a:defRPr>
+            </a:lvl5pPr>
+            <a:lvl6pPr marL="3530609" algn="l" defTabSz="1412243" rtl="0" eaLnBrk="1" latinLnBrk="0" hangingPunct="1">
+              <a:defRPr sz="2779" kern="1200">
+                <a:solidFill>
+                  <a:schemeClr val="tx1"/>
+                </a:solidFill>
+                <a:latin typeface="+mn-lt"/>
+                <a:ea typeface="+mn-ea"/>
+                <a:cs typeface="+mn-cs"/>
+              </a:defRPr>
+            </a:lvl6pPr>
+            <a:lvl7pPr marL="4236730" algn="l" defTabSz="1412243" rtl="0" eaLnBrk="1" latinLnBrk="0" hangingPunct="1">
+              <a:defRPr sz="2779" kern="1200">
+                <a:solidFill>
+                  <a:schemeClr val="tx1"/>
+                </a:solidFill>
+                <a:latin typeface="+mn-lt"/>
+                <a:ea typeface="+mn-ea"/>
+                <a:cs typeface="+mn-cs"/>
+              </a:defRPr>
+            </a:lvl7pPr>
+            <a:lvl8pPr marL="4942852" algn="l" defTabSz="1412243" rtl="0" eaLnBrk="1" latinLnBrk="0" hangingPunct="1">
+              <a:defRPr sz="2779" kern="1200">
+                <a:solidFill>
+                  <a:schemeClr val="tx1"/>
+                </a:solidFill>
+                <a:latin typeface="+mn-lt"/>
+                <a:ea typeface="+mn-ea"/>
+                <a:cs typeface="+mn-cs"/>
+              </a:defRPr>
+            </a:lvl8pPr>
+            <a:lvl9pPr marL="5648974" algn="l" defTabSz="1412243" rtl="0" eaLnBrk="1" latinLnBrk="0" hangingPunct="1">
+              <a:defRPr sz="2779" kern="1200">
+                <a:solidFill>
+                  <a:schemeClr val="tx1"/>
+                </a:solidFill>
+                <a:latin typeface="+mn-lt"/>
+                <a:ea typeface="+mn-ea"/>
+                <a:cs typeface="+mn-cs"/>
+              </a:defRPr>
+            </a:lvl9pPr>
+          </a:lstStyle>
+          <a:p>
+            <a:pPr algn="r"/>
+            <a:r>
+              <a:rPr lang="es-ES" dirty="0"/>
+              <a:t>8</a:t>
+            </a:r>
+          </a:p>
+        </p:txBody>
+      </p:sp>
+    </p:spTree>
+    <p:extLst>
+      <p:ext uri="{BB962C8B-B14F-4D97-AF65-F5344CB8AC3E}">
+        <p14:creationId xmlns:p14="http://schemas.microsoft.com/office/powerpoint/2010/main" val="610408008"/>
       </p:ext>
     </p:extLst>
   </p:cSld>
